--- a/PPT/자연어처리_정리.pptx
+++ b/PPT/자연어처리_정리.pptx
@@ -5,7 +5,7 @@
     <p:sldMasterId id="2147483648" r:id="rId1"/>
   </p:sldMasterIdLst>
   <p:notesMasterIdLst>
-    <p:notesMasterId r:id="rId36"/>
+    <p:notesMasterId r:id="rId35"/>
   </p:notesMasterIdLst>
   <p:sldIdLst>
     <p:sldId id="334" r:id="rId2"/>
@@ -14,34 +14,33 @@
     <p:sldId id="335" r:id="rId5"/>
     <p:sldId id="343" r:id="rId6"/>
     <p:sldId id="367" r:id="rId7"/>
-    <p:sldId id="368" r:id="rId8"/>
-    <p:sldId id="336" r:id="rId9"/>
-    <p:sldId id="337" r:id="rId10"/>
-    <p:sldId id="338" r:id="rId11"/>
-    <p:sldId id="344" r:id="rId12"/>
-    <p:sldId id="345" r:id="rId13"/>
-    <p:sldId id="346" r:id="rId14"/>
-    <p:sldId id="347" r:id="rId15"/>
-    <p:sldId id="348" r:id="rId16"/>
-    <p:sldId id="349" r:id="rId17"/>
-    <p:sldId id="350" r:id="rId18"/>
-    <p:sldId id="351" r:id="rId19"/>
-    <p:sldId id="352" r:id="rId20"/>
-    <p:sldId id="353" r:id="rId21"/>
-    <p:sldId id="354" r:id="rId22"/>
-    <p:sldId id="355" r:id="rId23"/>
-    <p:sldId id="356" r:id="rId24"/>
-    <p:sldId id="364" r:id="rId25"/>
-    <p:sldId id="365" r:id="rId26"/>
-    <p:sldId id="363" r:id="rId27"/>
-    <p:sldId id="357" r:id="rId28"/>
-    <p:sldId id="358" r:id="rId29"/>
-    <p:sldId id="359" r:id="rId30"/>
-    <p:sldId id="360" r:id="rId31"/>
-    <p:sldId id="361" r:id="rId32"/>
-    <p:sldId id="362" r:id="rId33"/>
-    <p:sldId id="366" r:id="rId34"/>
-    <p:sldId id="321" r:id="rId35"/>
+    <p:sldId id="336" r:id="rId8"/>
+    <p:sldId id="337" r:id="rId9"/>
+    <p:sldId id="338" r:id="rId10"/>
+    <p:sldId id="344" r:id="rId11"/>
+    <p:sldId id="345" r:id="rId12"/>
+    <p:sldId id="346" r:id="rId13"/>
+    <p:sldId id="347" r:id="rId14"/>
+    <p:sldId id="348" r:id="rId15"/>
+    <p:sldId id="349" r:id="rId16"/>
+    <p:sldId id="350" r:id="rId17"/>
+    <p:sldId id="351" r:id="rId18"/>
+    <p:sldId id="352" r:id="rId19"/>
+    <p:sldId id="353" r:id="rId20"/>
+    <p:sldId id="354" r:id="rId21"/>
+    <p:sldId id="355" r:id="rId22"/>
+    <p:sldId id="356" r:id="rId23"/>
+    <p:sldId id="364" r:id="rId24"/>
+    <p:sldId id="365" r:id="rId25"/>
+    <p:sldId id="363" r:id="rId26"/>
+    <p:sldId id="357" r:id="rId27"/>
+    <p:sldId id="358" r:id="rId28"/>
+    <p:sldId id="359" r:id="rId29"/>
+    <p:sldId id="360" r:id="rId30"/>
+    <p:sldId id="361" r:id="rId31"/>
+    <p:sldId id="362" r:id="rId32"/>
+    <p:sldId id="366" r:id="rId33"/>
+    <p:sldId id="321" r:id="rId34"/>
   </p:sldIdLst>
   <p:sldSz cx="9144000" cy="6858000" type="screen4x3"/>
   <p:notesSz cx="6858000" cy="9144000"/>
@@ -245,7 +244,7 @@
             <a:fld id="{65771C21-3757-4199-83DE-22960358A2A5}" type="datetimeFigureOut">
               <a:rPr lang="ko-KR" altLang="en-US" smtClean="0"/>
               <a:pPr/>
-              <a:t>2025-11-13</a:t>
+              <a:t>2026-05-27</a:t>
             </a:fld>
             <a:endParaRPr lang="ko-KR" altLang="en-US"/>
           </a:p>
@@ -727,7 +726,7 @@
     </p:spTree>
     <p:extLst>
       <p:ext uri="{BB962C8B-B14F-4D97-AF65-F5344CB8AC3E}">
-        <p14:creationId xmlns:p14="http://schemas.microsoft.com/office/powerpoint/2010/main" val="3543775759"/>
+        <p14:creationId xmlns:p14="http://schemas.microsoft.com/office/powerpoint/2010/main" val="4270124310"/>
       </p:ext>
     </p:extLst>
   </p:cSld>
@@ -838,7 +837,7 @@
     </p:spTree>
     <p:extLst>
       <p:ext uri="{BB962C8B-B14F-4D97-AF65-F5344CB8AC3E}">
-        <p14:creationId xmlns:p14="http://schemas.microsoft.com/office/powerpoint/2010/main" val="4270124310"/>
+        <p14:creationId xmlns:p14="http://schemas.microsoft.com/office/powerpoint/2010/main" val="229576454"/>
       </p:ext>
     </p:extLst>
   </p:cSld>
@@ -949,7 +948,7 @@
     </p:spTree>
     <p:extLst>
       <p:ext uri="{BB962C8B-B14F-4D97-AF65-F5344CB8AC3E}">
-        <p14:creationId xmlns:p14="http://schemas.microsoft.com/office/powerpoint/2010/main" val="229576454"/>
+        <p14:creationId xmlns:p14="http://schemas.microsoft.com/office/powerpoint/2010/main" val="755565697"/>
       </p:ext>
     </p:extLst>
   </p:cSld>
@@ -1060,7 +1059,7 @@
     </p:spTree>
     <p:extLst>
       <p:ext uri="{BB962C8B-B14F-4D97-AF65-F5344CB8AC3E}">
-        <p14:creationId xmlns:p14="http://schemas.microsoft.com/office/powerpoint/2010/main" val="755565697"/>
+        <p14:creationId xmlns:p14="http://schemas.microsoft.com/office/powerpoint/2010/main" val="3823103226"/>
       </p:ext>
     </p:extLst>
   </p:cSld>
@@ -1171,7 +1170,7 @@
     </p:spTree>
     <p:extLst>
       <p:ext uri="{BB962C8B-B14F-4D97-AF65-F5344CB8AC3E}">
-        <p14:creationId xmlns:p14="http://schemas.microsoft.com/office/powerpoint/2010/main" val="3823103226"/>
+        <p14:creationId xmlns:p14="http://schemas.microsoft.com/office/powerpoint/2010/main" val="3316659066"/>
       </p:ext>
     </p:extLst>
   </p:cSld>
@@ -1282,7 +1281,7 @@
     </p:spTree>
     <p:extLst>
       <p:ext uri="{BB962C8B-B14F-4D97-AF65-F5344CB8AC3E}">
-        <p14:creationId xmlns:p14="http://schemas.microsoft.com/office/powerpoint/2010/main" val="3316659066"/>
+        <p14:creationId xmlns:p14="http://schemas.microsoft.com/office/powerpoint/2010/main" val="928955123"/>
       </p:ext>
     </p:extLst>
   </p:cSld>
@@ -1393,7 +1392,7 @@
     </p:spTree>
     <p:extLst>
       <p:ext uri="{BB962C8B-B14F-4D97-AF65-F5344CB8AC3E}">
-        <p14:creationId xmlns:p14="http://schemas.microsoft.com/office/powerpoint/2010/main" val="928955123"/>
+        <p14:creationId xmlns:p14="http://schemas.microsoft.com/office/powerpoint/2010/main" val="982626628"/>
       </p:ext>
     </p:extLst>
   </p:cSld>
@@ -1504,7 +1503,7 @@
     </p:spTree>
     <p:extLst>
       <p:ext uri="{BB962C8B-B14F-4D97-AF65-F5344CB8AC3E}">
-        <p14:creationId xmlns:p14="http://schemas.microsoft.com/office/powerpoint/2010/main" val="982626628"/>
+        <p14:creationId xmlns:p14="http://schemas.microsoft.com/office/powerpoint/2010/main" val="793849259"/>
       </p:ext>
     </p:extLst>
   </p:cSld>
@@ -1615,7 +1614,7 @@
     </p:spTree>
     <p:extLst>
       <p:ext uri="{BB962C8B-B14F-4D97-AF65-F5344CB8AC3E}">
-        <p14:creationId xmlns:p14="http://schemas.microsoft.com/office/powerpoint/2010/main" val="793849259"/>
+        <p14:creationId xmlns:p14="http://schemas.microsoft.com/office/powerpoint/2010/main" val="1914137656"/>
       </p:ext>
     </p:extLst>
   </p:cSld>
@@ -1726,7 +1725,7 @@
     </p:spTree>
     <p:extLst>
       <p:ext uri="{BB962C8B-B14F-4D97-AF65-F5344CB8AC3E}">
-        <p14:creationId xmlns:p14="http://schemas.microsoft.com/office/powerpoint/2010/main" val="1914137656"/>
+        <p14:creationId xmlns:p14="http://schemas.microsoft.com/office/powerpoint/2010/main" val="2606200482"/>
       </p:ext>
     </p:extLst>
   </p:cSld>
@@ -1948,7 +1947,7 @@
     </p:spTree>
     <p:extLst>
       <p:ext uri="{BB962C8B-B14F-4D97-AF65-F5344CB8AC3E}">
-        <p14:creationId xmlns:p14="http://schemas.microsoft.com/office/powerpoint/2010/main" val="2606200482"/>
+        <p14:creationId xmlns:p14="http://schemas.microsoft.com/office/powerpoint/2010/main" val="2603843365"/>
       </p:ext>
     </p:extLst>
   </p:cSld>
@@ -2059,7 +2058,7 @@
     </p:spTree>
     <p:extLst>
       <p:ext uri="{BB962C8B-B14F-4D97-AF65-F5344CB8AC3E}">
-        <p14:creationId xmlns:p14="http://schemas.microsoft.com/office/powerpoint/2010/main" val="2603843365"/>
+        <p14:creationId xmlns:p14="http://schemas.microsoft.com/office/powerpoint/2010/main" val="2997603728"/>
       </p:ext>
     </p:extLst>
   </p:cSld>
@@ -2170,7 +2169,7 @@
     </p:spTree>
     <p:extLst>
       <p:ext uri="{BB962C8B-B14F-4D97-AF65-F5344CB8AC3E}">
-        <p14:creationId xmlns:p14="http://schemas.microsoft.com/office/powerpoint/2010/main" val="2997603728"/>
+        <p14:creationId xmlns:p14="http://schemas.microsoft.com/office/powerpoint/2010/main" val="56600915"/>
       </p:ext>
     </p:extLst>
   </p:cSld>
@@ -2281,7 +2280,7 @@
     </p:spTree>
     <p:extLst>
       <p:ext uri="{BB962C8B-B14F-4D97-AF65-F5344CB8AC3E}">
-        <p14:creationId xmlns:p14="http://schemas.microsoft.com/office/powerpoint/2010/main" val="56600915"/>
+        <p14:creationId xmlns:p14="http://schemas.microsoft.com/office/powerpoint/2010/main" val="2739485848"/>
       </p:ext>
     </p:extLst>
   </p:cSld>
@@ -2392,7 +2391,7 @@
     </p:spTree>
     <p:extLst>
       <p:ext uri="{BB962C8B-B14F-4D97-AF65-F5344CB8AC3E}">
-        <p14:creationId xmlns:p14="http://schemas.microsoft.com/office/powerpoint/2010/main" val="2739485848"/>
+        <p14:creationId xmlns:p14="http://schemas.microsoft.com/office/powerpoint/2010/main" val="4188027406"/>
       </p:ext>
     </p:extLst>
   </p:cSld>
@@ -2503,7 +2502,7 @@
     </p:spTree>
     <p:extLst>
       <p:ext uri="{BB962C8B-B14F-4D97-AF65-F5344CB8AC3E}">
-        <p14:creationId xmlns:p14="http://schemas.microsoft.com/office/powerpoint/2010/main" val="4188027406"/>
+        <p14:creationId xmlns:p14="http://schemas.microsoft.com/office/powerpoint/2010/main" val="1758938247"/>
       </p:ext>
     </p:extLst>
   </p:cSld>
@@ -2614,7 +2613,7 @@
     </p:spTree>
     <p:extLst>
       <p:ext uri="{BB962C8B-B14F-4D97-AF65-F5344CB8AC3E}">
-        <p14:creationId xmlns:p14="http://schemas.microsoft.com/office/powerpoint/2010/main" val="1758938247"/>
+        <p14:creationId xmlns:p14="http://schemas.microsoft.com/office/powerpoint/2010/main" val="32956078"/>
       </p:ext>
     </p:extLst>
   </p:cSld>
@@ -2725,7 +2724,7 @@
     </p:spTree>
     <p:extLst>
       <p:ext uri="{BB962C8B-B14F-4D97-AF65-F5344CB8AC3E}">
-        <p14:creationId xmlns:p14="http://schemas.microsoft.com/office/powerpoint/2010/main" val="32956078"/>
+        <p14:creationId xmlns:p14="http://schemas.microsoft.com/office/powerpoint/2010/main" val="1758850147"/>
       </p:ext>
     </p:extLst>
   </p:cSld>
@@ -2836,7 +2835,7 @@
     </p:spTree>
     <p:extLst>
       <p:ext uri="{BB962C8B-B14F-4D97-AF65-F5344CB8AC3E}">
-        <p14:creationId xmlns:p14="http://schemas.microsoft.com/office/powerpoint/2010/main" val="1758850147"/>
+        <p14:creationId xmlns:p14="http://schemas.microsoft.com/office/powerpoint/2010/main" val="3821018633"/>
       </p:ext>
     </p:extLst>
   </p:cSld>
@@ -2947,7 +2946,7 @@
     </p:spTree>
     <p:extLst>
       <p:ext uri="{BB962C8B-B14F-4D97-AF65-F5344CB8AC3E}">
-        <p14:creationId xmlns:p14="http://schemas.microsoft.com/office/powerpoint/2010/main" val="3821018633"/>
+        <p14:creationId xmlns:p14="http://schemas.microsoft.com/office/powerpoint/2010/main" val="2286793052"/>
       </p:ext>
     </p:extLst>
   </p:cSld>
@@ -3169,7 +3168,7 @@
     </p:spTree>
     <p:extLst>
       <p:ext uri="{BB962C8B-B14F-4D97-AF65-F5344CB8AC3E}">
-        <p14:creationId xmlns:p14="http://schemas.microsoft.com/office/powerpoint/2010/main" val="2286793052"/>
+        <p14:creationId xmlns:p14="http://schemas.microsoft.com/office/powerpoint/2010/main" val="4196308984"/>
       </p:ext>
     </p:extLst>
   </p:cSld>
@@ -3280,7 +3279,7 @@
     </p:spTree>
     <p:extLst>
       <p:ext uri="{BB962C8B-B14F-4D97-AF65-F5344CB8AC3E}">
-        <p14:creationId xmlns:p14="http://schemas.microsoft.com/office/powerpoint/2010/main" val="4196308984"/>
+        <p14:creationId xmlns:p14="http://schemas.microsoft.com/office/powerpoint/2010/main" val="1476328454"/>
       </p:ext>
     </p:extLst>
   </p:cSld>
@@ -3383,117 +3382,6 @@
               <a:rPr lang="ko-KR" altLang="en-US" smtClean="0"/>
               <a:pPr/>
               <a:t>33</a:t>
-            </a:fld>
-            <a:endParaRPr lang="ko-KR" altLang="en-US"/>
-          </a:p>
-        </p:txBody>
-      </p:sp>
-    </p:spTree>
-    <p:extLst>
-      <p:ext uri="{BB962C8B-B14F-4D97-AF65-F5344CB8AC3E}">
-        <p14:creationId xmlns:p14="http://schemas.microsoft.com/office/powerpoint/2010/main" val="1476328454"/>
-      </p:ext>
-    </p:extLst>
-  </p:cSld>
-  <p:clrMapOvr>
-    <a:masterClrMapping/>
-  </p:clrMapOvr>
-</p:notes>
-</file>
-
-<file path=ppt/notesSlides/notesSlide33.xml><?xml version="1.0" encoding="utf-8"?>
-<p:notes xmlns:a="http://schemas.openxmlformats.org/drawingml/2006/main" xmlns:r="http://schemas.openxmlformats.org/officeDocument/2006/relationships" xmlns:p="http://schemas.openxmlformats.org/presentationml/2006/main">
-  <p:cSld>
-    <p:spTree>
-      <p:nvGrpSpPr>
-        <p:cNvPr id="1" name=""/>
-        <p:cNvGrpSpPr/>
-        <p:nvPr/>
-      </p:nvGrpSpPr>
-      <p:grpSpPr>
-        <a:xfrm>
-          <a:off x="0" y="0"/>
-          <a:ext cx="0" cy="0"/>
-          <a:chOff x="0" y="0"/>
-          <a:chExt cx="0" cy="0"/>
-        </a:xfrm>
-      </p:grpSpPr>
-      <p:sp>
-        <p:nvSpPr>
-          <p:cNvPr id="2" name="슬라이드 이미지 개체 틀 1"/>
-          <p:cNvSpPr>
-            <a:spLocks noGrp="1" noRot="1" noChangeAspect="1"/>
-          </p:cNvSpPr>
-          <p:nvPr>
-            <p:ph type="sldImg"/>
-          </p:nvPr>
-        </p:nvSpPr>
-        <p:spPr/>
-      </p:sp>
-      <p:sp>
-        <p:nvSpPr>
-          <p:cNvPr id="3" name="슬라이드 노트 개체 틀 2"/>
-          <p:cNvSpPr>
-            <a:spLocks noGrp="1"/>
-          </p:cNvSpPr>
-          <p:nvPr>
-            <p:ph type="body" idx="1"/>
-          </p:nvPr>
-        </p:nvSpPr>
-        <p:spPr/>
-        <p:txBody>
-          <a:bodyPr>
-            <a:normAutofit/>
-          </a:bodyPr>
-          <a:lstStyle/>
-          <a:p>
-            <a:pPr marL="0" marR="0" indent="0" algn="l" defTabSz="914400" rtl="0" eaLnBrk="1" fontAlgn="auto" latinLnBrk="1" hangingPunct="1">
-              <a:lnSpc>
-                <a:spcPct val="100000"/>
-              </a:lnSpc>
-              <a:spcBef>
-                <a:spcPts val="0"/>
-              </a:spcBef>
-              <a:spcAft>
-                <a:spcPts val="0"/>
-              </a:spcAft>
-              <a:buClrTx/>
-              <a:buSzTx/>
-              <a:buFontTx/>
-              <a:buNone/>
-              <a:tabLst/>
-              <a:defRPr/>
-            </a:pPr>
-            <a:r>
-              <a:rPr lang="en-US" altLang="ko-KR" sz="1200" dirty="0"/>
-              <a:t>http://minheeblog.tistory.com/category/PPT</a:t>
-            </a:r>
-            <a:endParaRPr lang="ko-KR" altLang="en-US" sz="1200" dirty="0"/>
-          </a:p>
-          <a:p>
-            <a:endParaRPr lang="ko-KR" altLang="en-US" dirty="0"/>
-          </a:p>
-        </p:txBody>
-      </p:sp>
-      <p:sp>
-        <p:nvSpPr>
-          <p:cNvPr id="4" name="슬라이드 번호 개체 틀 3"/>
-          <p:cNvSpPr>
-            <a:spLocks noGrp="1"/>
-          </p:cNvSpPr>
-          <p:nvPr>
-            <p:ph type="sldNum" sz="quarter" idx="10"/>
-          </p:nvPr>
-        </p:nvSpPr>
-        <p:spPr/>
-        <p:txBody>
-          <a:bodyPr/>
-          <a:lstStyle/>
-          <a:p>
-            <a:fld id="{04A4E647-5A0F-41E6-A0EF-B58D8C1C6CD4}" type="slidenum">
-              <a:rPr lang="ko-KR" altLang="en-US" smtClean="0"/>
-              <a:pPr/>
-              <a:t>34</a:t>
             </a:fld>
             <a:endParaRPr lang="ko-KR" altLang="en-US"/>
           </a:p>
@@ -3835,7 +3723,7 @@
     </p:spTree>
     <p:extLst>
       <p:ext uri="{BB962C8B-B14F-4D97-AF65-F5344CB8AC3E}">
-        <p14:creationId xmlns:p14="http://schemas.microsoft.com/office/powerpoint/2010/main" val="1409956139"/>
+        <p14:creationId xmlns:p14="http://schemas.microsoft.com/office/powerpoint/2010/main" val="656972722"/>
       </p:ext>
     </p:extLst>
   </p:cSld>
@@ -3946,7 +3834,7 @@
     </p:spTree>
     <p:extLst>
       <p:ext uri="{BB962C8B-B14F-4D97-AF65-F5344CB8AC3E}">
-        <p14:creationId xmlns:p14="http://schemas.microsoft.com/office/powerpoint/2010/main" val="656972722"/>
+        <p14:creationId xmlns:p14="http://schemas.microsoft.com/office/powerpoint/2010/main" val="3275774821"/>
       </p:ext>
     </p:extLst>
   </p:cSld>
@@ -4057,7 +3945,7 @@
     </p:spTree>
     <p:extLst>
       <p:ext uri="{BB962C8B-B14F-4D97-AF65-F5344CB8AC3E}">
-        <p14:creationId xmlns:p14="http://schemas.microsoft.com/office/powerpoint/2010/main" val="3275774821"/>
+        <p14:creationId xmlns:p14="http://schemas.microsoft.com/office/powerpoint/2010/main" val="883475280"/>
       </p:ext>
     </p:extLst>
   </p:cSld>
@@ -4168,7 +4056,7 @@
     </p:spTree>
     <p:extLst>
       <p:ext uri="{BB962C8B-B14F-4D97-AF65-F5344CB8AC3E}">
-        <p14:creationId xmlns:p14="http://schemas.microsoft.com/office/powerpoint/2010/main" val="883475280"/>
+        <p14:creationId xmlns:p14="http://schemas.microsoft.com/office/powerpoint/2010/main" val="3543775759"/>
       </p:ext>
     </p:extLst>
   </p:cSld>
@@ -4358,7 +4246,7 @@
             <a:fld id="{A22FE722-38C7-4231-8BB5-7A27D4E5977D}" type="datetimeFigureOut">
               <a:rPr lang="ko-KR" altLang="en-US" smtClean="0"/>
               <a:pPr/>
-              <a:t>2025-11-13</a:t>
+              <a:t>2026-05-27</a:t>
             </a:fld>
             <a:endParaRPr lang="ko-KR" altLang="en-US"/>
           </a:p>
@@ -4523,7 +4411,7 @@
             <a:fld id="{A22FE722-38C7-4231-8BB5-7A27D4E5977D}" type="datetimeFigureOut">
               <a:rPr lang="ko-KR" altLang="en-US" smtClean="0"/>
               <a:pPr/>
-              <a:t>2025-11-13</a:t>
+              <a:t>2026-05-27</a:t>
             </a:fld>
             <a:endParaRPr lang="ko-KR" altLang="en-US"/>
           </a:p>
@@ -4698,7 +4586,7 @@
             <a:fld id="{A22FE722-38C7-4231-8BB5-7A27D4E5977D}" type="datetimeFigureOut">
               <a:rPr lang="ko-KR" altLang="en-US" smtClean="0"/>
               <a:pPr/>
-              <a:t>2025-11-13</a:t>
+              <a:t>2026-05-27</a:t>
             </a:fld>
             <a:endParaRPr lang="ko-KR" altLang="en-US"/>
           </a:p>
@@ -4863,7 +4751,7 @@
             <a:fld id="{A22FE722-38C7-4231-8BB5-7A27D4E5977D}" type="datetimeFigureOut">
               <a:rPr lang="ko-KR" altLang="en-US" smtClean="0"/>
               <a:pPr/>
-              <a:t>2025-11-13</a:t>
+              <a:t>2026-05-27</a:t>
             </a:fld>
             <a:endParaRPr lang="ko-KR" altLang="en-US"/>
           </a:p>
@@ -5105,7 +4993,7 @@
             <a:fld id="{A22FE722-38C7-4231-8BB5-7A27D4E5977D}" type="datetimeFigureOut">
               <a:rPr lang="ko-KR" altLang="en-US" smtClean="0"/>
               <a:pPr/>
-              <a:t>2025-11-13</a:t>
+              <a:t>2026-05-27</a:t>
             </a:fld>
             <a:endParaRPr lang="ko-KR" altLang="en-US"/>
           </a:p>
@@ -5387,7 +5275,7 @@
             <a:fld id="{A22FE722-38C7-4231-8BB5-7A27D4E5977D}" type="datetimeFigureOut">
               <a:rPr lang="ko-KR" altLang="en-US" smtClean="0"/>
               <a:pPr/>
-              <a:t>2025-11-13</a:t>
+              <a:t>2026-05-27</a:t>
             </a:fld>
             <a:endParaRPr lang="ko-KR" altLang="en-US"/>
           </a:p>
@@ -5803,7 +5691,7 @@
             <a:fld id="{A22FE722-38C7-4231-8BB5-7A27D4E5977D}" type="datetimeFigureOut">
               <a:rPr lang="ko-KR" altLang="en-US" smtClean="0"/>
               <a:pPr/>
-              <a:t>2025-11-13</a:t>
+              <a:t>2026-05-27</a:t>
             </a:fld>
             <a:endParaRPr lang="ko-KR" altLang="en-US"/>
           </a:p>
@@ -5917,7 +5805,7 @@
             <a:fld id="{A22FE722-38C7-4231-8BB5-7A27D4E5977D}" type="datetimeFigureOut">
               <a:rPr lang="ko-KR" altLang="en-US" smtClean="0"/>
               <a:pPr/>
-              <a:t>2025-11-13</a:t>
+              <a:t>2026-05-27</a:t>
             </a:fld>
             <a:endParaRPr lang="ko-KR" altLang="en-US"/>
           </a:p>
@@ -6308,7 +6196,7 @@
             <a:fld id="{A22FE722-38C7-4231-8BB5-7A27D4E5977D}" type="datetimeFigureOut">
               <a:rPr lang="ko-KR" altLang="en-US" smtClean="0"/>
               <a:pPr/>
-              <a:t>2025-11-13</a:t>
+              <a:t>2026-05-27</a:t>
             </a:fld>
             <a:endParaRPr lang="ko-KR" altLang="en-US"/>
           </a:p>
@@ -6557,7 +6445,7 @@
             <a:fld id="{A22FE722-38C7-4231-8BB5-7A27D4E5977D}" type="datetimeFigureOut">
               <a:rPr lang="ko-KR" altLang="en-US" smtClean="0"/>
               <a:pPr/>
-              <a:t>2025-11-13</a:t>
+              <a:t>2026-05-27</a:t>
             </a:fld>
             <a:endParaRPr lang="ko-KR" altLang="en-US"/>
           </a:p>
@@ -6770,7 +6658,7 @@
             <a:fld id="{A22FE722-38C7-4231-8BB5-7A27D4E5977D}" type="datetimeFigureOut">
               <a:rPr lang="ko-KR" altLang="en-US" smtClean="0"/>
               <a:pPr/>
-              <a:t>2025-11-13</a:t>
+              <a:t>2026-05-27</a:t>
             </a:fld>
             <a:endParaRPr lang="ko-KR" altLang="en-US"/>
           </a:p>
@@ -7411,7 +7299,7 @@
         <p:spPr>
           <a:xfrm>
             <a:off x="971600" y="1700955"/>
-            <a:ext cx="7200800" cy="1200329"/>
+            <a:ext cx="7200800" cy="1477328"/>
           </a:xfrm>
           <a:prstGeom prst="rect">
             <a:avLst/>
@@ -7430,7 +7318,7 @@
             </a:pPr>
             <a:r>
               <a:rPr lang="ko-KR" altLang="en-US" dirty="0"/>
-              <a:t>단어가 문맥 내에서 함께 등장하는 빈도를 기반으로 단어 간 의미적 연관성을 수치화 한 행렬</a:t>
+              <a:t>두 단어가 서로 독립적인 경우 기대되는 등장 확률보다 얼마나 더 자주 함께 등장하는가를 측정하는 값</a:t>
             </a:r>
             <a:endParaRPr lang="en-US" altLang="ko-KR" dirty="0"/>
           </a:p>
@@ -7440,8 +7328,20 @@
               <a:buChar char="-"/>
             </a:pPr>
             <a:r>
-              <a:rPr lang="ko-KR" altLang="en-US" dirty="0"/>
-              <a:t>어떠한 단어가 어떤 단어와 자주 같이 등장하는가</a:t>
+              <a:rPr lang="en-US" altLang="ko-KR" dirty="0"/>
+              <a:t>PMI</a:t>
+            </a:r>
+            <a:r>
+              <a:rPr lang="ko-KR" altLang="en-US" dirty="0"/>
+              <a:t>의 값이 </a:t>
+            </a:r>
+            <a:r>
+              <a:rPr lang="en-US" altLang="ko-KR" dirty="0"/>
+              <a:t>0</a:t>
+            </a:r>
+            <a:r>
+              <a:rPr lang="ko-KR" altLang="en-US" dirty="0"/>
+              <a:t>보다 큰 경우는 두 단어가 예상보다 자주 함께 등장</a:t>
             </a:r>
             <a:endParaRPr lang="en-US" altLang="ko-KR" dirty="0"/>
           </a:p>
@@ -7451,8 +7351,27 @@
               <a:buChar char="-"/>
             </a:pPr>
             <a:r>
-              <a:rPr lang="ko-KR" altLang="en-US" dirty="0"/>
-              <a:t>문맥의 정보를 확인할 수 있는 기법</a:t>
+              <a:rPr lang="en-US" altLang="ko-KR" dirty="0"/>
+              <a:t>0</a:t>
+            </a:r>
+            <a:r>
+              <a:rPr lang="ko-KR" altLang="en-US" dirty="0"/>
+              <a:t>인 경우는 두 단어가 독립적</a:t>
+            </a:r>
+            <a:endParaRPr lang="en-US" altLang="ko-KR" dirty="0"/>
+          </a:p>
+          <a:p>
+            <a:pPr marL="285750" indent="-285750">
+              <a:buFontTx/>
+              <a:buChar char="-"/>
+            </a:pPr>
+            <a:r>
+              <a:rPr lang="en-US" altLang="ko-KR" dirty="0"/>
+              <a:t>0</a:t>
+            </a:r>
+            <a:r>
+              <a:rPr lang="ko-KR" altLang="en-US" dirty="0"/>
+              <a:t>보다 작은 경우는 두 단어가 함께 등장할 확률이 기대보다 낮음</a:t>
             </a:r>
             <a:endParaRPr lang="en-US" altLang="ko-KR" dirty="0"/>
           </a:p>
@@ -7481,12 +7400,8 @@
           <a:lstStyle/>
           <a:p>
             <a:r>
-              <a:rPr lang="ko-KR" altLang="en-US" sz="2400" dirty="0"/>
-              <a:t>동시 출현 행렬</a:t>
-            </a:r>
-            <a:r>
               <a:rPr lang="en-US" altLang="ko-KR" sz="2400" dirty="0"/>
-              <a:t>(Co-occurrence Matrix)</a:t>
+              <a:t>PMI(Pointwise Mutual Information)</a:t>
             </a:r>
             <a:endParaRPr lang="en-US" altLang="ko-KR" sz="2300" dirty="0"/>
           </a:p>
@@ -7495,7 +7410,7 @@
     </p:spTree>
     <p:extLst>
       <p:ext uri="{BB962C8B-B14F-4D97-AF65-F5344CB8AC3E}">
-        <p14:creationId xmlns:p14="http://schemas.microsoft.com/office/powerpoint/2010/main" val="496208521"/>
+        <p14:creationId xmlns:p14="http://schemas.microsoft.com/office/powerpoint/2010/main" val="2379066470"/>
       </p:ext>
     </p:extLst>
   </p:cSld>
@@ -7660,7 +7575,7 @@
         <p:spPr>
           <a:xfrm>
             <a:off x="971600" y="1700955"/>
-            <a:ext cx="7200800" cy="1477328"/>
+            <a:ext cx="7200800" cy="1754326"/>
           </a:xfrm>
           <a:prstGeom prst="rect">
             <a:avLst/>
@@ -7679,7 +7594,7 @@
             </a:pPr>
             <a:r>
               <a:rPr lang="ko-KR" altLang="en-US" dirty="0"/>
-              <a:t>두 단어가 서로 독립적인 경우 기대되는 등장 확률보다 얼마나 더 자주 함께 등장하는가를 측정하는 값</a:t>
+              <a:t>단어와 문서 간의 숨겨진 의미 구조를 통계적으로 찾아내는 차원 축소 기법</a:t>
             </a:r>
             <a:endParaRPr lang="en-US" altLang="ko-KR" dirty="0"/>
           </a:p>
@@ -7690,19 +7605,39 @@
             </a:pPr>
             <a:r>
               <a:rPr lang="en-US" altLang="ko-KR" dirty="0"/>
-              <a:t>PMI</a:t>
-            </a:r>
-            <a:r>
-              <a:rPr lang="ko-KR" altLang="en-US" dirty="0"/>
-              <a:t>의 값이 </a:t>
+              <a:t>TF-IDF</a:t>
+            </a:r>
+            <a:r>
+              <a:rPr lang="ko-KR" altLang="en-US" dirty="0"/>
+              <a:t>를 입력 값으로 사용하여 </a:t>
             </a:r>
             <a:r>
               <a:rPr lang="en-US" altLang="ko-KR" dirty="0"/>
-              <a:t>0</a:t>
-            </a:r>
-            <a:r>
-              <a:rPr lang="ko-KR" altLang="en-US" dirty="0"/>
-              <a:t>보다 큰 경우는 두 단어가 예상보다 자주 함께 등장</a:t>
+              <a:t>SVC(</a:t>
+            </a:r>
+            <a:r>
+              <a:rPr lang="ko-KR" altLang="en-US" dirty="0" err="1"/>
+              <a:t>특이값</a:t>
+            </a:r>
+            <a:r>
+              <a:rPr lang="ko-KR" altLang="en-US" dirty="0"/>
+              <a:t> 분해</a:t>
+            </a:r>
+            <a:r>
+              <a:rPr lang="en-US" altLang="ko-KR" dirty="0"/>
+              <a:t>)</a:t>
+            </a:r>
+            <a:r>
+              <a:rPr lang="ko-KR" altLang="en-US" dirty="0"/>
+              <a:t>를 적용하여 주요 잠재 의미 축만 남겨서 </a:t>
+            </a:r>
+            <a:r>
+              <a:rPr lang="ko-KR" altLang="en-US" dirty="0" err="1"/>
+              <a:t>임베딩을</a:t>
+            </a:r>
+            <a:r>
+              <a:rPr lang="ko-KR" altLang="en-US" dirty="0"/>
+              <a:t> 하는 기법</a:t>
             </a:r>
             <a:endParaRPr lang="en-US" altLang="ko-KR" dirty="0"/>
           </a:p>
@@ -7713,11 +7648,11 @@
             </a:pPr>
             <a:r>
               <a:rPr lang="en-US" altLang="ko-KR" dirty="0"/>
-              <a:t>0</a:t>
-            </a:r>
-            <a:r>
-              <a:rPr lang="ko-KR" altLang="en-US" dirty="0"/>
-              <a:t>인 경우는 두 단어가 독립적</a:t>
+              <a:t>Word2Vec </a:t>
+            </a:r>
+            <a:r>
+              <a:rPr lang="ko-KR" altLang="en-US" dirty="0"/>
+              <a:t>이전 세대에서 의미 벡터화 기법</a:t>
             </a:r>
             <a:endParaRPr lang="en-US" altLang="ko-KR" dirty="0"/>
           </a:p>
@@ -7726,14 +7661,6 @@
               <a:buFontTx/>
               <a:buChar char="-"/>
             </a:pPr>
-            <a:r>
-              <a:rPr lang="en-US" altLang="ko-KR" dirty="0"/>
-              <a:t>0</a:t>
-            </a:r>
-            <a:r>
-              <a:rPr lang="ko-KR" altLang="en-US" dirty="0"/>
-              <a:t>보다 작은 경우는 두 단어가 함께 등장할 확률이 기대보다 낮음</a:t>
-            </a:r>
             <a:endParaRPr lang="en-US" altLang="ko-KR" dirty="0"/>
           </a:p>
         </p:txBody>
@@ -7762,7 +7689,15 @@
           <a:p>
             <a:r>
               <a:rPr lang="en-US" altLang="ko-KR" sz="2400" dirty="0"/>
-              <a:t>PMI(Pointwise Mutual Information)</a:t>
+              <a:t>LSA (Latent Semantic Analysis, </a:t>
+            </a:r>
+            <a:r>
+              <a:rPr lang="ko-KR" altLang="en-US" sz="2400" dirty="0"/>
+              <a:t>잠재 의미 분석</a:t>
+            </a:r>
+            <a:r>
+              <a:rPr lang="en-US" altLang="ko-KR" sz="2400" dirty="0"/>
+              <a:t>)</a:t>
             </a:r>
             <a:endParaRPr lang="en-US" altLang="ko-KR" sz="2300" dirty="0"/>
           </a:p>
@@ -7771,7 +7706,7 @@
     </p:spTree>
     <p:extLst>
       <p:ext uri="{BB962C8B-B14F-4D97-AF65-F5344CB8AC3E}">
-        <p14:creationId xmlns:p14="http://schemas.microsoft.com/office/powerpoint/2010/main" val="2379066470"/>
+        <p14:creationId xmlns:p14="http://schemas.microsoft.com/office/powerpoint/2010/main" val="212272994"/>
       </p:ext>
     </p:extLst>
   </p:cSld>
@@ -7936,7 +7871,7 @@
         <p:spPr>
           <a:xfrm>
             <a:off x="971600" y="1700955"/>
-            <a:ext cx="7200800" cy="1754326"/>
+            <a:ext cx="7200800" cy="2031325"/>
           </a:xfrm>
           <a:prstGeom prst="rect">
             <a:avLst/>
@@ -7955,34 +7890,26 @@
             </a:pPr>
             <a:r>
               <a:rPr lang="ko-KR" altLang="en-US" dirty="0"/>
-              <a:t>단어와 문서 간의 숨겨진 의미 구조를 통계적으로 찾아내는 차원 축소 기법</a:t>
+              <a:t>코사인 유사도</a:t>
             </a:r>
             <a:endParaRPr lang="en-US" altLang="ko-KR" dirty="0"/>
           </a:p>
           <a:p>
-            <a:pPr marL="285750" indent="-285750">
+            <a:pPr marL="742950" lvl="1" indent="-285750">
               <a:buFontTx/>
               <a:buChar char="-"/>
             </a:pPr>
             <a:r>
+              <a:rPr lang="ko-KR" altLang="en-US" dirty="0"/>
+              <a:t>두 벡터가 서로 얼마나 같은 방향을 가리키는지</a:t>
+            </a:r>
+            <a:r>
               <a:rPr lang="en-US" altLang="ko-KR" dirty="0"/>
-              <a:t>TF-IDF</a:t>
-            </a:r>
-            <a:r>
-              <a:rPr lang="ko-KR" altLang="en-US" dirty="0"/>
-              <a:t>를 입력 값으로 사용하여 </a:t>
-            </a:r>
-            <a:r>
-              <a:rPr lang="en-US" altLang="ko-KR" dirty="0"/>
-              <a:t>SVC(</a:t>
-            </a:r>
-            <a:r>
-              <a:rPr lang="ko-KR" altLang="en-US" dirty="0" err="1"/>
-              <a:t>특이값</a:t>
-            </a:r>
-            <a:r>
-              <a:rPr lang="ko-KR" altLang="en-US" dirty="0"/>
-              <a:t> 분해</a:t>
+              <a:t>(</a:t>
+            </a:r>
+            <a:r>
+              <a:rPr lang="ko-KR" altLang="en-US" dirty="0"/>
+              <a:t>각도</a:t>
             </a:r>
             <a:r>
               <a:rPr lang="en-US" altLang="ko-KR" dirty="0"/>
@@ -7990,38 +7917,72 @@
             </a:r>
             <a:r>
               <a:rPr lang="ko-KR" altLang="en-US" dirty="0"/>
-              <a:t>를 적용하여 주요 잠재 의미 축만 남겨서 </a:t>
-            </a:r>
-            <a:r>
-              <a:rPr lang="ko-KR" altLang="en-US" dirty="0" err="1"/>
-              <a:t>임베딩을</a:t>
-            </a:r>
-            <a:r>
-              <a:rPr lang="ko-KR" altLang="en-US" dirty="0"/>
-              <a:t> 하는 기법</a:t>
+              <a:t>를 측정하는 지표</a:t>
             </a:r>
             <a:endParaRPr lang="en-US" altLang="ko-KR" dirty="0"/>
           </a:p>
           <a:p>
-            <a:pPr marL="285750" indent="-285750">
+            <a:pPr marL="742950" lvl="1" indent="-285750">
               <a:buFontTx/>
               <a:buChar char="-"/>
             </a:pPr>
             <a:r>
+              <a:rPr lang="ko-KR" altLang="en-US" dirty="0"/>
+              <a:t>벡터의 길이가 아니라</a:t>
+            </a:r>
+            <a:r>
               <a:rPr lang="en-US" altLang="ko-KR" dirty="0"/>
-              <a:t>Word2Vec </a:t>
-            </a:r>
-            <a:r>
-              <a:rPr lang="ko-KR" altLang="en-US" dirty="0"/>
-              <a:t>이전 세대에서 의미 벡터화 기법</a:t>
+              <a:t>, </a:t>
+            </a:r>
+            <a:r>
+              <a:rPr lang="ko-KR" altLang="en-US" dirty="0"/>
+              <a:t>방향의 유사성을 비교하는 것이 핵심</a:t>
             </a:r>
             <a:endParaRPr lang="en-US" altLang="ko-KR" dirty="0"/>
           </a:p>
           <a:p>
-            <a:pPr marL="285750" indent="-285750">
+            <a:pPr marL="742950" lvl="1" indent="-285750">
               <a:buFontTx/>
               <a:buChar char="-"/>
             </a:pPr>
+            <a:r>
+              <a:rPr lang="en-US" altLang="ko-KR" dirty="0"/>
+              <a:t>1</a:t>
+            </a:r>
+            <a:r>
+              <a:rPr lang="ko-KR" altLang="en-US" dirty="0"/>
+              <a:t>이라면 완전히 같은 의미</a:t>
+            </a:r>
+            <a:endParaRPr lang="en-US" altLang="ko-KR" dirty="0"/>
+          </a:p>
+          <a:p>
+            <a:pPr marL="742950" lvl="1" indent="-285750">
+              <a:buFontTx/>
+              <a:buChar char="-"/>
+            </a:pPr>
+            <a:r>
+              <a:rPr lang="en-US" altLang="ko-KR" dirty="0"/>
+              <a:t>0</a:t>
+            </a:r>
+            <a:r>
+              <a:rPr lang="ko-KR" altLang="en-US" dirty="0"/>
+              <a:t>이라면 관련이 없는 서로 독립적</a:t>
+            </a:r>
+            <a:endParaRPr lang="en-US" altLang="ko-KR" dirty="0"/>
+          </a:p>
+          <a:p>
+            <a:pPr marL="742950" lvl="1" indent="-285750">
+              <a:buFontTx/>
+              <a:buChar char="-"/>
+            </a:pPr>
+            <a:r>
+              <a:rPr lang="en-US" altLang="ko-KR" dirty="0"/>
+              <a:t>-1</a:t>
+            </a:r>
+            <a:r>
+              <a:rPr lang="ko-KR" altLang="en-US" dirty="0"/>
+              <a:t>이라면 반대의 의미</a:t>
+            </a:r>
             <a:endParaRPr lang="en-US" altLang="ko-KR" dirty="0"/>
           </a:p>
         </p:txBody>
@@ -8049,16 +8010,8 @@
           <a:lstStyle/>
           <a:p>
             <a:r>
-              <a:rPr lang="en-US" altLang="ko-KR" sz="2400" dirty="0"/>
-              <a:t>LSA (Latent Semantic Analysis, </a:t>
-            </a:r>
-            <a:r>
               <a:rPr lang="ko-KR" altLang="en-US" sz="2400" dirty="0"/>
-              <a:t>잠재 의미 분석</a:t>
-            </a:r>
-            <a:r>
-              <a:rPr lang="en-US" altLang="ko-KR" sz="2400" dirty="0"/>
-              <a:t>)</a:t>
+              <a:t>유사도</a:t>
             </a:r>
             <a:endParaRPr lang="en-US" altLang="ko-KR" sz="2300" dirty="0"/>
           </a:p>
@@ -8067,7 +8020,7 @@
     </p:spTree>
     <p:extLst>
       <p:ext uri="{BB962C8B-B14F-4D97-AF65-F5344CB8AC3E}">
-        <p14:creationId xmlns:p14="http://schemas.microsoft.com/office/powerpoint/2010/main" val="212272994"/>
+        <p14:creationId xmlns:p14="http://schemas.microsoft.com/office/powerpoint/2010/main" val="2900115448"/>
       </p:ext>
     </p:extLst>
   </p:cSld>
@@ -8232,7 +8185,7 @@
         <p:spPr>
           <a:xfrm>
             <a:off x="971600" y="1700955"/>
-            <a:ext cx="7200800" cy="2031325"/>
+            <a:ext cx="7200800" cy="2585323"/>
           </a:xfrm>
           <a:prstGeom prst="rect">
             <a:avLst/>
@@ -8251,7 +8204,7 @@
             </a:pPr>
             <a:r>
               <a:rPr lang="ko-KR" altLang="en-US" dirty="0"/>
-              <a:t>코사인 유사도</a:t>
+              <a:t>유클리드 거리</a:t>
             </a:r>
             <a:endParaRPr lang="en-US" altLang="ko-KR" dirty="0"/>
           </a:p>
@@ -8262,23 +8215,7 @@
             </a:pPr>
             <a:r>
               <a:rPr lang="ko-KR" altLang="en-US" dirty="0"/>
-              <a:t>두 벡터가 서로 얼마나 같은 방향을 가리키는지</a:t>
-            </a:r>
-            <a:r>
-              <a:rPr lang="en-US" altLang="ko-KR" dirty="0"/>
-              <a:t>(</a:t>
-            </a:r>
-            <a:r>
-              <a:rPr lang="ko-KR" altLang="en-US" dirty="0"/>
-              <a:t>각도</a:t>
-            </a:r>
-            <a:r>
-              <a:rPr lang="en-US" altLang="ko-KR" dirty="0"/>
-              <a:t>)</a:t>
-            </a:r>
-            <a:r>
-              <a:rPr lang="ko-KR" altLang="en-US" dirty="0"/>
-              <a:t>를 측정하는 지표</a:t>
+              <a:t>두 벡터 사이의 직선 거리를 의미 </a:t>
             </a:r>
             <a:endParaRPr lang="en-US" altLang="ko-KR" dirty="0"/>
           </a:p>
@@ -8288,16 +8225,12 @@
               <a:buChar char="-"/>
             </a:pPr>
             <a:r>
-              <a:rPr lang="ko-KR" altLang="en-US" dirty="0"/>
-              <a:t>벡터의 길이가 아니라</a:t>
-            </a:r>
-            <a:r>
               <a:rPr lang="en-US" altLang="ko-KR" dirty="0"/>
-              <a:t>, </a:t>
-            </a:r>
-            <a:r>
-              <a:rPr lang="ko-KR" altLang="en-US" dirty="0"/>
-              <a:t>방향의 유사성을 비교하는 것이 핵심</a:t>
+              <a:t>0</a:t>
+            </a:r>
+            <a:r>
+              <a:rPr lang="ko-KR" altLang="en-US" dirty="0"/>
+              <a:t>이면 완전히 동일 벡터</a:t>
             </a:r>
             <a:endParaRPr lang="en-US" altLang="ko-KR" dirty="0"/>
           </a:p>
@@ -8307,12 +8240,8 @@
               <a:buChar char="-"/>
             </a:pPr>
             <a:r>
-              <a:rPr lang="en-US" altLang="ko-KR" dirty="0"/>
-              <a:t>1</a:t>
-            </a:r>
-            <a:r>
-              <a:rPr lang="ko-KR" altLang="en-US" dirty="0"/>
-              <a:t>이라면 완전히 같은 의미</a:t>
+              <a:rPr lang="ko-KR" altLang="en-US" dirty="0"/>
+              <a:t>값이 커질수록 서로 다음의 정도가 커짐</a:t>
             </a:r>
             <a:endParaRPr lang="en-US" altLang="ko-KR" dirty="0"/>
           </a:p>
@@ -8322,12 +8251,8 @@
               <a:buChar char="-"/>
             </a:pPr>
             <a:r>
-              <a:rPr lang="en-US" altLang="ko-KR" dirty="0"/>
-              <a:t>0</a:t>
-            </a:r>
-            <a:r>
-              <a:rPr lang="ko-KR" altLang="en-US" dirty="0"/>
-              <a:t>이라면 관련이 없는 서로 독립적</a:t>
+              <a:rPr lang="ko-KR" altLang="en-US" dirty="0"/>
+              <a:t>유사도로 해석을 하는 경우라면 값이 작을 수록 유사하다고 판단</a:t>
             </a:r>
             <a:endParaRPr lang="en-US" altLang="ko-KR" dirty="0"/>
           </a:p>
@@ -8337,12 +8262,19 @@
               <a:buChar char="-"/>
             </a:pPr>
             <a:r>
-              <a:rPr lang="en-US" altLang="ko-KR" dirty="0"/>
-              <a:t>-1</a:t>
-            </a:r>
-            <a:r>
-              <a:rPr lang="ko-KR" altLang="en-US" dirty="0"/>
-              <a:t>이라면 반대의 의미</a:t>
+              <a:rPr lang="ko-KR" altLang="en-US" dirty="0"/>
+              <a:t>고차원 벡터에서 사용을 하지 않는 이유는 고차원에서는 모든 점이 서로 멀어짐</a:t>
+            </a:r>
+            <a:endParaRPr lang="en-US" altLang="ko-KR" dirty="0"/>
+          </a:p>
+          <a:p>
+            <a:pPr marL="742950" lvl="1" indent="-285750">
+              <a:buFontTx/>
+              <a:buChar char="-"/>
+            </a:pPr>
+            <a:r>
+              <a:rPr lang="ko-KR" altLang="en-US" dirty="0"/>
+              <a:t>고차원 벡터에서는 코사인 유사도가 더 안정적</a:t>
             </a:r>
             <a:endParaRPr lang="en-US" altLang="ko-KR" dirty="0"/>
           </a:p>
@@ -8381,7 +8313,7 @@
     </p:spTree>
     <p:extLst>
       <p:ext uri="{BB962C8B-B14F-4D97-AF65-F5344CB8AC3E}">
-        <p14:creationId xmlns:p14="http://schemas.microsoft.com/office/powerpoint/2010/main" val="2900115448"/>
+        <p14:creationId xmlns:p14="http://schemas.microsoft.com/office/powerpoint/2010/main" val="19129981"/>
       </p:ext>
     </p:extLst>
   </p:cSld>
@@ -8392,6 +8324,118 @@
 </file>
 
 <file path=ppt/slides/slide14.xml><?xml version="1.0" encoding="utf-8"?>
+<p:sld xmlns:a="http://schemas.openxmlformats.org/drawingml/2006/main" xmlns:r="http://schemas.openxmlformats.org/officeDocument/2006/relationships" xmlns:p="http://schemas.openxmlformats.org/presentationml/2006/main">
+  <p:cSld>
+    <p:spTree>
+      <p:nvGrpSpPr>
+        <p:cNvPr id="1" name=""/>
+        <p:cNvGrpSpPr/>
+        <p:nvPr/>
+      </p:nvGrpSpPr>
+      <p:grpSpPr>
+        <a:xfrm>
+          <a:off x="0" y="0"/>
+          <a:ext cx="0" cy="0"/>
+          <a:chOff x="0" y="0"/>
+          <a:chExt cx="0" cy="0"/>
+        </a:xfrm>
+      </p:grpSpPr>
+      <p:sp>
+        <p:nvSpPr>
+          <p:cNvPr id="3" name="타원 2"/>
+          <p:cNvSpPr/>
+          <p:nvPr/>
+        </p:nvSpPr>
+        <p:spPr>
+          <a:xfrm>
+            <a:off x="2627784" y="1298236"/>
+            <a:ext cx="3858956" cy="3858956"/>
+          </a:xfrm>
+          <a:prstGeom prst="ellipse">
+            <a:avLst/>
+          </a:prstGeom>
+          <a:solidFill>
+            <a:schemeClr val="tx2">
+              <a:lumMod val="75000"/>
+            </a:schemeClr>
+          </a:solidFill>
+          <a:ln>
+            <a:noFill/>
+          </a:ln>
+        </p:spPr>
+        <p:style>
+          <a:lnRef idx="2">
+            <a:schemeClr val="accent1">
+              <a:shade val="50000"/>
+            </a:schemeClr>
+          </a:lnRef>
+          <a:fillRef idx="1">
+            <a:schemeClr val="accent1"/>
+          </a:fillRef>
+          <a:effectRef idx="0">
+            <a:schemeClr val="accent1"/>
+          </a:effectRef>
+          <a:fontRef idx="minor">
+            <a:schemeClr val="lt1"/>
+          </a:fontRef>
+        </p:style>
+        <p:txBody>
+          <a:bodyPr rtlCol="0" anchor="ctr"/>
+          <a:lstStyle/>
+          <a:p>
+            <a:pPr algn="ctr"/>
+            <a:endParaRPr lang="ko-KR" altLang="en-US"/>
+          </a:p>
+        </p:txBody>
+      </p:sp>
+      <p:sp>
+        <p:nvSpPr>
+          <p:cNvPr id="7" name="TextBox 6"/>
+          <p:cNvSpPr txBox="1"/>
+          <p:nvPr/>
+        </p:nvSpPr>
+        <p:spPr>
+          <a:xfrm>
+            <a:off x="2627784" y="2971550"/>
+            <a:ext cx="3858956" cy="1169551"/>
+          </a:xfrm>
+          <a:prstGeom prst="rect">
+            <a:avLst/>
+          </a:prstGeom>
+          <a:noFill/>
+        </p:spPr>
+        <p:txBody>
+          <a:bodyPr wrap="square" rtlCol="0">
+            <a:spAutoFit/>
+          </a:bodyPr>
+          <a:lstStyle/>
+          <a:p>
+            <a:pPr algn="ctr"/>
+            <a:r>
+              <a:rPr lang="ko-KR" altLang="en-US" sz="3500" b="1" dirty="0">
+                <a:solidFill>
+                  <a:schemeClr val="bg1"/>
+                </a:solidFill>
+              </a:rPr>
+              <a:t>딥러닝 자연어 처리</a:t>
+            </a:r>
+          </a:p>
+        </p:txBody>
+      </p:sp>
+    </p:spTree>
+    <p:extLst>
+      <p:ext uri="{BB962C8B-B14F-4D97-AF65-F5344CB8AC3E}">
+        <p14:creationId xmlns:p14="http://schemas.microsoft.com/office/powerpoint/2010/main" val="2764100057"/>
+      </p:ext>
+    </p:extLst>
+  </p:cSld>
+  <p:clrMapOvr>
+    <a:masterClrMapping/>
+  </p:clrMapOvr>
+</p:sld>
+</file>
+
+<file path=ppt/slides/slide15.xml><?xml version="1.0" encoding="utf-8"?>
 <p:sld xmlns:a="http://schemas.openxmlformats.org/drawingml/2006/main" xmlns:r="http://schemas.openxmlformats.org/officeDocument/2006/relationships" xmlns:p="http://schemas.openxmlformats.org/presentationml/2006/main">
   <p:cSld>
     <p:spTree>
@@ -8546,7 +8590,7 @@
         <p:spPr>
           <a:xfrm>
             <a:off x="971600" y="1700955"/>
-            <a:ext cx="7200800" cy="2585323"/>
+            <a:ext cx="7200800" cy="1477328"/>
           </a:xfrm>
           <a:prstGeom prst="rect">
             <a:avLst/>
@@ -8560,82 +8604,46 @@
           <a:lstStyle/>
           <a:p>
             <a:pPr marL="285750" indent="-285750">
-              <a:buFontTx/>
-              <a:buChar char="-"/>
+              <a:buFont typeface="Arial" panose="020B0604020202020204" pitchFamily="34" charset="0"/>
+              <a:buChar char="•"/>
             </a:pPr>
             <a:r>
-              <a:rPr lang="ko-KR" altLang="en-US" dirty="0"/>
-              <a:t>유클리드 거리</a:t>
+              <a:rPr lang="en-US" altLang="ko-KR" dirty="0"/>
+              <a:t>Word2Vec</a:t>
+            </a:r>
+            <a:r>
+              <a:rPr lang="ko-KR" altLang="en-US" dirty="0"/>
+              <a:t>은 단어를 단순한 문자로 생각하는 것이 아니라 의미를 가진 벡터로 표현하는 딥러닝 </a:t>
+            </a:r>
+            <a:r>
+              <a:rPr lang="ko-KR" altLang="en-US" dirty="0" err="1"/>
+              <a:t>임베딩</a:t>
+            </a:r>
+            <a:r>
+              <a:rPr lang="ko-KR" altLang="en-US" dirty="0"/>
+              <a:t> 방식</a:t>
             </a:r>
             <a:endParaRPr lang="en-US" altLang="ko-KR" dirty="0"/>
           </a:p>
           <a:p>
-            <a:pPr marL="742950" lvl="1" indent="-285750">
-              <a:buFontTx/>
-              <a:buChar char="-"/>
+            <a:pPr marL="285750" indent="-285750">
+              <a:buFont typeface="Arial" panose="020B0604020202020204" pitchFamily="34" charset="0"/>
+              <a:buChar char="•"/>
             </a:pPr>
             <a:r>
               <a:rPr lang="ko-KR" altLang="en-US" dirty="0"/>
-              <a:t>두 벡터 사이의 직선 거리를 의미 </a:t>
+              <a:t>문맥을 바탕으로 단어의 의미를 학습하는 모델</a:t>
             </a:r>
             <a:endParaRPr lang="en-US" altLang="ko-KR" dirty="0"/>
           </a:p>
           <a:p>
-            <a:pPr marL="742950" lvl="1" indent="-285750">
-              <a:buFontTx/>
-              <a:buChar char="-"/>
+            <a:pPr marL="285750" indent="-285750">
+              <a:buFont typeface="Arial" panose="020B0604020202020204" pitchFamily="34" charset="0"/>
+              <a:buChar char="•"/>
             </a:pPr>
             <a:r>
-              <a:rPr lang="en-US" altLang="ko-KR" dirty="0"/>
-              <a:t>0</a:t>
-            </a:r>
-            <a:r>
-              <a:rPr lang="ko-KR" altLang="en-US" dirty="0"/>
-              <a:t>이면 완전히 동일 벡터</a:t>
-            </a:r>
-            <a:endParaRPr lang="en-US" altLang="ko-KR" dirty="0"/>
-          </a:p>
-          <a:p>
-            <a:pPr marL="742950" lvl="1" indent="-285750">
-              <a:buFontTx/>
-              <a:buChar char="-"/>
-            </a:pPr>
-            <a:r>
-              <a:rPr lang="ko-KR" altLang="en-US" dirty="0"/>
-              <a:t>값이 커질수록 서로 다음의 정도가 커짐</a:t>
-            </a:r>
-            <a:endParaRPr lang="en-US" altLang="ko-KR" dirty="0"/>
-          </a:p>
-          <a:p>
-            <a:pPr marL="742950" lvl="1" indent="-285750">
-              <a:buFontTx/>
-              <a:buChar char="-"/>
-            </a:pPr>
-            <a:r>
-              <a:rPr lang="ko-KR" altLang="en-US" dirty="0"/>
-              <a:t>유사도로 해석을 하는 경우라면 값이 작을 수록 유사하다고 판단</a:t>
-            </a:r>
-            <a:endParaRPr lang="en-US" altLang="ko-KR" dirty="0"/>
-          </a:p>
-          <a:p>
-            <a:pPr marL="742950" lvl="1" indent="-285750">
-              <a:buFontTx/>
-              <a:buChar char="-"/>
-            </a:pPr>
-            <a:r>
-              <a:rPr lang="ko-KR" altLang="en-US" dirty="0"/>
-              <a:t>고차원 벡터에서 사용을 하지 않는 이유는 고차원에서는 모든 점이 서로 멀어짐</a:t>
-            </a:r>
-            <a:endParaRPr lang="en-US" altLang="ko-KR" dirty="0"/>
-          </a:p>
-          <a:p>
-            <a:pPr marL="742950" lvl="1" indent="-285750">
-              <a:buFontTx/>
-              <a:buChar char="-"/>
-            </a:pPr>
-            <a:r>
-              <a:rPr lang="ko-KR" altLang="en-US" dirty="0"/>
-              <a:t>고차원 벡터에서는 코사인 유사도가 더 안정적</a:t>
+              <a:rPr lang="ko-KR" altLang="en-US" dirty="0"/>
+              <a:t>코사인 유사도를 활용하여 단어 간 의미적 유사성을 표현 할 수 있는 모델</a:t>
             </a:r>
             <a:endParaRPr lang="en-US" altLang="ko-KR" dirty="0"/>
           </a:p>
@@ -8650,7 +8658,7 @@
         <p:spPr>
           <a:xfrm>
             <a:off x="539552" y="1065096"/>
-            <a:ext cx="7992888" cy="461665"/>
+            <a:ext cx="7992888" cy="446276"/>
           </a:xfrm>
           <a:prstGeom prst="rect">
             <a:avLst/>
@@ -8664,17 +8672,327 @@
           <a:lstStyle/>
           <a:p>
             <a:r>
-              <a:rPr lang="ko-KR" altLang="en-US" sz="2400" dirty="0"/>
-              <a:t>유사도</a:t>
-            </a:r>
-            <a:endParaRPr lang="en-US" altLang="ko-KR" sz="2300" dirty="0"/>
+              <a:rPr lang="en-US" altLang="ko-KR" sz="2300" dirty="0"/>
+              <a:t>Word2Vec</a:t>
+            </a:r>
+            <a:endParaRPr lang="ko-KR" altLang="en-US" sz="2300" dirty="0"/>
+          </a:p>
+        </p:txBody>
+      </p:sp>
+    </p:spTree>
+  </p:cSld>
+  <p:clrMapOvr>
+    <a:masterClrMapping/>
+  </p:clrMapOvr>
+</p:sld>
+</file>
+
+<file path=ppt/slides/slide16.xml><?xml version="1.0" encoding="utf-8"?>
+<p:sld xmlns:a="http://schemas.openxmlformats.org/drawingml/2006/main" xmlns:r="http://schemas.openxmlformats.org/officeDocument/2006/relationships" xmlns:p="http://schemas.openxmlformats.org/presentationml/2006/main">
+  <p:cSld>
+    <p:spTree>
+      <p:nvGrpSpPr>
+        <p:cNvPr id="1" name=""/>
+        <p:cNvGrpSpPr/>
+        <p:nvPr/>
+      </p:nvGrpSpPr>
+      <p:grpSpPr>
+        <a:xfrm>
+          <a:off x="0" y="0"/>
+          <a:ext cx="0" cy="0"/>
+          <a:chOff x="0" y="0"/>
+          <a:chExt cx="0" cy="0"/>
+        </a:xfrm>
+      </p:grpSpPr>
+      <p:sp>
+        <p:nvSpPr>
+          <p:cNvPr id="3" name="타원 2"/>
+          <p:cNvSpPr/>
+          <p:nvPr/>
+        </p:nvSpPr>
+        <p:spPr>
+          <a:xfrm>
+            <a:off x="4067944" y="74100"/>
+            <a:ext cx="936104" cy="936104"/>
+          </a:xfrm>
+          <a:prstGeom prst="ellipse">
+            <a:avLst/>
+          </a:prstGeom>
+          <a:solidFill>
+            <a:schemeClr val="tx2">
+              <a:lumMod val="75000"/>
+            </a:schemeClr>
+          </a:solidFill>
+          <a:ln>
+            <a:noFill/>
+          </a:ln>
+        </p:spPr>
+        <p:style>
+          <a:lnRef idx="2">
+            <a:schemeClr val="accent1">
+              <a:shade val="50000"/>
+            </a:schemeClr>
+          </a:lnRef>
+          <a:fillRef idx="1">
+            <a:schemeClr val="accent1"/>
+          </a:fillRef>
+          <a:effectRef idx="0">
+            <a:schemeClr val="accent1"/>
+          </a:effectRef>
+          <a:fontRef idx="minor">
+            <a:schemeClr val="lt1"/>
+          </a:fontRef>
+        </p:style>
+        <p:txBody>
+          <a:bodyPr rtlCol="0" anchor="ctr"/>
+          <a:lstStyle/>
+          <a:p>
+            <a:pPr algn="ctr"/>
+            <a:endParaRPr lang="ko-KR" altLang="en-US"/>
+          </a:p>
+        </p:txBody>
+      </p:sp>
+      <p:sp>
+        <p:nvSpPr>
+          <p:cNvPr id="8" name="직사각형 7"/>
+          <p:cNvSpPr/>
+          <p:nvPr/>
+        </p:nvSpPr>
+        <p:spPr>
+          <a:xfrm>
+            <a:off x="708380" y="271681"/>
+            <a:ext cx="857927" cy="276999"/>
+          </a:xfrm>
+          <a:prstGeom prst="rect">
+            <a:avLst/>
+          </a:prstGeom>
+        </p:spPr>
+        <p:txBody>
+          <a:bodyPr wrap="none">
+            <a:spAutoFit/>
+          </a:bodyPr>
+          <a:lstStyle/>
+          <a:p>
+            <a:pPr algn="ctr"/>
+            <a:r>
+              <a:rPr lang="ko-KR" altLang="en-US" sz="1200" b="1" spc="-150" dirty="0">
+                <a:solidFill>
+                  <a:schemeClr val="bg1"/>
+                </a:solidFill>
+              </a:rPr>
+              <a:t>자연어처리</a:t>
+            </a:r>
+            <a:endParaRPr lang="en-US" altLang="ko-KR" sz="1200" b="1" spc="-150" dirty="0">
+              <a:solidFill>
+                <a:schemeClr val="bg1"/>
+              </a:solidFill>
+            </a:endParaRPr>
+          </a:p>
+        </p:txBody>
+      </p:sp>
+      <p:sp>
+        <p:nvSpPr>
+          <p:cNvPr id="9" name="TextBox 8"/>
+          <p:cNvSpPr txBox="1"/>
+          <p:nvPr/>
+        </p:nvSpPr>
+        <p:spPr>
+          <a:xfrm>
+            <a:off x="3995936" y="479095"/>
+            <a:ext cx="1080120" cy="461665"/>
+          </a:xfrm>
+          <a:prstGeom prst="rect">
+            <a:avLst/>
+          </a:prstGeom>
+          <a:noFill/>
+        </p:spPr>
+        <p:txBody>
+          <a:bodyPr wrap="square" rtlCol="0">
+            <a:spAutoFit/>
+          </a:bodyPr>
+          <a:lstStyle/>
+          <a:p>
+            <a:pPr algn="ctr"/>
+            <a:r>
+              <a:rPr lang="en-US" altLang="ko-KR" sz="2400" dirty="0">
+                <a:solidFill>
+                  <a:schemeClr val="bg1"/>
+                </a:solidFill>
+                <a:latin typeface="HY헤드라인M" pitchFamily="18" charset="-127"/>
+                <a:ea typeface="HY헤드라인M" pitchFamily="18" charset="-127"/>
+              </a:rPr>
+              <a:t>01</a:t>
+            </a:r>
+            <a:endParaRPr lang="ko-KR" altLang="en-US" sz="2400" dirty="0">
+              <a:solidFill>
+                <a:schemeClr val="bg1"/>
+              </a:solidFill>
+              <a:latin typeface="HY헤드라인M" pitchFamily="18" charset="-127"/>
+              <a:ea typeface="HY헤드라인M" pitchFamily="18" charset="-127"/>
+            </a:endParaRPr>
+          </a:p>
+        </p:txBody>
+      </p:sp>
+      <p:sp>
+        <p:nvSpPr>
+          <p:cNvPr id="4" name="TextBox 3"/>
+          <p:cNvSpPr txBox="1"/>
+          <p:nvPr/>
+        </p:nvSpPr>
+        <p:spPr>
+          <a:xfrm>
+            <a:off x="971600" y="1700955"/>
+            <a:ext cx="7200800" cy="2031325"/>
+          </a:xfrm>
+          <a:prstGeom prst="rect">
+            <a:avLst/>
+          </a:prstGeom>
+          <a:noFill/>
+        </p:spPr>
+        <p:txBody>
+          <a:bodyPr wrap="square" rtlCol="0">
+            <a:spAutoFit/>
+          </a:bodyPr>
+          <a:lstStyle/>
+          <a:p>
+            <a:pPr marL="285750" indent="-285750">
+              <a:buFont typeface="Arial" panose="020B0604020202020204" pitchFamily="34" charset="0"/>
+              <a:buChar char="•"/>
+            </a:pPr>
+            <a:r>
+              <a:rPr lang="en-US" altLang="ko-KR" dirty="0"/>
+              <a:t>CBOW</a:t>
+            </a:r>
+          </a:p>
+          <a:p>
+            <a:pPr marL="742950" lvl="1" indent="-285750">
+              <a:buFont typeface="Arial" panose="020B0604020202020204" pitchFamily="34" charset="0"/>
+              <a:buChar char="•"/>
+            </a:pPr>
+            <a:r>
+              <a:rPr lang="ko-KR" altLang="en-US" dirty="0"/>
+              <a:t>주변 단어를 이용하여 중심 단어를 예측</a:t>
+            </a:r>
+            <a:endParaRPr lang="en-US" altLang="ko-KR" dirty="0"/>
+          </a:p>
+          <a:p>
+            <a:pPr marL="742950" lvl="1" indent="-285750">
+              <a:buFont typeface="Arial" panose="020B0604020202020204" pitchFamily="34" charset="0"/>
+              <a:buChar char="•"/>
+            </a:pPr>
+            <a:r>
+              <a:rPr lang="ko-KR" altLang="en-US" dirty="0"/>
+              <a:t>문맥의 단어 </a:t>
+            </a:r>
+            <a:r>
+              <a:rPr lang="en-US" altLang="ko-KR" dirty="0"/>
+              <a:t>: [</a:t>
+            </a:r>
+            <a:r>
+              <a:rPr lang="ko-KR" altLang="en-US" dirty="0"/>
+              <a:t>나는</a:t>
+            </a:r>
+            <a:r>
+              <a:rPr lang="en-US" altLang="ko-KR" dirty="0"/>
+              <a:t>, </a:t>
+            </a:r>
+            <a:r>
+              <a:rPr lang="ko-KR" altLang="en-US" dirty="0"/>
+              <a:t>먹었다</a:t>
+            </a:r>
+            <a:r>
+              <a:rPr lang="en-US" altLang="ko-KR" dirty="0"/>
+              <a:t>]</a:t>
+            </a:r>
+          </a:p>
+          <a:p>
+            <a:pPr marL="742950" lvl="1" indent="-285750">
+              <a:buFont typeface="Arial" panose="020B0604020202020204" pitchFamily="34" charset="0"/>
+              <a:buChar char="•"/>
+            </a:pPr>
+            <a:r>
+              <a:rPr lang="ko-KR" altLang="en-US" dirty="0"/>
+              <a:t>중심 단어 </a:t>
+            </a:r>
+            <a:r>
+              <a:rPr lang="en-US" altLang="ko-KR" dirty="0"/>
+              <a:t>: </a:t>
+            </a:r>
+            <a:r>
+              <a:rPr lang="ko-KR" altLang="en-US" dirty="0"/>
+              <a:t>밥</a:t>
+            </a:r>
+            <a:endParaRPr lang="en-US" altLang="ko-KR" dirty="0"/>
+          </a:p>
+          <a:p>
+            <a:pPr marL="742950" lvl="1" indent="-285750">
+              <a:buFont typeface="Arial" panose="020B0604020202020204" pitchFamily="34" charset="0"/>
+              <a:buChar char="•"/>
+            </a:pPr>
+            <a:r>
+              <a:rPr lang="ko-KR" altLang="en-US" dirty="0"/>
+              <a:t>특정 단어가 어떤 문맥에 등장하는지를 이해하는 방법</a:t>
+            </a:r>
+            <a:endParaRPr lang="en-US" altLang="ko-KR" dirty="0"/>
+          </a:p>
+          <a:p>
+            <a:pPr marL="742950" lvl="1" indent="-285750">
+              <a:buFont typeface="Arial" panose="020B0604020202020204" pitchFamily="34" charset="0"/>
+              <a:buChar char="•"/>
+            </a:pPr>
+            <a:r>
+              <a:rPr lang="ko-KR" altLang="en-US" dirty="0"/>
+              <a:t>긴 문맥에서는 잘 반영이 되지 않은 문제가 있음</a:t>
+            </a:r>
+            <a:endParaRPr lang="en-US" altLang="ko-KR" dirty="0"/>
+          </a:p>
+          <a:p>
+            <a:pPr marL="742950" lvl="1" indent="-285750">
+              <a:buFont typeface="Arial" panose="020B0604020202020204" pitchFamily="34" charset="0"/>
+              <a:buChar char="•"/>
+            </a:pPr>
+            <a:r>
+              <a:rPr lang="ko-KR" altLang="en-US" dirty="0"/>
+              <a:t>속도는 빠르고 자주 등장하는 단어에 유리</a:t>
+            </a:r>
+            <a:endParaRPr lang="en-US" altLang="ko-KR" dirty="0"/>
+          </a:p>
+        </p:txBody>
+      </p:sp>
+      <p:sp>
+        <p:nvSpPr>
+          <p:cNvPr id="6" name="TextBox 5"/>
+          <p:cNvSpPr txBox="1"/>
+          <p:nvPr/>
+        </p:nvSpPr>
+        <p:spPr>
+          <a:xfrm>
+            <a:off x="539552" y="1065096"/>
+            <a:ext cx="7992888" cy="446276"/>
+          </a:xfrm>
+          <a:prstGeom prst="rect">
+            <a:avLst/>
+          </a:prstGeom>
+          <a:noFill/>
+        </p:spPr>
+        <p:txBody>
+          <a:bodyPr wrap="square" rtlCol="0">
+            <a:spAutoFit/>
+          </a:bodyPr>
+          <a:lstStyle/>
+          <a:p>
+            <a:r>
+              <a:rPr lang="en-US" altLang="ko-KR" sz="2300" dirty="0"/>
+              <a:t>Word2Vec</a:t>
+            </a:r>
+            <a:endParaRPr lang="ko-KR" altLang="en-US" sz="2300" dirty="0"/>
           </a:p>
         </p:txBody>
       </p:sp>
     </p:spTree>
     <p:extLst>
       <p:ext uri="{BB962C8B-B14F-4D97-AF65-F5344CB8AC3E}">
-        <p14:creationId xmlns:p14="http://schemas.microsoft.com/office/powerpoint/2010/main" val="19129981"/>
+        <p14:creationId xmlns:p14="http://schemas.microsoft.com/office/powerpoint/2010/main" val="2819083101"/>
       </p:ext>
     </p:extLst>
   </p:cSld>
@@ -8684,7 +9002,903 @@
 </p:sld>
 </file>
 
-<file path=ppt/slides/slide15.xml><?xml version="1.0" encoding="utf-8"?>
+<file path=ppt/slides/slide17.xml><?xml version="1.0" encoding="utf-8"?>
+<p:sld xmlns:a="http://schemas.openxmlformats.org/drawingml/2006/main" xmlns:r="http://schemas.openxmlformats.org/officeDocument/2006/relationships" xmlns:p="http://schemas.openxmlformats.org/presentationml/2006/main">
+  <p:cSld>
+    <p:spTree>
+      <p:nvGrpSpPr>
+        <p:cNvPr id="1" name=""/>
+        <p:cNvGrpSpPr/>
+        <p:nvPr/>
+      </p:nvGrpSpPr>
+      <p:grpSpPr>
+        <a:xfrm>
+          <a:off x="0" y="0"/>
+          <a:ext cx="0" cy="0"/>
+          <a:chOff x="0" y="0"/>
+          <a:chExt cx="0" cy="0"/>
+        </a:xfrm>
+      </p:grpSpPr>
+      <p:sp>
+        <p:nvSpPr>
+          <p:cNvPr id="3" name="타원 2"/>
+          <p:cNvSpPr/>
+          <p:nvPr/>
+        </p:nvSpPr>
+        <p:spPr>
+          <a:xfrm>
+            <a:off x="4067944" y="74100"/>
+            <a:ext cx="936104" cy="936104"/>
+          </a:xfrm>
+          <a:prstGeom prst="ellipse">
+            <a:avLst/>
+          </a:prstGeom>
+          <a:solidFill>
+            <a:schemeClr val="tx2">
+              <a:lumMod val="75000"/>
+            </a:schemeClr>
+          </a:solidFill>
+          <a:ln>
+            <a:noFill/>
+          </a:ln>
+        </p:spPr>
+        <p:style>
+          <a:lnRef idx="2">
+            <a:schemeClr val="accent1">
+              <a:shade val="50000"/>
+            </a:schemeClr>
+          </a:lnRef>
+          <a:fillRef idx="1">
+            <a:schemeClr val="accent1"/>
+          </a:fillRef>
+          <a:effectRef idx="0">
+            <a:schemeClr val="accent1"/>
+          </a:effectRef>
+          <a:fontRef idx="minor">
+            <a:schemeClr val="lt1"/>
+          </a:fontRef>
+        </p:style>
+        <p:txBody>
+          <a:bodyPr rtlCol="0" anchor="ctr"/>
+          <a:lstStyle/>
+          <a:p>
+            <a:pPr algn="ctr"/>
+            <a:endParaRPr lang="ko-KR" altLang="en-US"/>
+          </a:p>
+        </p:txBody>
+      </p:sp>
+      <p:sp>
+        <p:nvSpPr>
+          <p:cNvPr id="8" name="직사각형 7"/>
+          <p:cNvSpPr/>
+          <p:nvPr/>
+        </p:nvSpPr>
+        <p:spPr>
+          <a:xfrm>
+            <a:off x="708380" y="271681"/>
+            <a:ext cx="857927" cy="276999"/>
+          </a:xfrm>
+          <a:prstGeom prst="rect">
+            <a:avLst/>
+          </a:prstGeom>
+        </p:spPr>
+        <p:txBody>
+          <a:bodyPr wrap="none">
+            <a:spAutoFit/>
+          </a:bodyPr>
+          <a:lstStyle/>
+          <a:p>
+            <a:pPr algn="ctr"/>
+            <a:r>
+              <a:rPr lang="ko-KR" altLang="en-US" sz="1200" b="1" spc="-150" dirty="0">
+                <a:solidFill>
+                  <a:schemeClr val="bg1"/>
+                </a:solidFill>
+              </a:rPr>
+              <a:t>자연어처리</a:t>
+            </a:r>
+            <a:endParaRPr lang="en-US" altLang="ko-KR" sz="1200" b="1" spc="-150" dirty="0">
+              <a:solidFill>
+                <a:schemeClr val="bg1"/>
+              </a:solidFill>
+            </a:endParaRPr>
+          </a:p>
+        </p:txBody>
+      </p:sp>
+      <p:sp>
+        <p:nvSpPr>
+          <p:cNvPr id="9" name="TextBox 8"/>
+          <p:cNvSpPr txBox="1"/>
+          <p:nvPr/>
+        </p:nvSpPr>
+        <p:spPr>
+          <a:xfrm>
+            <a:off x="3995936" y="479095"/>
+            <a:ext cx="1080120" cy="461665"/>
+          </a:xfrm>
+          <a:prstGeom prst="rect">
+            <a:avLst/>
+          </a:prstGeom>
+          <a:noFill/>
+        </p:spPr>
+        <p:txBody>
+          <a:bodyPr wrap="square" rtlCol="0">
+            <a:spAutoFit/>
+          </a:bodyPr>
+          <a:lstStyle/>
+          <a:p>
+            <a:pPr algn="ctr"/>
+            <a:r>
+              <a:rPr lang="en-US" altLang="ko-KR" sz="2400" dirty="0">
+                <a:solidFill>
+                  <a:schemeClr val="bg1"/>
+                </a:solidFill>
+                <a:latin typeface="HY헤드라인M" pitchFamily="18" charset="-127"/>
+                <a:ea typeface="HY헤드라인M" pitchFamily="18" charset="-127"/>
+              </a:rPr>
+              <a:t>01</a:t>
+            </a:r>
+            <a:endParaRPr lang="ko-KR" altLang="en-US" sz="2400" dirty="0">
+              <a:solidFill>
+                <a:schemeClr val="bg1"/>
+              </a:solidFill>
+              <a:latin typeface="HY헤드라인M" pitchFamily="18" charset="-127"/>
+              <a:ea typeface="HY헤드라인M" pitchFamily="18" charset="-127"/>
+            </a:endParaRPr>
+          </a:p>
+        </p:txBody>
+      </p:sp>
+      <p:sp>
+        <p:nvSpPr>
+          <p:cNvPr id="4" name="TextBox 3"/>
+          <p:cNvSpPr txBox="1"/>
+          <p:nvPr/>
+        </p:nvSpPr>
+        <p:spPr>
+          <a:xfrm>
+            <a:off x="971600" y="1700955"/>
+            <a:ext cx="7200800" cy="2585323"/>
+          </a:xfrm>
+          <a:prstGeom prst="rect">
+            <a:avLst/>
+          </a:prstGeom>
+          <a:noFill/>
+        </p:spPr>
+        <p:txBody>
+          <a:bodyPr wrap="square" rtlCol="0">
+            <a:spAutoFit/>
+          </a:bodyPr>
+          <a:lstStyle/>
+          <a:p>
+            <a:pPr marL="285750" indent="-285750">
+              <a:buFont typeface="Arial" panose="020B0604020202020204" pitchFamily="34" charset="0"/>
+              <a:buChar char="•"/>
+            </a:pPr>
+            <a:r>
+              <a:rPr lang="en-US" altLang="ko-KR" dirty="0"/>
+              <a:t>Skip-Gram</a:t>
+            </a:r>
+          </a:p>
+          <a:p>
+            <a:pPr marL="742950" lvl="1" indent="-285750">
+              <a:buFont typeface="Arial" panose="020B0604020202020204" pitchFamily="34" charset="0"/>
+              <a:buChar char="•"/>
+            </a:pPr>
+            <a:r>
+              <a:rPr lang="ko-KR" altLang="en-US" dirty="0"/>
+              <a:t>중심 단어를 이용하여 주변 단어를 예측</a:t>
+            </a:r>
+            <a:endParaRPr lang="en-US" altLang="ko-KR" dirty="0"/>
+          </a:p>
+          <a:p>
+            <a:pPr marL="742950" lvl="1" indent="-285750">
+              <a:buFont typeface="Arial" panose="020B0604020202020204" pitchFamily="34" charset="0"/>
+              <a:buChar char="•"/>
+            </a:pPr>
+            <a:r>
+              <a:rPr lang="ko-KR" altLang="en-US" dirty="0"/>
+              <a:t>중심 단어 </a:t>
+            </a:r>
+            <a:r>
+              <a:rPr lang="en-US" altLang="ko-KR" dirty="0"/>
+              <a:t>: </a:t>
+            </a:r>
+            <a:r>
+              <a:rPr lang="ko-KR" altLang="en-US" dirty="0"/>
+              <a:t>밥을</a:t>
+            </a:r>
+            <a:endParaRPr lang="en-US" altLang="ko-KR" dirty="0"/>
+          </a:p>
+          <a:p>
+            <a:pPr marL="742950" lvl="1" indent="-285750">
+              <a:buFont typeface="Arial" panose="020B0604020202020204" pitchFamily="34" charset="0"/>
+              <a:buChar char="•"/>
+            </a:pPr>
+            <a:r>
+              <a:rPr lang="ko-KR" altLang="en-US" dirty="0"/>
+              <a:t>문맥 단어 </a:t>
+            </a:r>
+            <a:r>
+              <a:rPr lang="en-US" altLang="ko-KR" dirty="0"/>
+              <a:t>: [</a:t>
+            </a:r>
+            <a:r>
+              <a:rPr lang="ko-KR" altLang="en-US" dirty="0"/>
+              <a:t>나는</a:t>
+            </a:r>
+            <a:r>
+              <a:rPr lang="en-US" altLang="ko-KR" dirty="0"/>
+              <a:t>, </a:t>
+            </a:r>
+            <a:r>
+              <a:rPr lang="ko-KR" altLang="en-US" dirty="0"/>
+              <a:t>먹었다</a:t>
+            </a:r>
+            <a:r>
+              <a:rPr lang="en-US" altLang="ko-KR" dirty="0"/>
+              <a:t>]</a:t>
+            </a:r>
+          </a:p>
+          <a:p>
+            <a:pPr marL="742950" lvl="1" indent="-285750">
+              <a:buFont typeface="Arial" panose="020B0604020202020204" pitchFamily="34" charset="0"/>
+              <a:buChar char="•"/>
+            </a:pPr>
+            <a:r>
+              <a:rPr lang="ko-KR" altLang="en-US" dirty="0"/>
+              <a:t>희귀 단어 학습에 강함 </a:t>
+            </a:r>
+            <a:endParaRPr lang="en-US" altLang="ko-KR" dirty="0"/>
+          </a:p>
+          <a:p>
+            <a:pPr marL="742950" lvl="1" indent="-285750">
+              <a:buFont typeface="Arial" panose="020B0604020202020204" pitchFamily="34" charset="0"/>
+              <a:buChar char="•"/>
+            </a:pPr>
+            <a:r>
+              <a:rPr lang="en-US" altLang="ko-KR" dirty="0"/>
+              <a:t>CBOW</a:t>
+            </a:r>
+            <a:r>
+              <a:rPr lang="ko-KR" altLang="en-US" dirty="0"/>
+              <a:t>에 비해 일반적으로 사용</a:t>
+            </a:r>
+            <a:endParaRPr lang="en-US" altLang="ko-KR" dirty="0"/>
+          </a:p>
+          <a:p>
+            <a:pPr marL="742950" lvl="1" indent="-285750">
+              <a:buFont typeface="Arial" panose="020B0604020202020204" pitchFamily="34" charset="0"/>
+              <a:buChar char="•"/>
+            </a:pPr>
+            <a:r>
+              <a:rPr lang="ko-KR" altLang="en-US" dirty="0"/>
+              <a:t>더 좋은 </a:t>
+            </a:r>
+            <a:r>
+              <a:rPr lang="ko-KR" altLang="en-US" dirty="0" err="1"/>
+              <a:t>임베딩</a:t>
+            </a:r>
+            <a:r>
+              <a:rPr lang="ko-KR" altLang="en-US" dirty="0"/>
+              <a:t> 품질을 보임</a:t>
+            </a:r>
+            <a:endParaRPr lang="en-US" altLang="ko-KR" dirty="0"/>
+          </a:p>
+          <a:p>
+            <a:pPr marL="742950" lvl="1" indent="-285750">
+              <a:buFont typeface="Arial" panose="020B0604020202020204" pitchFamily="34" charset="0"/>
+              <a:buChar char="•"/>
+            </a:pPr>
+            <a:endParaRPr lang="en-US" altLang="ko-KR" dirty="0"/>
+          </a:p>
+          <a:p>
+            <a:pPr marL="742950" lvl="1" indent="-285750">
+              <a:buFont typeface="Arial" panose="020B0604020202020204" pitchFamily="34" charset="0"/>
+              <a:buChar char="•"/>
+            </a:pPr>
+            <a:endParaRPr lang="en-US" altLang="ko-KR" dirty="0"/>
+          </a:p>
+        </p:txBody>
+      </p:sp>
+      <p:sp>
+        <p:nvSpPr>
+          <p:cNvPr id="6" name="TextBox 5"/>
+          <p:cNvSpPr txBox="1"/>
+          <p:nvPr/>
+        </p:nvSpPr>
+        <p:spPr>
+          <a:xfrm>
+            <a:off x="539552" y="1065096"/>
+            <a:ext cx="7992888" cy="446276"/>
+          </a:xfrm>
+          <a:prstGeom prst="rect">
+            <a:avLst/>
+          </a:prstGeom>
+          <a:noFill/>
+        </p:spPr>
+        <p:txBody>
+          <a:bodyPr wrap="square" rtlCol="0">
+            <a:spAutoFit/>
+          </a:bodyPr>
+          <a:lstStyle/>
+          <a:p>
+            <a:r>
+              <a:rPr lang="en-US" altLang="ko-KR" sz="2300" dirty="0"/>
+              <a:t>Word2Vec</a:t>
+            </a:r>
+            <a:endParaRPr lang="ko-KR" altLang="en-US" sz="2300" dirty="0"/>
+          </a:p>
+        </p:txBody>
+      </p:sp>
+    </p:spTree>
+    <p:extLst>
+      <p:ext uri="{BB962C8B-B14F-4D97-AF65-F5344CB8AC3E}">
+        <p14:creationId xmlns:p14="http://schemas.microsoft.com/office/powerpoint/2010/main" val="1572472878"/>
+      </p:ext>
+    </p:extLst>
+  </p:cSld>
+  <p:clrMapOvr>
+    <a:masterClrMapping/>
+  </p:clrMapOvr>
+</p:sld>
+</file>
+
+<file path=ppt/slides/slide18.xml><?xml version="1.0" encoding="utf-8"?>
+<p:sld xmlns:a="http://schemas.openxmlformats.org/drawingml/2006/main" xmlns:r="http://schemas.openxmlformats.org/officeDocument/2006/relationships" xmlns:p="http://schemas.openxmlformats.org/presentationml/2006/main">
+  <p:cSld>
+    <p:spTree>
+      <p:nvGrpSpPr>
+        <p:cNvPr id="1" name=""/>
+        <p:cNvGrpSpPr/>
+        <p:nvPr/>
+      </p:nvGrpSpPr>
+      <p:grpSpPr>
+        <a:xfrm>
+          <a:off x="0" y="0"/>
+          <a:ext cx="0" cy="0"/>
+          <a:chOff x="0" y="0"/>
+          <a:chExt cx="0" cy="0"/>
+        </a:xfrm>
+      </p:grpSpPr>
+      <p:sp>
+        <p:nvSpPr>
+          <p:cNvPr id="3" name="타원 2"/>
+          <p:cNvSpPr/>
+          <p:nvPr/>
+        </p:nvSpPr>
+        <p:spPr>
+          <a:xfrm>
+            <a:off x="4067944" y="74100"/>
+            <a:ext cx="936104" cy="936104"/>
+          </a:xfrm>
+          <a:prstGeom prst="ellipse">
+            <a:avLst/>
+          </a:prstGeom>
+          <a:solidFill>
+            <a:schemeClr val="tx2">
+              <a:lumMod val="75000"/>
+            </a:schemeClr>
+          </a:solidFill>
+          <a:ln>
+            <a:noFill/>
+          </a:ln>
+        </p:spPr>
+        <p:style>
+          <a:lnRef idx="2">
+            <a:schemeClr val="accent1">
+              <a:shade val="50000"/>
+            </a:schemeClr>
+          </a:lnRef>
+          <a:fillRef idx="1">
+            <a:schemeClr val="accent1"/>
+          </a:fillRef>
+          <a:effectRef idx="0">
+            <a:schemeClr val="accent1"/>
+          </a:effectRef>
+          <a:fontRef idx="minor">
+            <a:schemeClr val="lt1"/>
+          </a:fontRef>
+        </p:style>
+        <p:txBody>
+          <a:bodyPr rtlCol="0" anchor="ctr"/>
+          <a:lstStyle/>
+          <a:p>
+            <a:pPr algn="ctr"/>
+            <a:endParaRPr lang="ko-KR" altLang="en-US"/>
+          </a:p>
+        </p:txBody>
+      </p:sp>
+      <p:sp>
+        <p:nvSpPr>
+          <p:cNvPr id="8" name="직사각형 7"/>
+          <p:cNvSpPr/>
+          <p:nvPr/>
+        </p:nvSpPr>
+        <p:spPr>
+          <a:xfrm>
+            <a:off x="708380" y="271681"/>
+            <a:ext cx="857927" cy="276999"/>
+          </a:xfrm>
+          <a:prstGeom prst="rect">
+            <a:avLst/>
+          </a:prstGeom>
+        </p:spPr>
+        <p:txBody>
+          <a:bodyPr wrap="none">
+            <a:spAutoFit/>
+          </a:bodyPr>
+          <a:lstStyle/>
+          <a:p>
+            <a:pPr algn="ctr"/>
+            <a:r>
+              <a:rPr lang="ko-KR" altLang="en-US" sz="1200" b="1" spc="-150" dirty="0">
+                <a:solidFill>
+                  <a:schemeClr val="bg1"/>
+                </a:solidFill>
+              </a:rPr>
+              <a:t>자연어처리</a:t>
+            </a:r>
+            <a:endParaRPr lang="en-US" altLang="ko-KR" sz="1200" b="1" spc="-150" dirty="0">
+              <a:solidFill>
+                <a:schemeClr val="bg1"/>
+              </a:solidFill>
+            </a:endParaRPr>
+          </a:p>
+        </p:txBody>
+      </p:sp>
+      <p:sp>
+        <p:nvSpPr>
+          <p:cNvPr id="9" name="TextBox 8"/>
+          <p:cNvSpPr txBox="1"/>
+          <p:nvPr/>
+        </p:nvSpPr>
+        <p:spPr>
+          <a:xfrm>
+            <a:off x="3995936" y="479095"/>
+            <a:ext cx="1080120" cy="461665"/>
+          </a:xfrm>
+          <a:prstGeom prst="rect">
+            <a:avLst/>
+          </a:prstGeom>
+          <a:noFill/>
+        </p:spPr>
+        <p:txBody>
+          <a:bodyPr wrap="square" rtlCol="0">
+            <a:spAutoFit/>
+          </a:bodyPr>
+          <a:lstStyle/>
+          <a:p>
+            <a:pPr algn="ctr"/>
+            <a:r>
+              <a:rPr lang="en-US" altLang="ko-KR" sz="2400" dirty="0">
+                <a:solidFill>
+                  <a:schemeClr val="bg1"/>
+                </a:solidFill>
+                <a:latin typeface="HY헤드라인M" pitchFamily="18" charset="-127"/>
+                <a:ea typeface="HY헤드라인M" pitchFamily="18" charset="-127"/>
+              </a:rPr>
+              <a:t>01</a:t>
+            </a:r>
+            <a:endParaRPr lang="ko-KR" altLang="en-US" sz="2400" dirty="0">
+              <a:solidFill>
+                <a:schemeClr val="bg1"/>
+              </a:solidFill>
+              <a:latin typeface="HY헤드라인M" pitchFamily="18" charset="-127"/>
+              <a:ea typeface="HY헤드라인M" pitchFamily="18" charset="-127"/>
+            </a:endParaRPr>
+          </a:p>
+        </p:txBody>
+      </p:sp>
+      <p:sp>
+        <p:nvSpPr>
+          <p:cNvPr id="4" name="TextBox 3"/>
+          <p:cNvSpPr txBox="1"/>
+          <p:nvPr/>
+        </p:nvSpPr>
+        <p:spPr>
+          <a:xfrm>
+            <a:off x="971600" y="1700955"/>
+            <a:ext cx="7200800" cy="646331"/>
+          </a:xfrm>
+          <a:prstGeom prst="rect">
+            <a:avLst/>
+          </a:prstGeom>
+          <a:noFill/>
+        </p:spPr>
+        <p:txBody>
+          <a:bodyPr wrap="square" rtlCol="0">
+            <a:spAutoFit/>
+          </a:bodyPr>
+          <a:lstStyle/>
+          <a:p>
+            <a:pPr marL="285750" indent="-285750">
+              <a:buFont typeface="Arial" panose="020B0604020202020204" pitchFamily="34" charset="0"/>
+              <a:buChar char="•"/>
+            </a:pPr>
+            <a:r>
+              <a:rPr lang="ko-KR" altLang="en-US" dirty="0" err="1"/>
+              <a:t>단어간의</a:t>
+            </a:r>
+            <a:r>
+              <a:rPr lang="ko-KR" altLang="en-US" dirty="0"/>
+              <a:t> 유사도 계산이 가능</a:t>
+            </a:r>
+            <a:endParaRPr lang="en-US" altLang="ko-KR" dirty="0"/>
+          </a:p>
+          <a:p>
+            <a:pPr marL="285750" indent="-285750">
+              <a:buFont typeface="Arial" panose="020B0604020202020204" pitchFamily="34" charset="0"/>
+              <a:buChar char="•"/>
+            </a:pPr>
+            <a:r>
+              <a:rPr lang="ko-KR" altLang="en-US" dirty="0" err="1"/>
+              <a:t>머신러닝과</a:t>
+            </a:r>
+            <a:r>
+              <a:rPr lang="ko-KR" altLang="en-US" dirty="0"/>
+              <a:t> </a:t>
+            </a:r>
+            <a:r>
+              <a:rPr lang="ko-KR" altLang="en-US" dirty="0" err="1"/>
+              <a:t>딥러닝에서</a:t>
+            </a:r>
+            <a:r>
+              <a:rPr lang="ko-KR" altLang="en-US" dirty="0"/>
+              <a:t> 입력 데이터로 사용이 가능</a:t>
+            </a:r>
+            <a:endParaRPr lang="en-US" altLang="ko-KR" dirty="0"/>
+          </a:p>
+        </p:txBody>
+      </p:sp>
+      <p:sp>
+        <p:nvSpPr>
+          <p:cNvPr id="6" name="TextBox 5"/>
+          <p:cNvSpPr txBox="1"/>
+          <p:nvPr/>
+        </p:nvSpPr>
+        <p:spPr>
+          <a:xfrm>
+            <a:off x="539552" y="1065096"/>
+            <a:ext cx="7992888" cy="446276"/>
+          </a:xfrm>
+          <a:prstGeom prst="rect">
+            <a:avLst/>
+          </a:prstGeom>
+          <a:noFill/>
+        </p:spPr>
+        <p:txBody>
+          <a:bodyPr wrap="square" rtlCol="0">
+            <a:spAutoFit/>
+          </a:bodyPr>
+          <a:lstStyle/>
+          <a:p>
+            <a:r>
+              <a:rPr lang="en-US" altLang="ko-KR" sz="2300" dirty="0"/>
+              <a:t>Word2Vec</a:t>
+            </a:r>
+            <a:endParaRPr lang="ko-KR" altLang="en-US" sz="2300" dirty="0"/>
+          </a:p>
+        </p:txBody>
+      </p:sp>
+    </p:spTree>
+    <p:extLst>
+      <p:ext uri="{BB962C8B-B14F-4D97-AF65-F5344CB8AC3E}">
+        <p14:creationId xmlns:p14="http://schemas.microsoft.com/office/powerpoint/2010/main" val="1501590709"/>
+      </p:ext>
+    </p:extLst>
+  </p:cSld>
+  <p:clrMapOvr>
+    <a:masterClrMapping/>
+  </p:clrMapOvr>
+</p:sld>
+</file>
+
+<file path=ppt/slides/slide19.xml><?xml version="1.0" encoding="utf-8"?>
+<p:sld xmlns:a="http://schemas.openxmlformats.org/drawingml/2006/main" xmlns:r="http://schemas.openxmlformats.org/officeDocument/2006/relationships" xmlns:p="http://schemas.openxmlformats.org/presentationml/2006/main">
+  <p:cSld>
+    <p:spTree>
+      <p:nvGrpSpPr>
+        <p:cNvPr id="1" name=""/>
+        <p:cNvGrpSpPr/>
+        <p:nvPr/>
+      </p:nvGrpSpPr>
+      <p:grpSpPr>
+        <a:xfrm>
+          <a:off x="0" y="0"/>
+          <a:ext cx="0" cy="0"/>
+          <a:chOff x="0" y="0"/>
+          <a:chExt cx="0" cy="0"/>
+        </a:xfrm>
+      </p:grpSpPr>
+      <p:sp>
+        <p:nvSpPr>
+          <p:cNvPr id="3" name="타원 2"/>
+          <p:cNvSpPr/>
+          <p:nvPr/>
+        </p:nvSpPr>
+        <p:spPr>
+          <a:xfrm>
+            <a:off x="4067944" y="74100"/>
+            <a:ext cx="936104" cy="936104"/>
+          </a:xfrm>
+          <a:prstGeom prst="ellipse">
+            <a:avLst/>
+          </a:prstGeom>
+          <a:solidFill>
+            <a:schemeClr val="tx2">
+              <a:lumMod val="75000"/>
+            </a:schemeClr>
+          </a:solidFill>
+          <a:ln>
+            <a:noFill/>
+          </a:ln>
+        </p:spPr>
+        <p:style>
+          <a:lnRef idx="2">
+            <a:schemeClr val="accent1">
+              <a:shade val="50000"/>
+            </a:schemeClr>
+          </a:lnRef>
+          <a:fillRef idx="1">
+            <a:schemeClr val="accent1"/>
+          </a:fillRef>
+          <a:effectRef idx="0">
+            <a:schemeClr val="accent1"/>
+          </a:effectRef>
+          <a:fontRef idx="minor">
+            <a:schemeClr val="lt1"/>
+          </a:fontRef>
+        </p:style>
+        <p:txBody>
+          <a:bodyPr rtlCol="0" anchor="ctr"/>
+          <a:lstStyle/>
+          <a:p>
+            <a:pPr algn="ctr"/>
+            <a:endParaRPr lang="ko-KR" altLang="en-US"/>
+          </a:p>
+        </p:txBody>
+      </p:sp>
+      <p:sp>
+        <p:nvSpPr>
+          <p:cNvPr id="8" name="직사각형 7"/>
+          <p:cNvSpPr/>
+          <p:nvPr/>
+        </p:nvSpPr>
+        <p:spPr>
+          <a:xfrm>
+            <a:off x="708380" y="271681"/>
+            <a:ext cx="857927" cy="276999"/>
+          </a:xfrm>
+          <a:prstGeom prst="rect">
+            <a:avLst/>
+          </a:prstGeom>
+        </p:spPr>
+        <p:txBody>
+          <a:bodyPr wrap="none">
+            <a:spAutoFit/>
+          </a:bodyPr>
+          <a:lstStyle/>
+          <a:p>
+            <a:pPr algn="ctr"/>
+            <a:r>
+              <a:rPr lang="ko-KR" altLang="en-US" sz="1200" b="1" spc="-150" dirty="0">
+                <a:solidFill>
+                  <a:schemeClr val="bg1"/>
+                </a:solidFill>
+              </a:rPr>
+              <a:t>자연어처리</a:t>
+            </a:r>
+            <a:endParaRPr lang="en-US" altLang="ko-KR" sz="1200" b="1" spc="-150" dirty="0">
+              <a:solidFill>
+                <a:schemeClr val="bg1"/>
+              </a:solidFill>
+            </a:endParaRPr>
+          </a:p>
+        </p:txBody>
+      </p:sp>
+      <p:sp>
+        <p:nvSpPr>
+          <p:cNvPr id="9" name="TextBox 8"/>
+          <p:cNvSpPr txBox="1"/>
+          <p:nvPr/>
+        </p:nvSpPr>
+        <p:spPr>
+          <a:xfrm>
+            <a:off x="3995936" y="479095"/>
+            <a:ext cx="1080120" cy="461665"/>
+          </a:xfrm>
+          <a:prstGeom prst="rect">
+            <a:avLst/>
+          </a:prstGeom>
+          <a:noFill/>
+        </p:spPr>
+        <p:txBody>
+          <a:bodyPr wrap="square" rtlCol="0">
+            <a:spAutoFit/>
+          </a:bodyPr>
+          <a:lstStyle/>
+          <a:p>
+            <a:pPr algn="ctr"/>
+            <a:r>
+              <a:rPr lang="en-US" altLang="ko-KR" sz="2400" dirty="0">
+                <a:solidFill>
+                  <a:schemeClr val="bg1"/>
+                </a:solidFill>
+                <a:latin typeface="HY헤드라인M" pitchFamily="18" charset="-127"/>
+                <a:ea typeface="HY헤드라인M" pitchFamily="18" charset="-127"/>
+              </a:rPr>
+              <a:t>01</a:t>
+            </a:r>
+            <a:endParaRPr lang="ko-KR" altLang="en-US" sz="2400" dirty="0">
+              <a:solidFill>
+                <a:schemeClr val="bg1"/>
+              </a:solidFill>
+              <a:latin typeface="HY헤드라인M" pitchFamily="18" charset="-127"/>
+              <a:ea typeface="HY헤드라인M" pitchFamily="18" charset="-127"/>
+            </a:endParaRPr>
+          </a:p>
+        </p:txBody>
+      </p:sp>
+      <p:sp>
+        <p:nvSpPr>
+          <p:cNvPr id="4" name="TextBox 3"/>
+          <p:cNvSpPr txBox="1"/>
+          <p:nvPr/>
+        </p:nvSpPr>
+        <p:spPr>
+          <a:xfrm>
+            <a:off x="971600" y="1700955"/>
+            <a:ext cx="7200800" cy="2308324"/>
+          </a:xfrm>
+          <a:prstGeom prst="rect">
+            <a:avLst/>
+          </a:prstGeom>
+          <a:noFill/>
+        </p:spPr>
+        <p:txBody>
+          <a:bodyPr wrap="square" rtlCol="0">
+            <a:spAutoFit/>
+          </a:bodyPr>
+          <a:lstStyle/>
+          <a:p>
+            <a:pPr marL="285750" indent="-285750">
+              <a:buFont typeface="Arial" panose="020B0604020202020204" pitchFamily="34" charset="0"/>
+              <a:buChar char="•"/>
+            </a:pPr>
+            <a:r>
+              <a:rPr lang="en-US" altLang="ko-KR" dirty="0"/>
+              <a:t>Word2Vec</a:t>
+            </a:r>
+            <a:r>
+              <a:rPr lang="ko-KR" altLang="en-US" dirty="0"/>
+              <a:t>과 통계 기반의 강점을 결합한 방식</a:t>
+            </a:r>
+            <a:endParaRPr lang="en-US" altLang="ko-KR" dirty="0"/>
+          </a:p>
+          <a:p>
+            <a:pPr marL="285750" indent="-285750">
+              <a:buFont typeface="Arial" panose="020B0604020202020204" pitchFamily="34" charset="0"/>
+              <a:buChar char="•"/>
+            </a:pPr>
+            <a:r>
+              <a:rPr lang="ko-KR" altLang="en-US" dirty="0"/>
+              <a:t>단어 간의 전역적인 통계정보를 이용해서 단어 </a:t>
+            </a:r>
+            <a:r>
+              <a:rPr lang="ko-KR" altLang="en-US" dirty="0" err="1"/>
+              <a:t>백터를</a:t>
+            </a:r>
+            <a:r>
+              <a:rPr lang="ko-KR" altLang="en-US" dirty="0"/>
+              <a:t> 학습하는 </a:t>
+            </a:r>
+            <a:r>
+              <a:rPr lang="ko-KR" altLang="en-US" dirty="0" err="1"/>
+              <a:t>임베딩</a:t>
+            </a:r>
+            <a:r>
+              <a:rPr lang="ko-KR" altLang="en-US" dirty="0"/>
+              <a:t> 방식</a:t>
+            </a:r>
+            <a:endParaRPr lang="en-US" altLang="ko-KR" dirty="0"/>
+          </a:p>
+          <a:p>
+            <a:pPr marL="285750" indent="-285750">
+              <a:buFont typeface="Arial" panose="020B0604020202020204" pitchFamily="34" charset="0"/>
+              <a:buChar char="•"/>
+            </a:pPr>
+            <a:r>
+              <a:rPr lang="ko-KR" altLang="en-US" dirty="0"/>
+              <a:t>사전에 학습이 된 모델을 이용하여 </a:t>
+            </a:r>
+            <a:r>
+              <a:rPr lang="ko-KR" altLang="en-US" dirty="0" err="1"/>
+              <a:t>임베딩</a:t>
+            </a:r>
+            <a:r>
+              <a:rPr lang="ko-KR" altLang="en-US" dirty="0"/>
+              <a:t> 변환을 사용</a:t>
+            </a:r>
+            <a:endParaRPr lang="en-US" altLang="ko-KR" dirty="0"/>
+          </a:p>
+          <a:p>
+            <a:pPr marL="285750" indent="-285750">
+              <a:buFont typeface="Arial" panose="020B0604020202020204" pitchFamily="34" charset="0"/>
+              <a:buChar char="•"/>
+            </a:pPr>
+            <a:r>
+              <a:rPr lang="ko-KR" altLang="en-US" dirty="0"/>
+              <a:t>영문 모델은</a:t>
+            </a:r>
+            <a:br>
+              <a:rPr lang="en-US" altLang="ko-KR" dirty="0"/>
+            </a:br>
+            <a:r>
+              <a:rPr lang="en-US" altLang="ko-KR" dirty="0"/>
+              <a:t>	https://nlp.stanford.edu/projects/glove/</a:t>
+            </a:r>
+            <a:br>
+              <a:rPr lang="en-US" altLang="ko-KR" dirty="0"/>
+            </a:br>
+            <a:r>
+              <a:rPr lang="ko-KR" altLang="en-US" dirty="0"/>
+              <a:t>사이트에서 다운로드 가능</a:t>
+            </a:r>
+            <a:endParaRPr lang="en-US" altLang="ko-KR" dirty="0"/>
+          </a:p>
+          <a:p>
+            <a:pPr marL="285750" indent="-285750">
+              <a:buFont typeface="Arial" panose="020B0604020202020204" pitchFamily="34" charset="0"/>
+              <a:buChar char="•"/>
+            </a:pPr>
+            <a:endParaRPr lang="en-US" altLang="ko-KR" dirty="0"/>
+          </a:p>
+        </p:txBody>
+      </p:sp>
+      <p:sp>
+        <p:nvSpPr>
+          <p:cNvPr id="6" name="TextBox 5"/>
+          <p:cNvSpPr txBox="1"/>
+          <p:nvPr/>
+        </p:nvSpPr>
+        <p:spPr>
+          <a:xfrm>
+            <a:off x="539552" y="1065096"/>
+            <a:ext cx="7992888" cy="446276"/>
+          </a:xfrm>
+          <a:prstGeom prst="rect">
+            <a:avLst/>
+          </a:prstGeom>
+          <a:noFill/>
+        </p:spPr>
+        <p:txBody>
+          <a:bodyPr wrap="square" rtlCol="0">
+            <a:spAutoFit/>
+          </a:bodyPr>
+          <a:lstStyle/>
+          <a:p>
+            <a:r>
+              <a:rPr lang="en-US" altLang="ko-KR" sz="2300" dirty="0" err="1"/>
+              <a:t>GloVe</a:t>
+            </a:r>
+            <a:endParaRPr lang="ko-KR" altLang="en-US" sz="2300" dirty="0"/>
+          </a:p>
+        </p:txBody>
+      </p:sp>
+    </p:spTree>
+    <p:extLst>
+      <p:ext uri="{BB962C8B-B14F-4D97-AF65-F5344CB8AC3E}">
+        <p14:creationId xmlns:p14="http://schemas.microsoft.com/office/powerpoint/2010/main" val="3378569894"/>
+      </p:ext>
+    </p:extLst>
+  </p:cSld>
+  <p:clrMapOvr>
+    <a:masterClrMapping/>
+  </p:clrMapOvr>
+</p:sld>
+</file>
+
+<file path=ppt/slides/slide2.xml><?xml version="1.0" encoding="utf-8"?>
 <p:sld xmlns:a="http://schemas.openxmlformats.org/drawingml/2006/main" xmlns:r="http://schemas.openxmlformats.org/officeDocument/2006/relationships" xmlns:p="http://schemas.openxmlformats.org/presentationml/2006/main">
   <p:cSld>
     <p:spTree>
@@ -8758,7 +9972,7 @@
         <p:spPr>
           <a:xfrm>
             <a:off x="2627784" y="2971550"/>
-            <a:ext cx="3858956" cy="1169551"/>
+            <a:ext cx="3858956" cy="630942"/>
           </a:xfrm>
           <a:prstGeom prst="rect">
             <a:avLst/>
@@ -8778,7 +9992,7 @@
                   <a:schemeClr val="bg1"/>
                 </a:solidFill>
               </a:rPr>
-              <a:t>딥러닝 자연어 처리</a:t>
+              <a:t>토큰화</a:t>
             </a:r>
           </a:p>
         </p:txBody>
@@ -8786,7 +10000,7 @@
     </p:spTree>
     <p:extLst>
       <p:ext uri="{BB962C8B-B14F-4D97-AF65-F5344CB8AC3E}">
-        <p14:creationId xmlns:p14="http://schemas.microsoft.com/office/powerpoint/2010/main" val="2764100057"/>
+        <p14:creationId xmlns:p14="http://schemas.microsoft.com/office/powerpoint/2010/main" val="1192776622"/>
       </p:ext>
     </p:extLst>
   </p:cSld>
@@ -8796,7 +10010,7 @@
 </p:sld>
 </file>
 
-<file path=ppt/slides/slide16.xml><?xml version="1.0" encoding="utf-8"?>
+<file path=ppt/slides/slide20.xml><?xml version="1.0" encoding="utf-8"?>
 <p:sld xmlns:a="http://schemas.openxmlformats.org/drawingml/2006/main" xmlns:r="http://schemas.openxmlformats.org/officeDocument/2006/relationships" xmlns:p="http://schemas.openxmlformats.org/presentationml/2006/main">
   <p:cSld>
     <p:spTree>
@@ -8951,7 +10165,7 @@
         <p:spPr>
           <a:xfrm>
             <a:off x="971600" y="1700955"/>
-            <a:ext cx="7200800" cy="1477328"/>
+            <a:ext cx="7200800" cy="2031325"/>
           </a:xfrm>
           <a:prstGeom prst="rect">
             <a:avLst/>
@@ -8969,20 +10183,8 @@
               <a:buChar char="•"/>
             </a:pPr>
             <a:r>
-              <a:rPr lang="en-US" altLang="ko-KR" dirty="0"/>
-              <a:t>Word2Vec</a:t>
-            </a:r>
-            <a:r>
-              <a:rPr lang="ko-KR" altLang="en-US" dirty="0"/>
-              <a:t>은 단어를 단순한 문자로 생각하는 것이 아니라 의미를 가진 벡터로 표현하는 딥러닝 </a:t>
-            </a:r>
-            <a:r>
-              <a:rPr lang="ko-KR" altLang="en-US" dirty="0" err="1"/>
-              <a:t>임베딩</a:t>
-            </a:r>
-            <a:r>
-              <a:rPr lang="ko-KR" altLang="en-US" dirty="0"/>
-              <a:t> 방식</a:t>
+              <a:rPr lang="ko-KR" altLang="en-US" dirty="0"/>
+              <a:t>단어 하나를 하나의 토큰으로 보는 것이 아니라 글자 단위로 분해하여 벡터를 학습하는 방식</a:t>
             </a:r>
             <a:endParaRPr lang="en-US" altLang="ko-KR" dirty="0"/>
           </a:p>
@@ -8993,7 +10195,31 @@
             </a:pPr>
             <a:r>
               <a:rPr lang="ko-KR" altLang="en-US" dirty="0"/>
-              <a:t>문맥을 바탕으로 단어의 의미를 학습하는 모델</a:t>
+              <a:t>글자를 </a:t>
+            </a:r>
+            <a:r>
+              <a:rPr lang="en-US" altLang="ko-KR" dirty="0"/>
+              <a:t>n-gram</a:t>
+            </a:r>
+            <a:r>
+              <a:rPr lang="ko-KR" altLang="en-US" dirty="0"/>
+              <a:t>의 형식으로 학습을 하기 때문에 </a:t>
+            </a:r>
+            <a:r>
+              <a:rPr lang="en-US" altLang="ko-KR" dirty="0"/>
+              <a:t>OOV(</a:t>
+            </a:r>
+            <a:r>
+              <a:rPr lang="ko-KR" altLang="en-US" dirty="0"/>
+              <a:t>사전에 없는 단어</a:t>
+            </a:r>
+            <a:r>
+              <a:rPr lang="en-US" altLang="ko-KR" dirty="0"/>
+              <a:t>)</a:t>
+            </a:r>
+            <a:r>
+              <a:rPr lang="ko-KR" altLang="en-US" dirty="0"/>
+              <a:t>문제를 해결</a:t>
             </a:r>
             <a:endParaRPr lang="en-US" altLang="ko-KR" dirty="0"/>
           </a:p>
@@ -9004,7 +10230,33 @@
             </a:pPr>
             <a:r>
               <a:rPr lang="ko-KR" altLang="en-US" dirty="0"/>
-              <a:t>코사인 유사도를 활용하여 단어 간 의미적 유사성을 표현 할 수 있는 모델</a:t>
+              <a:t>단어의 형태 변화에 강한 모델</a:t>
+            </a:r>
+            <a:endParaRPr lang="en-US" altLang="ko-KR" dirty="0"/>
+          </a:p>
+          <a:p>
+            <a:pPr marL="285750" indent="-285750">
+              <a:buFont typeface="Arial" panose="020B0604020202020204" pitchFamily="34" charset="0"/>
+              <a:buChar char="•"/>
+            </a:pPr>
+            <a:r>
+              <a:rPr lang="ko-KR" altLang="en-US" dirty="0"/>
+              <a:t>단어 대신 글자 단위로 보기 때문에 학습에 시간이 오래 걸림</a:t>
+            </a:r>
+            <a:endParaRPr lang="en-US" altLang="ko-KR" dirty="0"/>
+          </a:p>
+          <a:p>
+            <a:pPr marL="285750" indent="-285750">
+              <a:buFont typeface="Arial" panose="020B0604020202020204" pitchFamily="34" charset="0"/>
+              <a:buChar char="•"/>
+            </a:pPr>
+            <a:r>
+              <a:rPr lang="en-US" altLang="ko-KR" dirty="0"/>
+              <a:t>N-gram </a:t>
+            </a:r>
+            <a:r>
+              <a:rPr lang="ko-KR" altLang="en-US" dirty="0"/>
+              <a:t>벡터들을 추가로 이용함으로 메모리에 사용량이 증가</a:t>
             </a:r>
             <a:endParaRPr lang="en-US" altLang="ko-KR" dirty="0"/>
           </a:p>
@@ -9033,14 +10285,19 @@
           <a:lstStyle/>
           <a:p>
             <a:r>
-              <a:rPr lang="en-US" altLang="ko-KR" sz="2300" dirty="0"/>
-              <a:t>Word2Vec</a:t>
+              <a:rPr lang="en-US" altLang="ko-KR" sz="2300" dirty="0" err="1"/>
+              <a:t>FastText</a:t>
             </a:r>
             <a:endParaRPr lang="ko-KR" altLang="en-US" sz="2300" dirty="0"/>
           </a:p>
         </p:txBody>
       </p:sp>
     </p:spTree>
+    <p:extLst>
+      <p:ext uri="{BB962C8B-B14F-4D97-AF65-F5344CB8AC3E}">
+        <p14:creationId xmlns:p14="http://schemas.microsoft.com/office/powerpoint/2010/main" val="3311746442"/>
+      </p:ext>
+    </p:extLst>
   </p:cSld>
   <p:clrMapOvr>
     <a:masterClrMapping/>
@@ -9048,7 +10305,7 @@
 </p:sld>
 </file>
 
-<file path=ppt/slides/slide17.xml><?xml version="1.0" encoding="utf-8"?>
+<file path=ppt/slides/slide21.xml><?xml version="1.0" encoding="utf-8"?>
 <p:sld xmlns:a="http://schemas.openxmlformats.org/drawingml/2006/main" xmlns:r="http://schemas.openxmlformats.org/officeDocument/2006/relationships" xmlns:p="http://schemas.openxmlformats.org/presentationml/2006/main">
   <p:cSld>
     <p:spTree>
@@ -9203,7 +10460,7 @@
         <p:spPr>
           <a:xfrm>
             <a:off x="971600" y="1700955"/>
-            <a:ext cx="7200800" cy="2031325"/>
+            <a:ext cx="7200800" cy="1754326"/>
           </a:xfrm>
           <a:prstGeom prst="rect">
             <a:avLst/>
@@ -9221,100 +10478,77 @@
               <a:buChar char="•"/>
             </a:pPr>
             <a:r>
-              <a:rPr lang="en-US" altLang="ko-KR" dirty="0"/>
-              <a:t>CBOW</a:t>
-            </a:r>
-          </a:p>
-          <a:p>
-            <a:pPr marL="742950" lvl="1" indent="-285750">
+              <a:rPr lang="ko-KR" altLang="en-US" dirty="0"/>
+              <a:t>문장 전체를 하나의 벡터로 </a:t>
+            </a:r>
+            <a:r>
+              <a:rPr lang="ko-KR" altLang="en-US" dirty="0" err="1"/>
+              <a:t>임베딩</a:t>
+            </a:r>
+            <a:r>
+              <a:rPr lang="ko-KR" altLang="en-US" dirty="0"/>
+              <a:t> 하는 알고리즘</a:t>
+            </a:r>
+            <a:endParaRPr lang="en-US" altLang="ko-KR" dirty="0"/>
+          </a:p>
+          <a:p>
+            <a:pPr marL="285750" indent="-285750">
               <a:buFont typeface="Arial" panose="020B0604020202020204" pitchFamily="34" charset="0"/>
               <a:buChar char="•"/>
             </a:pPr>
             <a:r>
-              <a:rPr lang="ko-KR" altLang="en-US" dirty="0"/>
-              <a:t>주변 단어를 이용하여 중심 단어를 예측</a:t>
+              <a:rPr lang="en-US" altLang="ko-KR" dirty="0"/>
+              <a:t>Word2Vec</a:t>
+            </a:r>
+            <a:r>
+              <a:rPr lang="ko-KR" altLang="en-US" dirty="0"/>
+              <a:t>의 확장판으로 문서에 </a:t>
+            </a:r>
+            <a:r>
+              <a:rPr lang="en-US" altLang="ko-KR" dirty="0"/>
+              <a:t>ID</a:t>
+            </a:r>
+            <a:r>
+              <a:rPr lang="ko-KR" altLang="en-US" dirty="0"/>
+              <a:t>를 추가하여 학습에 참여 시키는 방법</a:t>
             </a:r>
             <a:endParaRPr lang="en-US" altLang="ko-KR" dirty="0"/>
           </a:p>
           <a:p>
-            <a:pPr marL="742950" lvl="1" indent="-285750">
+            <a:pPr marL="285750" indent="-285750">
               <a:buFont typeface="Arial" panose="020B0604020202020204" pitchFamily="34" charset="0"/>
               <a:buChar char="•"/>
             </a:pPr>
             <a:r>
               <a:rPr lang="ko-KR" altLang="en-US" dirty="0"/>
-              <a:t>문맥의 단어 </a:t>
+              <a:t>문장에 </a:t>
             </a:r>
             <a:r>
               <a:rPr lang="en-US" altLang="ko-KR" dirty="0"/>
-              <a:t>: [</a:t>
-            </a:r>
-            <a:r>
-              <a:rPr lang="ko-KR" altLang="en-US" dirty="0"/>
-              <a:t>나는</a:t>
-            </a:r>
-            <a:r>
-              <a:rPr lang="en-US" altLang="ko-KR" dirty="0"/>
-              <a:t>, </a:t>
-            </a:r>
-            <a:r>
-              <a:rPr lang="ko-KR" altLang="en-US" dirty="0"/>
-              <a:t>먹었다</a:t>
-            </a:r>
-            <a:r>
-              <a:rPr lang="en-US" altLang="ko-KR" dirty="0"/>
-              <a:t>]</a:t>
-            </a:r>
-          </a:p>
-          <a:p>
-            <a:pPr marL="742950" lvl="1" indent="-285750">
+              <a:t>ID</a:t>
+            </a:r>
+            <a:r>
+              <a:rPr lang="ko-KR" altLang="en-US" dirty="0"/>
+              <a:t>를 추가하기 위해 </a:t>
+            </a:r>
+            <a:r>
+              <a:rPr lang="en-US" altLang="ko-KR" dirty="0" err="1"/>
+              <a:t>TaggedDocument</a:t>
+            </a:r>
+            <a:r>
+              <a:rPr lang="ko-KR" altLang="en-US" dirty="0"/>
+              <a:t>를 사용</a:t>
+            </a:r>
+            <a:endParaRPr lang="en-US" altLang="ko-KR" dirty="0"/>
+          </a:p>
+          <a:p>
+            <a:pPr marL="285750" indent="-285750">
               <a:buFont typeface="Arial" panose="020B0604020202020204" pitchFamily="34" charset="0"/>
               <a:buChar char="•"/>
             </a:pPr>
             <a:r>
               <a:rPr lang="ko-KR" altLang="en-US" dirty="0"/>
-              <a:t>중심 단어 </a:t>
-            </a:r>
-            <a:r>
-              <a:rPr lang="en-US" altLang="ko-KR" dirty="0"/>
-              <a:t>: </a:t>
-            </a:r>
-            <a:r>
-              <a:rPr lang="ko-KR" altLang="en-US" dirty="0"/>
-              <a:t>밥</a:t>
-            </a:r>
-            <a:endParaRPr lang="en-US" altLang="ko-KR" dirty="0"/>
-          </a:p>
-          <a:p>
-            <a:pPr marL="742950" lvl="1" indent="-285750">
-              <a:buFont typeface="Arial" panose="020B0604020202020204" pitchFamily="34" charset="0"/>
-              <a:buChar char="•"/>
-            </a:pPr>
-            <a:r>
-              <a:rPr lang="ko-KR" altLang="en-US" dirty="0"/>
-              <a:t>특정 단어가 어떤 문맥에 등장하는지를 이해하는 방법</a:t>
-            </a:r>
-            <a:endParaRPr lang="en-US" altLang="ko-KR" dirty="0"/>
-          </a:p>
-          <a:p>
-            <a:pPr marL="742950" lvl="1" indent="-285750">
-              <a:buFont typeface="Arial" panose="020B0604020202020204" pitchFamily="34" charset="0"/>
-              <a:buChar char="•"/>
-            </a:pPr>
-            <a:r>
-              <a:rPr lang="ko-KR" altLang="en-US" dirty="0"/>
-              <a:t>긴 문맥에서는 잘 반영이 되지 않은 문제가 있음</a:t>
-            </a:r>
-            <a:endParaRPr lang="en-US" altLang="ko-KR" dirty="0"/>
-          </a:p>
-          <a:p>
-            <a:pPr marL="742950" lvl="1" indent="-285750">
-              <a:buFont typeface="Arial" panose="020B0604020202020204" pitchFamily="34" charset="0"/>
-              <a:buChar char="•"/>
-            </a:pPr>
-            <a:r>
-              <a:rPr lang="ko-KR" altLang="en-US" dirty="0"/>
-              <a:t>속도는 빠르고 자주 등장하는 단어에 유리</a:t>
+              <a:t>정적인 문맥 기반 모델로 단어의 위치나 순서의 미세한 차이를 반영하지 못함</a:t>
             </a:r>
             <a:endParaRPr lang="en-US" altLang="ko-KR" dirty="0"/>
           </a:p>
@@ -9344,7 +10578,7 @@
           <a:p>
             <a:r>
               <a:rPr lang="en-US" altLang="ko-KR" sz="2300" dirty="0"/>
-              <a:t>Word2Vec</a:t>
+              <a:t>Doc2Vec</a:t>
             </a:r>
             <a:endParaRPr lang="ko-KR" altLang="en-US" sz="2300" dirty="0"/>
           </a:p>
@@ -9353,7 +10587,7 @@
     </p:spTree>
     <p:extLst>
       <p:ext uri="{BB962C8B-B14F-4D97-AF65-F5344CB8AC3E}">
-        <p14:creationId xmlns:p14="http://schemas.microsoft.com/office/powerpoint/2010/main" val="2819083101"/>
+        <p14:creationId xmlns:p14="http://schemas.microsoft.com/office/powerpoint/2010/main" val="3613297929"/>
       </p:ext>
     </p:extLst>
   </p:cSld>
@@ -9363,7 +10597,7 @@
 </p:sld>
 </file>
 
-<file path=ppt/slides/slide18.xml><?xml version="1.0" encoding="utf-8"?>
+<file path=ppt/slides/slide22.xml><?xml version="1.0" encoding="utf-8"?>
 <p:sld xmlns:a="http://schemas.openxmlformats.org/drawingml/2006/main" xmlns:r="http://schemas.openxmlformats.org/officeDocument/2006/relationships" xmlns:p="http://schemas.openxmlformats.org/presentationml/2006/main">
   <p:cSld>
     <p:spTree>
@@ -9518,7 +10752,7 @@
         <p:spPr>
           <a:xfrm>
             <a:off x="971600" y="1700955"/>
-            <a:ext cx="7200800" cy="2585323"/>
+            <a:ext cx="7200800" cy="2308324"/>
           </a:xfrm>
           <a:prstGeom prst="rect">
             <a:avLst/>
@@ -9537,7 +10771,7 @@
             </a:pPr>
             <a:r>
               <a:rPr lang="en-US" altLang="ko-KR" dirty="0"/>
-              <a:t>Skip-Gram</a:t>
+              <a:t>PV-DM</a:t>
             </a:r>
           </a:p>
           <a:p>
@@ -9547,7 +10781,15 @@
             </a:pPr>
             <a:r>
               <a:rPr lang="ko-KR" altLang="en-US" dirty="0"/>
-              <a:t>중심 단어를 이용하여 주변 단어를 예측</a:t>
+              <a:t>문서 벡터 </a:t>
+            </a:r>
+            <a:r>
+              <a:rPr lang="en-US" altLang="ko-KR" dirty="0"/>
+              <a:t>+ </a:t>
+            </a:r>
+            <a:r>
+              <a:rPr lang="ko-KR" altLang="en-US" dirty="0"/>
+              <a:t>주변 단어들로 중심 단어를 예측</a:t>
             </a:r>
             <a:endParaRPr lang="en-US" altLang="ko-KR" dirty="0"/>
           </a:p>
@@ -9558,17 +10800,19 @@
             </a:pPr>
             <a:r>
               <a:rPr lang="ko-KR" altLang="en-US" dirty="0"/>
-              <a:t>중심 단어 </a:t>
-            </a:r>
+              <a:t>순서와 문맥을 보존하여 일반적으로 사용하는 기본값</a:t>
+            </a:r>
+            <a:endParaRPr lang="en-US" altLang="ko-KR" dirty="0"/>
+          </a:p>
+          <a:p>
+            <a:pPr marL="285750" indent="-285750">
+              <a:buFont typeface="Arial" panose="020B0604020202020204" pitchFamily="34" charset="0"/>
+              <a:buChar char="•"/>
+            </a:pPr>
             <a:r>
               <a:rPr lang="en-US" altLang="ko-KR" dirty="0"/>
-              <a:t>: </a:t>
-            </a:r>
-            <a:r>
-              <a:rPr lang="ko-KR" altLang="en-US" dirty="0"/>
-              <a:t>밥을</a:t>
-            </a:r>
-            <a:endParaRPr lang="en-US" altLang="ko-KR" dirty="0"/>
+              <a:t>PV-DBOW</a:t>
+            </a:r>
           </a:p>
           <a:p>
             <a:pPr marL="742950" lvl="1" indent="-285750">
@@ -9577,27 +10821,19 @@
             </a:pPr>
             <a:r>
               <a:rPr lang="ko-KR" altLang="en-US" dirty="0"/>
-              <a:t>문맥 단어 </a:t>
+              <a:t>문서 벡터로 단어를 직접 예측</a:t>
             </a:r>
             <a:r>
               <a:rPr lang="en-US" altLang="ko-KR" dirty="0"/>
-              <a:t>: [</a:t>
-            </a:r>
-            <a:r>
-              <a:rPr lang="ko-KR" altLang="en-US" dirty="0"/>
-              <a:t>나는</a:t>
+              <a:t>(</a:t>
+            </a:r>
+            <a:r>
+              <a:rPr lang="ko-KR" altLang="en-US" dirty="0"/>
+              <a:t>단어의 순서는 무시</a:t>
             </a:r>
             <a:r>
               <a:rPr lang="en-US" altLang="ko-KR" dirty="0"/>
-              <a:t>, </a:t>
-            </a:r>
-            <a:r>
-              <a:rPr lang="ko-KR" altLang="en-US" dirty="0"/>
-              <a:t>먹었다</a:t>
-            </a:r>
-            <a:r>
-              <a:rPr lang="en-US" altLang="ko-KR" dirty="0"/>
-              <a:t>]</a:t>
+              <a:t>)</a:t>
             </a:r>
           </a:p>
           <a:p>
@@ -9607,7 +10843,7 @@
             </a:pPr>
             <a:r>
               <a:rPr lang="ko-KR" altLang="en-US" dirty="0"/>
-              <a:t>희귀 단어 학습에 강함 </a:t>
+              <a:t>가볍고 빠르게 확인하기 위해 사용</a:t>
             </a:r>
             <a:endParaRPr lang="en-US" altLang="ko-KR" dirty="0"/>
           </a:p>
@@ -9618,45 +10854,12 @@
             </a:pPr>
             <a:r>
               <a:rPr lang="en-US" altLang="ko-KR" dirty="0"/>
-              <a:t>CBOW</a:t>
-            </a:r>
-            <a:r>
-              <a:rPr lang="ko-KR" altLang="en-US" dirty="0"/>
-              <a:t>에 비해 일반적으로 사용</a:t>
-            </a:r>
-            <a:endParaRPr lang="en-US" altLang="ko-KR" dirty="0"/>
-          </a:p>
-          <a:p>
-            <a:pPr marL="742950" lvl="1" indent="-285750">
-              <a:buFont typeface="Arial" panose="020B0604020202020204" pitchFamily="34" charset="0"/>
-              <a:buChar char="•"/>
-            </a:pPr>
-            <a:r>
-              <a:rPr lang="ko-KR" altLang="en-US" dirty="0"/>
-              <a:t>더 좋은 </a:t>
-            </a:r>
-            <a:r>
-              <a:rPr lang="ko-KR" altLang="en-US" dirty="0" err="1"/>
-              <a:t>임베딩</a:t>
-            </a:r>
-            <a:r>
-              <a:rPr lang="ko-KR" altLang="en-US" dirty="0"/>
-              <a:t> 품질을 보임</a:t>
-            </a:r>
-            <a:endParaRPr lang="en-US" altLang="ko-KR" dirty="0"/>
-          </a:p>
-          <a:p>
-            <a:pPr marL="742950" lvl="1" indent="-285750">
-              <a:buFont typeface="Arial" panose="020B0604020202020204" pitchFamily="34" charset="0"/>
-              <a:buChar char="•"/>
-            </a:pPr>
-            <a:endParaRPr lang="en-US" altLang="ko-KR" dirty="0"/>
-          </a:p>
-          <a:p>
-            <a:pPr marL="742950" lvl="1" indent="-285750">
-              <a:buFont typeface="Arial" panose="020B0604020202020204" pitchFamily="34" charset="0"/>
-              <a:buChar char="•"/>
-            </a:pPr>
+              <a:t>PV-DM</a:t>
+            </a:r>
+            <a:r>
+              <a:rPr lang="ko-KR" altLang="en-US" dirty="0"/>
+              <a:t>과 결합해서 사용하면 성능이 좋게 나오는 경우가 발생</a:t>
+            </a:r>
             <a:endParaRPr lang="en-US" altLang="ko-KR" dirty="0"/>
           </a:p>
         </p:txBody>
@@ -9685,7 +10888,7 @@
           <a:p>
             <a:r>
               <a:rPr lang="en-US" altLang="ko-KR" sz="2300" dirty="0"/>
-              <a:t>Word2Vec</a:t>
+              <a:t>Doc2Vec</a:t>
             </a:r>
             <a:endParaRPr lang="ko-KR" altLang="en-US" sz="2300" dirty="0"/>
           </a:p>
@@ -9694,7 +10897,7 @@
     </p:spTree>
     <p:extLst>
       <p:ext uri="{BB962C8B-B14F-4D97-AF65-F5344CB8AC3E}">
-        <p14:creationId xmlns:p14="http://schemas.microsoft.com/office/powerpoint/2010/main" val="1572472878"/>
+        <p14:creationId xmlns:p14="http://schemas.microsoft.com/office/powerpoint/2010/main" val="4105575565"/>
       </p:ext>
     </p:extLst>
   </p:cSld>
@@ -9704,7 +10907,7 @@
 </p:sld>
 </file>
 
-<file path=ppt/slides/slide19.xml><?xml version="1.0" encoding="utf-8"?>
+<file path=ppt/slides/slide23.xml><?xml version="1.0" encoding="utf-8"?>
 <p:sld xmlns:a="http://schemas.openxmlformats.org/drawingml/2006/main" xmlns:r="http://schemas.openxmlformats.org/officeDocument/2006/relationships" xmlns:p="http://schemas.openxmlformats.org/presentationml/2006/main">
   <p:cSld>
     <p:spTree>
@@ -9859,7 +11062,7 @@
         <p:spPr>
           <a:xfrm>
             <a:off x="971600" y="1700955"/>
-            <a:ext cx="7200800" cy="646331"/>
+            <a:ext cx="7200800" cy="2031325"/>
           </a:xfrm>
           <a:prstGeom prst="rect">
             <a:avLst/>
@@ -9877,12 +11080,8 @@
               <a:buChar char="•"/>
             </a:pPr>
             <a:r>
-              <a:rPr lang="ko-KR" altLang="en-US" dirty="0" err="1"/>
-              <a:t>단어간의</a:t>
-            </a:r>
-            <a:r>
-              <a:rPr lang="ko-KR" altLang="en-US" dirty="0"/>
-              <a:t> 유사도 계산이 가능</a:t>
+              <a:rPr lang="ko-KR" altLang="en-US" dirty="0"/>
+              <a:t>과거의 정보를 기억하고 현재 출력을 반영하는 순환 구조의 신경망</a:t>
             </a:r>
             <a:endParaRPr lang="en-US" altLang="ko-KR" dirty="0"/>
           </a:p>
@@ -9892,20 +11091,49 @@
               <a:buChar char="•"/>
             </a:pPr>
             <a:r>
-              <a:rPr lang="ko-KR" altLang="en-US" dirty="0" err="1"/>
-              <a:t>머신러닝과</a:t>
-            </a:r>
-            <a:r>
-              <a:rPr lang="ko-KR" altLang="en-US" dirty="0"/>
-              <a:t> </a:t>
-            </a:r>
-            <a:r>
-              <a:rPr lang="ko-KR" altLang="en-US" dirty="0" err="1"/>
-              <a:t>딥러닝에서</a:t>
-            </a:r>
-            <a:r>
-              <a:rPr lang="ko-KR" altLang="en-US" dirty="0"/>
-              <a:t> 입력 데이터로 사용이 가능</a:t>
+              <a:rPr lang="ko-KR" altLang="en-US" dirty="0"/>
+              <a:t>문장을 읽을 때</a:t>
+            </a:r>
+            <a:r>
+              <a:rPr lang="en-US" altLang="ko-KR" dirty="0"/>
+              <a:t>, </a:t>
+            </a:r>
+            <a:r>
+              <a:rPr lang="ko-KR" altLang="en-US" dirty="0"/>
+              <a:t>이전 단어를 기억하면서 다음 단어를 예측하는 것과 유사 </a:t>
+            </a:r>
+            <a:endParaRPr lang="en-US" altLang="ko-KR" dirty="0"/>
+          </a:p>
+          <a:p>
+            <a:pPr marL="285750" indent="-285750">
+              <a:buFont typeface="Arial" panose="020B0604020202020204" pitchFamily="34" charset="0"/>
+              <a:buChar char="•"/>
+            </a:pPr>
+            <a:r>
+              <a:rPr lang="ko-KR" altLang="en-US" dirty="0"/>
+              <a:t>긴 시퀀스를 학습하는 경우 기울기 소실 문제가 발생 </a:t>
+            </a:r>
+            <a:endParaRPr lang="en-US" altLang="ko-KR" dirty="0"/>
+          </a:p>
+          <a:p>
+            <a:pPr marL="742950" lvl="1" indent="-285750">
+              <a:buFont typeface="Arial" panose="020B0604020202020204" pitchFamily="34" charset="0"/>
+              <a:buChar char="•"/>
+            </a:pPr>
+            <a:r>
+              <a:rPr lang="ko-KR" altLang="en-US" dirty="0"/>
+              <a:t>과거의 정보가 뒤로 갈수록 영향이 급격히 사라짐</a:t>
+            </a:r>
+            <a:endParaRPr lang="en-US" altLang="ko-KR" dirty="0"/>
+          </a:p>
+          <a:p>
+            <a:pPr marL="742950" lvl="1" indent="-285750">
+              <a:buFont typeface="Arial" panose="020B0604020202020204" pitchFamily="34" charset="0"/>
+              <a:buChar char="•"/>
+            </a:pPr>
+            <a:r>
+              <a:rPr lang="ko-KR" altLang="en-US" dirty="0"/>
+              <a:t>긴 문맥의 데이터를 학습에는 부적절</a:t>
             </a:r>
             <a:endParaRPr lang="en-US" altLang="ko-KR" dirty="0"/>
           </a:p>
@@ -9920,7 +11148,7 @@
         <p:spPr>
           <a:xfrm>
             <a:off x="539552" y="1065096"/>
-            <a:ext cx="7992888" cy="446276"/>
+            <a:ext cx="7992888" cy="461665"/>
           </a:xfrm>
           <a:prstGeom prst="rect">
             <a:avLst/>
@@ -9934,8 +11162,8 @@
           <a:lstStyle/>
           <a:p>
             <a:r>
-              <a:rPr lang="en-US" altLang="ko-KR" sz="2300" dirty="0"/>
-              <a:t>Word2Vec</a:t>
+              <a:rPr lang="en-US" altLang="ko-KR" sz="2400" dirty="0"/>
+              <a:t>RNN(Recurrent Neural Network)</a:t>
             </a:r>
             <a:endParaRPr lang="ko-KR" altLang="en-US" sz="2300" dirty="0"/>
           </a:p>
@@ -9944,7 +11172,7 @@
     </p:spTree>
     <p:extLst>
       <p:ext uri="{BB962C8B-B14F-4D97-AF65-F5344CB8AC3E}">
-        <p14:creationId xmlns:p14="http://schemas.microsoft.com/office/powerpoint/2010/main" val="1501590709"/>
+        <p14:creationId xmlns:p14="http://schemas.microsoft.com/office/powerpoint/2010/main" val="2224950096"/>
       </p:ext>
     </p:extLst>
   </p:cSld>
@@ -9954,7 +11182,366 @@
 </p:sld>
 </file>
 
-<file path=ppt/slides/slide2.xml><?xml version="1.0" encoding="utf-8"?>
+<file path=ppt/slides/slide24.xml><?xml version="1.0" encoding="utf-8"?>
+<p:sld xmlns:a="http://schemas.openxmlformats.org/drawingml/2006/main" xmlns:r="http://schemas.openxmlformats.org/officeDocument/2006/relationships" xmlns:p="http://schemas.openxmlformats.org/presentationml/2006/main">
+  <p:cSld>
+    <p:spTree>
+      <p:nvGrpSpPr>
+        <p:cNvPr id="1" name=""/>
+        <p:cNvGrpSpPr/>
+        <p:nvPr/>
+      </p:nvGrpSpPr>
+      <p:grpSpPr>
+        <a:xfrm>
+          <a:off x="0" y="0"/>
+          <a:ext cx="0" cy="0"/>
+          <a:chOff x="0" y="0"/>
+          <a:chExt cx="0" cy="0"/>
+        </a:xfrm>
+      </p:grpSpPr>
+      <p:sp>
+        <p:nvSpPr>
+          <p:cNvPr id="3" name="타원 2"/>
+          <p:cNvSpPr/>
+          <p:nvPr/>
+        </p:nvSpPr>
+        <p:spPr>
+          <a:xfrm>
+            <a:off x="4067944" y="74100"/>
+            <a:ext cx="936104" cy="936104"/>
+          </a:xfrm>
+          <a:prstGeom prst="ellipse">
+            <a:avLst/>
+          </a:prstGeom>
+          <a:solidFill>
+            <a:schemeClr val="tx2">
+              <a:lumMod val="75000"/>
+            </a:schemeClr>
+          </a:solidFill>
+          <a:ln>
+            <a:noFill/>
+          </a:ln>
+        </p:spPr>
+        <p:style>
+          <a:lnRef idx="2">
+            <a:schemeClr val="accent1">
+              <a:shade val="50000"/>
+            </a:schemeClr>
+          </a:lnRef>
+          <a:fillRef idx="1">
+            <a:schemeClr val="accent1"/>
+          </a:fillRef>
+          <a:effectRef idx="0">
+            <a:schemeClr val="accent1"/>
+          </a:effectRef>
+          <a:fontRef idx="minor">
+            <a:schemeClr val="lt1"/>
+          </a:fontRef>
+        </p:style>
+        <p:txBody>
+          <a:bodyPr rtlCol="0" anchor="ctr"/>
+          <a:lstStyle/>
+          <a:p>
+            <a:pPr algn="ctr"/>
+            <a:endParaRPr lang="ko-KR" altLang="en-US"/>
+          </a:p>
+        </p:txBody>
+      </p:sp>
+      <p:sp>
+        <p:nvSpPr>
+          <p:cNvPr id="8" name="직사각형 7"/>
+          <p:cNvSpPr/>
+          <p:nvPr/>
+        </p:nvSpPr>
+        <p:spPr>
+          <a:xfrm>
+            <a:off x="708380" y="271681"/>
+            <a:ext cx="857927" cy="276999"/>
+          </a:xfrm>
+          <a:prstGeom prst="rect">
+            <a:avLst/>
+          </a:prstGeom>
+        </p:spPr>
+        <p:txBody>
+          <a:bodyPr wrap="none">
+            <a:spAutoFit/>
+          </a:bodyPr>
+          <a:lstStyle/>
+          <a:p>
+            <a:pPr algn="ctr"/>
+            <a:r>
+              <a:rPr lang="ko-KR" altLang="en-US" sz="1200" b="1" spc="-150" dirty="0">
+                <a:solidFill>
+                  <a:schemeClr val="bg1"/>
+                </a:solidFill>
+              </a:rPr>
+              <a:t>자연어처리</a:t>
+            </a:r>
+            <a:endParaRPr lang="en-US" altLang="ko-KR" sz="1200" b="1" spc="-150" dirty="0">
+              <a:solidFill>
+                <a:schemeClr val="bg1"/>
+              </a:solidFill>
+            </a:endParaRPr>
+          </a:p>
+        </p:txBody>
+      </p:sp>
+      <p:sp>
+        <p:nvSpPr>
+          <p:cNvPr id="9" name="TextBox 8"/>
+          <p:cNvSpPr txBox="1"/>
+          <p:nvPr/>
+        </p:nvSpPr>
+        <p:spPr>
+          <a:xfrm>
+            <a:off x="3995936" y="479095"/>
+            <a:ext cx="1080120" cy="461665"/>
+          </a:xfrm>
+          <a:prstGeom prst="rect">
+            <a:avLst/>
+          </a:prstGeom>
+          <a:noFill/>
+        </p:spPr>
+        <p:txBody>
+          <a:bodyPr wrap="square" rtlCol="0">
+            <a:spAutoFit/>
+          </a:bodyPr>
+          <a:lstStyle/>
+          <a:p>
+            <a:pPr algn="ctr"/>
+            <a:r>
+              <a:rPr lang="en-US" altLang="ko-KR" sz="2400" dirty="0">
+                <a:solidFill>
+                  <a:schemeClr val="bg1"/>
+                </a:solidFill>
+                <a:latin typeface="HY헤드라인M" pitchFamily="18" charset="-127"/>
+                <a:ea typeface="HY헤드라인M" pitchFamily="18" charset="-127"/>
+              </a:rPr>
+              <a:t>01</a:t>
+            </a:r>
+            <a:endParaRPr lang="ko-KR" altLang="en-US" sz="2400" dirty="0">
+              <a:solidFill>
+                <a:schemeClr val="bg1"/>
+              </a:solidFill>
+              <a:latin typeface="HY헤드라인M" pitchFamily="18" charset="-127"/>
+              <a:ea typeface="HY헤드라인M" pitchFamily="18" charset="-127"/>
+            </a:endParaRPr>
+          </a:p>
+        </p:txBody>
+      </p:sp>
+      <p:sp>
+        <p:nvSpPr>
+          <p:cNvPr id="4" name="TextBox 3"/>
+          <p:cNvSpPr txBox="1"/>
+          <p:nvPr/>
+        </p:nvSpPr>
+        <p:spPr>
+          <a:xfrm>
+            <a:off x="971600" y="1700955"/>
+            <a:ext cx="7200800" cy="3416320"/>
+          </a:xfrm>
+          <a:prstGeom prst="rect">
+            <a:avLst/>
+          </a:prstGeom>
+          <a:noFill/>
+        </p:spPr>
+        <p:txBody>
+          <a:bodyPr wrap="square" rtlCol="0">
+            <a:spAutoFit/>
+          </a:bodyPr>
+          <a:lstStyle/>
+          <a:p>
+            <a:pPr marL="285750" indent="-285750">
+              <a:buFont typeface="Arial" panose="020B0604020202020204" pitchFamily="34" charset="0"/>
+              <a:buChar char="•"/>
+            </a:pPr>
+            <a:r>
+              <a:rPr lang="en-US" altLang="ko-KR" dirty="0"/>
+              <a:t>LSTM</a:t>
+            </a:r>
+            <a:r>
+              <a:rPr lang="ko-KR" altLang="en-US" dirty="0"/>
+              <a:t>은 </a:t>
+            </a:r>
+            <a:r>
+              <a:rPr lang="en-US" altLang="ko-KR" dirty="0"/>
+              <a:t>RNN</a:t>
+            </a:r>
+            <a:r>
+              <a:rPr lang="ko-KR" altLang="en-US" dirty="0"/>
+              <a:t>의 한 종류로 오랜 시간 정보를 보존하고 필요할 때만 잊거나 업데이트를 할 수 있도록 고안한 구조</a:t>
+            </a:r>
+            <a:endParaRPr lang="en-US" altLang="ko-KR" dirty="0"/>
+          </a:p>
+          <a:p>
+            <a:pPr marL="285750" indent="-285750">
+              <a:buFont typeface="Arial" panose="020B0604020202020204" pitchFamily="34" charset="0"/>
+              <a:buChar char="•"/>
+            </a:pPr>
+            <a:r>
+              <a:rPr lang="ko-KR" altLang="en-US" dirty="0"/>
+              <a:t>기억 셀</a:t>
+            </a:r>
+            <a:r>
+              <a:rPr lang="en-US" altLang="ko-KR" dirty="0"/>
+              <a:t>(cell state)</a:t>
+            </a:r>
+            <a:r>
+              <a:rPr lang="ko-KR" altLang="en-US" dirty="0"/>
+              <a:t>과 게이트</a:t>
+            </a:r>
+            <a:r>
+              <a:rPr lang="en-US" altLang="ko-KR" dirty="0"/>
+              <a:t>(gate) </a:t>
+            </a:r>
+            <a:r>
+              <a:rPr lang="ko-KR" altLang="en-US" dirty="0"/>
+              <a:t>구조를 도입하여 정보를 선택적으로 유지하거나 삭제 가능 </a:t>
+            </a:r>
+            <a:endParaRPr lang="en-US" altLang="ko-KR" dirty="0"/>
+          </a:p>
+          <a:p>
+            <a:pPr marL="285750" indent="-285750">
+              <a:buFont typeface="Arial" panose="020B0604020202020204" pitchFamily="34" charset="0"/>
+              <a:buChar char="•"/>
+            </a:pPr>
+            <a:r>
+              <a:rPr lang="ko-KR" altLang="en-US" dirty="0"/>
+              <a:t>주요 게이트 </a:t>
+            </a:r>
+            <a:endParaRPr lang="en-US" altLang="ko-KR" dirty="0"/>
+          </a:p>
+          <a:p>
+            <a:pPr marL="742950" lvl="1" indent="-285750">
+              <a:buFont typeface="Arial" panose="020B0604020202020204" pitchFamily="34" charset="0"/>
+              <a:buChar char="•"/>
+            </a:pPr>
+            <a:r>
+              <a:rPr lang="en-US" altLang="ko-KR" dirty="0"/>
+              <a:t>Forget Gate</a:t>
+            </a:r>
+          </a:p>
+          <a:p>
+            <a:pPr marL="1200150" lvl="2" indent="-285750">
+              <a:buFont typeface="Arial" panose="020B0604020202020204" pitchFamily="34" charset="0"/>
+              <a:buChar char="•"/>
+            </a:pPr>
+            <a:r>
+              <a:rPr lang="ko-KR" altLang="en-US" dirty="0"/>
+              <a:t>과거의 정보를 얼마나 잊을지 결정</a:t>
+            </a:r>
+            <a:endParaRPr lang="en-US" altLang="ko-KR" dirty="0"/>
+          </a:p>
+          <a:p>
+            <a:pPr marL="742950" lvl="1" indent="-285750">
+              <a:buFont typeface="Arial" panose="020B0604020202020204" pitchFamily="34" charset="0"/>
+              <a:buChar char="•"/>
+            </a:pPr>
+            <a:r>
+              <a:rPr lang="en-US" altLang="ko-KR" dirty="0"/>
+              <a:t>Input Gate</a:t>
+            </a:r>
+          </a:p>
+          <a:p>
+            <a:pPr marL="1200150" lvl="2" indent="-285750">
+              <a:buFont typeface="Arial" panose="020B0604020202020204" pitchFamily="34" charset="0"/>
+              <a:buChar char="•"/>
+            </a:pPr>
+            <a:r>
+              <a:rPr lang="en-US" altLang="ko-KR" dirty="0"/>
+              <a:t> </a:t>
+            </a:r>
+            <a:r>
+              <a:rPr lang="ko-KR" altLang="en-US" dirty="0"/>
+              <a:t>새로운</a:t>
+            </a:r>
+            <a:r>
+              <a:rPr lang="en-US" altLang="ko-KR" dirty="0"/>
+              <a:t> </a:t>
+            </a:r>
+            <a:r>
+              <a:rPr lang="ko-KR" altLang="en-US" dirty="0"/>
+              <a:t>정보를 얼마나 저장할지 결정</a:t>
+            </a:r>
+            <a:endParaRPr lang="en-US" altLang="ko-KR" dirty="0"/>
+          </a:p>
+          <a:p>
+            <a:pPr marL="742950" lvl="1" indent="-285750">
+              <a:buFont typeface="Arial" panose="020B0604020202020204" pitchFamily="34" charset="0"/>
+              <a:buChar char="•"/>
+            </a:pPr>
+            <a:r>
+              <a:rPr lang="en-US" altLang="ko-KR" dirty="0"/>
+              <a:t>Output Gate</a:t>
+            </a:r>
+          </a:p>
+          <a:p>
+            <a:pPr marL="1200150" lvl="2" indent="-285750">
+              <a:buFont typeface="Arial" panose="020B0604020202020204" pitchFamily="34" charset="0"/>
+              <a:buChar char="•"/>
+            </a:pPr>
+            <a:r>
+              <a:rPr lang="ko-KR" altLang="en-US" dirty="0"/>
+              <a:t>다음 단계로 어떤 정보를 출력할지 결정</a:t>
+            </a:r>
+            <a:endParaRPr lang="en-US" altLang="ko-KR" dirty="0"/>
+          </a:p>
+          <a:p>
+            <a:pPr marL="285750" indent="-285750">
+              <a:buFont typeface="Arial" panose="020B0604020202020204" pitchFamily="34" charset="0"/>
+              <a:buChar char="•"/>
+            </a:pPr>
+            <a:r>
+              <a:rPr lang="ko-KR" altLang="en-US" dirty="0"/>
+              <a:t>기울기 소실 문제를 완화하여 긴 시퀀스 학습이 가능</a:t>
+            </a:r>
+            <a:endParaRPr lang="en-US" altLang="ko-KR" dirty="0"/>
+          </a:p>
+        </p:txBody>
+      </p:sp>
+      <p:sp>
+        <p:nvSpPr>
+          <p:cNvPr id="6" name="TextBox 5"/>
+          <p:cNvSpPr txBox="1"/>
+          <p:nvPr/>
+        </p:nvSpPr>
+        <p:spPr>
+          <a:xfrm>
+            <a:off x="539552" y="1065096"/>
+            <a:ext cx="7992888" cy="461665"/>
+          </a:xfrm>
+          <a:prstGeom prst="rect">
+            <a:avLst/>
+          </a:prstGeom>
+          <a:noFill/>
+        </p:spPr>
+        <p:txBody>
+          <a:bodyPr wrap="square" rtlCol="0">
+            <a:spAutoFit/>
+          </a:bodyPr>
+          <a:lstStyle/>
+          <a:p>
+            <a:r>
+              <a:rPr lang="en-US" altLang="ko-KR" sz="2400" dirty="0"/>
+              <a:t>LSTM (Long Short-Term Memory)</a:t>
+            </a:r>
+            <a:endParaRPr lang="ko-KR" altLang="en-US" sz="2300" dirty="0"/>
+          </a:p>
+        </p:txBody>
+      </p:sp>
+    </p:spTree>
+    <p:extLst>
+      <p:ext uri="{BB962C8B-B14F-4D97-AF65-F5344CB8AC3E}">
+        <p14:creationId xmlns:p14="http://schemas.microsoft.com/office/powerpoint/2010/main" val="4037620072"/>
+      </p:ext>
+    </p:extLst>
+  </p:cSld>
+  <p:clrMapOvr>
+    <a:masterClrMapping/>
+  </p:clrMapOvr>
+</p:sld>
+</file>
+
+<file path=ppt/slides/slide25.xml><?xml version="1.0" encoding="utf-8"?>
 <p:sld xmlns:a="http://schemas.openxmlformats.org/drawingml/2006/main" xmlns:r="http://schemas.openxmlformats.org/officeDocument/2006/relationships" xmlns:p="http://schemas.openxmlformats.org/presentationml/2006/main">
   <p:cSld>
     <p:spTree>
@@ -10028,7 +11615,7 @@
         <p:spPr>
           <a:xfrm>
             <a:off x="2627784" y="2971550"/>
-            <a:ext cx="3858956" cy="630942"/>
+            <a:ext cx="3858956" cy="1169551"/>
           </a:xfrm>
           <a:prstGeom prst="rect">
             <a:avLst/>
@@ -10043,12 +11630,66 @@
           <a:p>
             <a:pPr algn="ctr"/>
             <a:r>
+              <a:rPr lang="en-US" altLang="ko-KR" sz="3500" b="1" dirty="0">
+                <a:solidFill>
+                  <a:schemeClr val="bg1"/>
+                </a:solidFill>
+              </a:rPr>
+              <a:t>Transformer </a:t>
+            </a:r>
+            <a:r>
               <a:rPr lang="ko-KR" altLang="en-US" sz="3500" b="1" dirty="0">
                 <a:solidFill>
                   <a:schemeClr val="bg1"/>
                 </a:solidFill>
               </a:rPr>
-              <a:t>토큰화</a:t>
+              <a:t>기반 </a:t>
+            </a:r>
+            <a:r>
+              <a:rPr lang="ko-KR" altLang="en-US" sz="3500" b="1" dirty="0" err="1">
+                <a:solidFill>
+                  <a:schemeClr val="bg1"/>
+                </a:solidFill>
+              </a:rPr>
+              <a:t>임베딩</a:t>
+            </a:r>
+            <a:endParaRPr lang="ko-KR" altLang="en-US" sz="3500" b="1" dirty="0">
+              <a:solidFill>
+                <a:schemeClr val="bg1"/>
+              </a:solidFill>
+            </a:endParaRPr>
+          </a:p>
+        </p:txBody>
+      </p:sp>
+      <p:sp>
+        <p:nvSpPr>
+          <p:cNvPr id="5" name="직사각형 4"/>
+          <p:cNvSpPr/>
+          <p:nvPr/>
+        </p:nvSpPr>
+        <p:spPr>
+          <a:xfrm>
+            <a:off x="708377" y="271681"/>
+            <a:ext cx="857927" cy="276999"/>
+          </a:xfrm>
+          <a:prstGeom prst="rect">
+            <a:avLst/>
+          </a:prstGeom>
+        </p:spPr>
+        <p:txBody>
+          <a:bodyPr wrap="none">
+            <a:spAutoFit/>
+          </a:bodyPr>
+          <a:lstStyle/>
+          <a:p>
+            <a:pPr algn="ctr"/>
+            <a:r>
+              <a:rPr lang="ko-KR" altLang="en-US" sz="1200" b="1" spc="-150" dirty="0">
+                <a:solidFill>
+                  <a:schemeClr val="bg1"/>
+                </a:solidFill>
+              </a:rPr>
+              <a:t>자연어처리</a:t>
             </a:r>
           </a:p>
         </p:txBody>
@@ -10056,7 +11697,7 @@
     </p:spTree>
     <p:extLst>
       <p:ext uri="{BB962C8B-B14F-4D97-AF65-F5344CB8AC3E}">
-        <p14:creationId xmlns:p14="http://schemas.microsoft.com/office/powerpoint/2010/main" val="1192776622"/>
+        <p14:creationId xmlns:p14="http://schemas.microsoft.com/office/powerpoint/2010/main" val="621214150"/>
       </p:ext>
     </p:extLst>
   </p:cSld>
@@ -10066,7 +11707,7 @@
 </p:sld>
 </file>
 
-<file path=ppt/slides/slide20.xml><?xml version="1.0" encoding="utf-8"?>
+<file path=ppt/slides/slide26.xml><?xml version="1.0" encoding="utf-8"?>
 <p:sld xmlns:a="http://schemas.openxmlformats.org/drawingml/2006/main" xmlns:r="http://schemas.openxmlformats.org/officeDocument/2006/relationships" xmlns:p="http://schemas.openxmlformats.org/presentationml/2006/main">
   <p:cSld>
     <p:spTree>
@@ -10221,2008 +11862,6 @@
         <p:spPr>
           <a:xfrm>
             <a:off x="971600" y="1700955"/>
-            <a:ext cx="7200800" cy="2308324"/>
-          </a:xfrm>
-          <a:prstGeom prst="rect">
-            <a:avLst/>
-          </a:prstGeom>
-          <a:noFill/>
-        </p:spPr>
-        <p:txBody>
-          <a:bodyPr wrap="square" rtlCol="0">
-            <a:spAutoFit/>
-          </a:bodyPr>
-          <a:lstStyle/>
-          <a:p>
-            <a:pPr marL="285750" indent="-285750">
-              <a:buFont typeface="Arial" panose="020B0604020202020204" pitchFamily="34" charset="0"/>
-              <a:buChar char="•"/>
-            </a:pPr>
-            <a:r>
-              <a:rPr lang="en-US" altLang="ko-KR" dirty="0"/>
-              <a:t>Word2Vec</a:t>
-            </a:r>
-            <a:r>
-              <a:rPr lang="ko-KR" altLang="en-US" dirty="0"/>
-              <a:t>과 통계 기반의 강점을 결합한 방식</a:t>
-            </a:r>
-            <a:endParaRPr lang="en-US" altLang="ko-KR" dirty="0"/>
-          </a:p>
-          <a:p>
-            <a:pPr marL="285750" indent="-285750">
-              <a:buFont typeface="Arial" panose="020B0604020202020204" pitchFamily="34" charset="0"/>
-              <a:buChar char="•"/>
-            </a:pPr>
-            <a:r>
-              <a:rPr lang="ko-KR" altLang="en-US" dirty="0"/>
-              <a:t>단어 간의 전역적인 통계정보를 이용해서 단어 </a:t>
-            </a:r>
-            <a:r>
-              <a:rPr lang="ko-KR" altLang="en-US" dirty="0" err="1"/>
-              <a:t>백터를</a:t>
-            </a:r>
-            <a:r>
-              <a:rPr lang="ko-KR" altLang="en-US" dirty="0"/>
-              <a:t> 학습하는 </a:t>
-            </a:r>
-            <a:r>
-              <a:rPr lang="ko-KR" altLang="en-US" dirty="0" err="1"/>
-              <a:t>임베딩</a:t>
-            </a:r>
-            <a:r>
-              <a:rPr lang="ko-KR" altLang="en-US" dirty="0"/>
-              <a:t> 방식</a:t>
-            </a:r>
-            <a:endParaRPr lang="en-US" altLang="ko-KR" dirty="0"/>
-          </a:p>
-          <a:p>
-            <a:pPr marL="285750" indent="-285750">
-              <a:buFont typeface="Arial" panose="020B0604020202020204" pitchFamily="34" charset="0"/>
-              <a:buChar char="•"/>
-            </a:pPr>
-            <a:r>
-              <a:rPr lang="ko-KR" altLang="en-US" dirty="0"/>
-              <a:t>사전에 학습이 된 모델을 이용하여 </a:t>
-            </a:r>
-            <a:r>
-              <a:rPr lang="ko-KR" altLang="en-US" dirty="0" err="1"/>
-              <a:t>임베딩</a:t>
-            </a:r>
-            <a:r>
-              <a:rPr lang="ko-KR" altLang="en-US" dirty="0"/>
-              <a:t> 변환을 사용</a:t>
-            </a:r>
-            <a:endParaRPr lang="en-US" altLang="ko-KR" dirty="0"/>
-          </a:p>
-          <a:p>
-            <a:pPr marL="285750" indent="-285750">
-              <a:buFont typeface="Arial" panose="020B0604020202020204" pitchFamily="34" charset="0"/>
-              <a:buChar char="•"/>
-            </a:pPr>
-            <a:r>
-              <a:rPr lang="ko-KR" altLang="en-US" dirty="0"/>
-              <a:t>영문 모델은</a:t>
-            </a:r>
-            <a:br>
-              <a:rPr lang="en-US" altLang="ko-KR" dirty="0"/>
-            </a:br>
-            <a:r>
-              <a:rPr lang="en-US" altLang="ko-KR" dirty="0"/>
-              <a:t>	https://nlp.stanford.edu/projects/glove/</a:t>
-            </a:r>
-            <a:br>
-              <a:rPr lang="en-US" altLang="ko-KR" dirty="0"/>
-            </a:br>
-            <a:r>
-              <a:rPr lang="ko-KR" altLang="en-US" dirty="0"/>
-              <a:t>사이트에서 다운로드 가능</a:t>
-            </a:r>
-            <a:endParaRPr lang="en-US" altLang="ko-KR" dirty="0"/>
-          </a:p>
-          <a:p>
-            <a:pPr marL="285750" indent="-285750">
-              <a:buFont typeface="Arial" panose="020B0604020202020204" pitchFamily="34" charset="0"/>
-              <a:buChar char="•"/>
-            </a:pPr>
-            <a:endParaRPr lang="en-US" altLang="ko-KR" dirty="0"/>
-          </a:p>
-        </p:txBody>
-      </p:sp>
-      <p:sp>
-        <p:nvSpPr>
-          <p:cNvPr id="6" name="TextBox 5"/>
-          <p:cNvSpPr txBox="1"/>
-          <p:nvPr/>
-        </p:nvSpPr>
-        <p:spPr>
-          <a:xfrm>
-            <a:off x="539552" y="1065096"/>
-            <a:ext cx="7992888" cy="446276"/>
-          </a:xfrm>
-          <a:prstGeom prst="rect">
-            <a:avLst/>
-          </a:prstGeom>
-          <a:noFill/>
-        </p:spPr>
-        <p:txBody>
-          <a:bodyPr wrap="square" rtlCol="0">
-            <a:spAutoFit/>
-          </a:bodyPr>
-          <a:lstStyle/>
-          <a:p>
-            <a:r>
-              <a:rPr lang="en-US" altLang="ko-KR" sz="2300" dirty="0" err="1"/>
-              <a:t>GloVe</a:t>
-            </a:r>
-            <a:endParaRPr lang="ko-KR" altLang="en-US" sz="2300" dirty="0"/>
-          </a:p>
-        </p:txBody>
-      </p:sp>
-    </p:spTree>
-    <p:extLst>
-      <p:ext uri="{BB962C8B-B14F-4D97-AF65-F5344CB8AC3E}">
-        <p14:creationId xmlns:p14="http://schemas.microsoft.com/office/powerpoint/2010/main" val="3378569894"/>
-      </p:ext>
-    </p:extLst>
-  </p:cSld>
-  <p:clrMapOvr>
-    <a:masterClrMapping/>
-  </p:clrMapOvr>
-</p:sld>
-</file>
-
-<file path=ppt/slides/slide21.xml><?xml version="1.0" encoding="utf-8"?>
-<p:sld xmlns:a="http://schemas.openxmlformats.org/drawingml/2006/main" xmlns:r="http://schemas.openxmlformats.org/officeDocument/2006/relationships" xmlns:p="http://schemas.openxmlformats.org/presentationml/2006/main">
-  <p:cSld>
-    <p:spTree>
-      <p:nvGrpSpPr>
-        <p:cNvPr id="1" name=""/>
-        <p:cNvGrpSpPr/>
-        <p:nvPr/>
-      </p:nvGrpSpPr>
-      <p:grpSpPr>
-        <a:xfrm>
-          <a:off x="0" y="0"/>
-          <a:ext cx="0" cy="0"/>
-          <a:chOff x="0" y="0"/>
-          <a:chExt cx="0" cy="0"/>
-        </a:xfrm>
-      </p:grpSpPr>
-      <p:sp>
-        <p:nvSpPr>
-          <p:cNvPr id="3" name="타원 2"/>
-          <p:cNvSpPr/>
-          <p:nvPr/>
-        </p:nvSpPr>
-        <p:spPr>
-          <a:xfrm>
-            <a:off x="4067944" y="74100"/>
-            <a:ext cx="936104" cy="936104"/>
-          </a:xfrm>
-          <a:prstGeom prst="ellipse">
-            <a:avLst/>
-          </a:prstGeom>
-          <a:solidFill>
-            <a:schemeClr val="tx2">
-              <a:lumMod val="75000"/>
-            </a:schemeClr>
-          </a:solidFill>
-          <a:ln>
-            <a:noFill/>
-          </a:ln>
-        </p:spPr>
-        <p:style>
-          <a:lnRef idx="2">
-            <a:schemeClr val="accent1">
-              <a:shade val="50000"/>
-            </a:schemeClr>
-          </a:lnRef>
-          <a:fillRef idx="1">
-            <a:schemeClr val="accent1"/>
-          </a:fillRef>
-          <a:effectRef idx="0">
-            <a:schemeClr val="accent1"/>
-          </a:effectRef>
-          <a:fontRef idx="minor">
-            <a:schemeClr val="lt1"/>
-          </a:fontRef>
-        </p:style>
-        <p:txBody>
-          <a:bodyPr rtlCol="0" anchor="ctr"/>
-          <a:lstStyle/>
-          <a:p>
-            <a:pPr algn="ctr"/>
-            <a:endParaRPr lang="ko-KR" altLang="en-US"/>
-          </a:p>
-        </p:txBody>
-      </p:sp>
-      <p:sp>
-        <p:nvSpPr>
-          <p:cNvPr id="8" name="직사각형 7"/>
-          <p:cNvSpPr/>
-          <p:nvPr/>
-        </p:nvSpPr>
-        <p:spPr>
-          <a:xfrm>
-            <a:off x="708380" y="271681"/>
-            <a:ext cx="857927" cy="276999"/>
-          </a:xfrm>
-          <a:prstGeom prst="rect">
-            <a:avLst/>
-          </a:prstGeom>
-        </p:spPr>
-        <p:txBody>
-          <a:bodyPr wrap="none">
-            <a:spAutoFit/>
-          </a:bodyPr>
-          <a:lstStyle/>
-          <a:p>
-            <a:pPr algn="ctr"/>
-            <a:r>
-              <a:rPr lang="ko-KR" altLang="en-US" sz="1200" b="1" spc="-150" dirty="0">
-                <a:solidFill>
-                  <a:schemeClr val="bg1"/>
-                </a:solidFill>
-              </a:rPr>
-              <a:t>자연어처리</a:t>
-            </a:r>
-            <a:endParaRPr lang="en-US" altLang="ko-KR" sz="1200" b="1" spc="-150" dirty="0">
-              <a:solidFill>
-                <a:schemeClr val="bg1"/>
-              </a:solidFill>
-            </a:endParaRPr>
-          </a:p>
-        </p:txBody>
-      </p:sp>
-      <p:sp>
-        <p:nvSpPr>
-          <p:cNvPr id="9" name="TextBox 8"/>
-          <p:cNvSpPr txBox="1"/>
-          <p:nvPr/>
-        </p:nvSpPr>
-        <p:spPr>
-          <a:xfrm>
-            <a:off x="3995936" y="479095"/>
-            <a:ext cx="1080120" cy="461665"/>
-          </a:xfrm>
-          <a:prstGeom prst="rect">
-            <a:avLst/>
-          </a:prstGeom>
-          <a:noFill/>
-        </p:spPr>
-        <p:txBody>
-          <a:bodyPr wrap="square" rtlCol="0">
-            <a:spAutoFit/>
-          </a:bodyPr>
-          <a:lstStyle/>
-          <a:p>
-            <a:pPr algn="ctr"/>
-            <a:r>
-              <a:rPr lang="en-US" altLang="ko-KR" sz="2400" dirty="0">
-                <a:solidFill>
-                  <a:schemeClr val="bg1"/>
-                </a:solidFill>
-                <a:latin typeface="HY헤드라인M" pitchFamily="18" charset="-127"/>
-                <a:ea typeface="HY헤드라인M" pitchFamily="18" charset="-127"/>
-              </a:rPr>
-              <a:t>01</a:t>
-            </a:r>
-            <a:endParaRPr lang="ko-KR" altLang="en-US" sz="2400" dirty="0">
-              <a:solidFill>
-                <a:schemeClr val="bg1"/>
-              </a:solidFill>
-              <a:latin typeface="HY헤드라인M" pitchFamily="18" charset="-127"/>
-              <a:ea typeface="HY헤드라인M" pitchFamily="18" charset="-127"/>
-            </a:endParaRPr>
-          </a:p>
-        </p:txBody>
-      </p:sp>
-      <p:sp>
-        <p:nvSpPr>
-          <p:cNvPr id="4" name="TextBox 3"/>
-          <p:cNvSpPr txBox="1"/>
-          <p:nvPr/>
-        </p:nvSpPr>
-        <p:spPr>
-          <a:xfrm>
-            <a:off x="971600" y="1700955"/>
-            <a:ext cx="7200800" cy="2031325"/>
-          </a:xfrm>
-          <a:prstGeom prst="rect">
-            <a:avLst/>
-          </a:prstGeom>
-          <a:noFill/>
-        </p:spPr>
-        <p:txBody>
-          <a:bodyPr wrap="square" rtlCol="0">
-            <a:spAutoFit/>
-          </a:bodyPr>
-          <a:lstStyle/>
-          <a:p>
-            <a:pPr marL="285750" indent="-285750">
-              <a:buFont typeface="Arial" panose="020B0604020202020204" pitchFamily="34" charset="0"/>
-              <a:buChar char="•"/>
-            </a:pPr>
-            <a:r>
-              <a:rPr lang="ko-KR" altLang="en-US" dirty="0"/>
-              <a:t>단어 하나를 하나의 토큰으로 보는 것이 아니라 글자 단위로 분해하여 벡터를 학습하는 방식</a:t>
-            </a:r>
-            <a:endParaRPr lang="en-US" altLang="ko-KR" dirty="0"/>
-          </a:p>
-          <a:p>
-            <a:pPr marL="285750" indent="-285750">
-              <a:buFont typeface="Arial" panose="020B0604020202020204" pitchFamily="34" charset="0"/>
-              <a:buChar char="•"/>
-            </a:pPr>
-            <a:r>
-              <a:rPr lang="ko-KR" altLang="en-US" dirty="0"/>
-              <a:t>글자를 </a:t>
-            </a:r>
-            <a:r>
-              <a:rPr lang="en-US" altLang="ko-KR" dirty="0"/>
-              <a:t>n-gram</a:t>
-            </a:r>
-            <a:r>
-              <a:rPr lang="ko-KR" altLang="en-US" dirty="0"/>
-              <a:t>의 형식으로 학습을 하기 때문에 </a:t>
-            </a:r>
-            <a:r>
-              <a:rPr lang="en-US" altLang="ko-KR" dirty="0"/>
-              <a:t>OOV(</a:t>
-            </a:r>
-            <a:r>
-              <a:rPr lang="ko-KR" altLang="en-US" dirty="0"/>
-              <a:t>사전에 없는 단어</a:t>
-            </a:r>
-            <a:r>
-              <a:rPr lang="en-US" altLang="ko-KR" dirty="0"/>
-              <a:t>)</a:t>
-            </a:r>
-            <a:r>
-              <a:rPr lang="ko-KR" altLang="en-US" dirty="0"/>
-              <a:t>문제를 해결</a:t>
-            </a:r>
-            <a:endParaRPr lang="en-US" altLang="ko-KR" dirty="0"/>
-          </a:p>
-          <a:p>
-            <a:pPr marL="285750" indent="-285750">
-              <a:buFont typeface="Arial" panose="020B0604020202020204" pitchFamily="34" charset="0"/>
-              <a:buChar char="•"/>
-            </a:pPr>
-            <a:r>
-              <a:rPr lang="ko-KR" altLang="en-US" dirty="0"/>
-              <a:t>단어의 형태 변화에 강한 모델</a:t>
-            </a:r>
-            <a:endParaRPr lang="en-US" altLang="ko-KR" dirty="0"/>
-          </a:p>
-          <a:p>
-            <a:pPr marL="285750" indent="-285750">
-              <a:buFont typeface="Arial" panose="020B0604020202020204" pitchFamily="34" charset="0"/>
-              <a:buChar char="•"/>
-            </a:pPr>
-            <a:r>
-              <a:rPr lang="ko-KR" altLang="en-US" dirty="0"/>
-              <a:t>단어 대신 글자 단위로 보기 때문에 학습에 시간이 오래 걸림</a:t>
-            </a:r>
-            <a:endParaRPr lang="en-US" altLang="ko-KR" dirty="0"/>
-          </a:p>
-          <a:p>
-            <a:pPr marL="285750" indent="-285750">
-              <a:buFont typeface="Arial" panose="020B0604020202020204" pitchFamily="34" charset="0"/>
-              <a:buChar char="•"/>
-            </a:pPr>
-            <a:r>
-              <a:rPr lang="en-US" altLang="ko-KR" dirty="0"/>
-              <a:t>N-gram </a:t>
-            </a:r>
-            <a:r>
-              <a:rPr lang="ko-KR" altLang="en-US" dirty="0"/>
-              <a:t>벡터들을 추가로 이용함으로 메모리에 사용량이 증가</a:t>
-            </a:r>
-            <a:endParaRPr lang="en-US" altLang="ko-KR" dirty="0"/>
-          </a:p>
-        </p:txBody>
-      </p:sp>
-      <p:sp>
-        <p:nvSpPr>
-          <p:cNvPr id="6" name="TextBox 5"/>
-          <p:cNvSpPr txBox="1"/>
-          <p:nvPr/>
-        </p:nvSpPr>
-        <p:spPr>
-          <a:xfrm>
-            <a:off x="539552" y="1065096"/>
-            <a:ext cx="7992888" cy="446276"/>
-          </a:xfrm>
-          <a:prstGeom prst="rect">
-            <a:avLst/>
-          </a:prstGeom>
-          <a:noFill/>
-        </p:spPr>
-        <p:txBody>
-          <a:bodyPr wrap="square" rtlCol="0">
-            <a:spAutoFit/>
-          </a:bodyPr>
-          <a:lstStyle/>
-          <a:p>
-            <a:r>
-              <a:rPr lang="en-US" altLang="ko-KR" sz="2300" dirty="0" err="1"/>
-              <a:t>FastText</a:t>
-            </a:r>
-            <a:endParaRPr lang="ko-KR" altLang="en-US" sz="2300" dirty="0"/>
-          </a:p>
-        </p:txBody>
-      </p:sp>
-    </p:spTree>
-    <p:extLst>
-      <p:ext uri="{BB962C8B-B14F-4D97-AF65-F5344CB8AC3E}">
-        <p14:creationId xmlns:p14="http://schemas.microsoft.com/office/powerpoint/2010/main" val="3311746442"/>
-      </p:ext>
-    </p:extLst>
-  </p:cSld>
-  <p:clrMapOvr>
-    <a:masterClrMapping/>
-  </p:clrMapOvr>
-</p:sld>
-</file>
-
-<file path=ppt/slides/slide22.xml><?xml version="1.0" encoding="utf-8"?>
-<p:sld xmlns:a="http://schemas.openxmlformats.org/drawingml/2006/main" xmlns:r="http://schemas.openxmlformats.org/officeDocument/2006/relationships" xmlns:p="http://schemas.openxmlformats.org/presentationml/2006/main">
-  <p:cSld>
-    <p:spTree>
-      <p:nvGrpSpPr>
-        <p:cNvPr id="1" name=""/>
-        <p:cNvGrpSpPr/>
-        <p:nvPr/>
-      </p:nvGrpSpPr>
-      <p:grpSpPr>
-        <a:xfrm>
-          <a:off x="0" y="0"/>
-          <a:ext cx="0" cy="0"/>
-          <a:chOff x="0" y="0"/>
-          <a:chExt cx="0" cy="0"/>
-        </a:xfrm>
-      </p:grpSpPr>
-      <p:sp>
-        <p:nvSpPr>
-          <p:cNvPr id="3" name="타원 2"/>
-          <p:cNvSpPr/>
-          <p:nvPr/>
-        </p:nvSpPr>
-        <p:spPr>
-          <a:xfrm>
-            <a:off x="4067944" y="74100"/>
-            <a:ext cx="936104" cy="936104"/>
-          </a:xfrm>
-          <a:prstGeom prst="ellipse">
-            <a:avLst/>
-          </a:prstGeom>
-          <a:solidFill>
-            <a:schemeClr val="tx2">
-              <a:lumMod val="75000"/>
-            </a:schemeClr>
-          </a:solidFill>
-          <a:ln>
-            <a:noFill/>
-          </a:ln>
-        </p:spPr>
-        <p:style>
-          <a:lnRef idx="2">
-            <a:schemeClr val="accent1">
-              <a:shade val="50000"/>
-            </a:schemeClr>
-          </a:lnRef>
-          <a:fillRef idx="1">
-            <a:schemeClr val="accent1"/>
-          </a:fillRef>
-          <a:effectRef idx="0">
-            <a:schemeClr val="accent1"/>
-          </a:effectRef>
-          <a:fontRef idx="minor">
-            <a:schemeClr val="lt1"/>
-          </a:fontRef>
-        </p:style>
-        <p:txBody>
-          <a:bodyPr rtlCol="0" anchor="ctr"/>
-          <a:lstStyle/>
-          <a:p>
-            <a:pPr algn="ctr"/>
-            <a:endParaRPr lang="ko-KR" altLang="en-US"/>
-          </a:p>
-        </p:txBody>
-      </p:sp>
-      <p:sp>
-        <p:nvSpPr>
-          <p:cNvPr id="8" name="직사각형 7"/>
-          <p:cNvSpPr/>
-          <p:nvPr/>
-        </p:nvSpPr>
-        <p:spPr>
-          <a:xfrm>
-            <a:off x="708380" y="271681"/>
-            <a:ext cx="857927" cy="276999"/>
-          </a:xfrm>
-          <a:prstGeom prst="rect">
-            <a:avLst/>
-          </a:prstGeom>
-        </p:spPr>
-        <p:txBody>
-          <a:bodyPr wrap="none">
-            <a:spAutoFit/>
-          </a:bodyPr>
-          <a:lstStyle/>
-          <a:p>
-            <a:pPr algn="ctr"/>
-            <a:r>
-              <a:rPr lang="ko-KR" altLang="en-US" sz="1200" b="1" spc="-150" dirty="0">
-                <a:solidFill>
-                  <a:schemeClr val="bg1"/>
-                </a:solidFill>
-              </a:rPr>
-              <a:t>자연어처리</a:t>
-            </a:r>
-            <a:endParaRPr lang="en-US" altLang="ko-KR" sz="1200" b="1" spc="-150" dirty="0">
-              <a:solidFill>
-                <a:schemeClr val="bg1"/>
-              </a:solidFill>
-            </a:endParaRPr>
-          </a:p>
-        </p:txBody>
-      </p:sp>
-      <p:sp>
-        <p:nvSpPr>
-          <p:cNvPr id="9" name="TextBox 8"/>
-          <p:cNvSpPr txBox="1"/>
-          <p:nvPr/>
-        </p:nvSpPr>
-        <p:spPr>
-          <a:xfrm>
-            <a:off x="3995936" y="479095"/>
-            <a:ext cx="1080120" cy="461665"/>
-          </a:xfrm>
-          <a:prstGeom prst="rect">
-            <a:avLst/>
-          </a:prstGeom>
-          <a:noFill/>
-        </p:spPr>
-        <p:txBody>
-          <a:bodyPr wrap="square" rtlCol="0">
-            <a:spAutoFit/>
-          </a:bodyPr>
-          <a:lstStyle/>
-          <a:p>
-            <a:pPr algn="ctr"/>
-            <a:r>
-              <a:rPr lang="en-US" altLang="ko-KR" sz="2400" dirty="0">
-                <a:solidFill>
-                  <a:schemeClr val="bg1"/>
-                </a:solidFill>
-                <a:latin typeface="HY헤드라인M" pitchFamily="18" charset="-127"/>
-                <a:ea typeface="HY헤드라인M" pitchFamily="18" charset="-127"/>
-              </a:rPr>
-              <a:t>01</a:t>
-            </a:r>
-            <a:endParaRPr lang="ko-KR" altLang="en-US" sz="2400" dirty="0">
-              <a:solidFill>
-                <a:schemeClr val="bg1"/>
-              </a:solidFill>
-              <a:latin typeface="HY헤드라인M" pitchFamily="18" charset="-127"/>
-              <a:ea typeface="HY헤드라인M" pitchFamily="18" charset="-127"/>
-            </a:endParaRPr>
-          </a:p>
-        </p:txBody>
-      </p:sp>
-      <p:sp>
-        <p:nvSpPr>
-          <p:cNvPr id="4" name="TextBox 3"/>
-          <p:cNvSpPr txBox="1"/>
-          <p:nvPr/>
-        </p:nvSpPr>
-        <p:spPr>
-          <a:xfrm>
-            <a:off x="971600" y="1700955"/>
-            <a:ext cx="7200800" cy="1754326"/>
-          </a:xfrm>
-          <a:prstGeom prst="rect">
-            <a:avLst/>
-          </a:prstGeom>
-          <a:noFill/>
-        </p:spPr>
-        <p:txBody>
-          <a:bodyPr wrap="square" rtlCol="0">
-            <a:spAutoFit/>
-          </a:bodyPr>
-          <a:lstStyle/>
-          <a:p>
-            <a:pPr marL="285750" indent="-285750">
-              <a:buFont typeface="Arial" panose="020B0604020202020204" pitchFamily="34" charset="0"/>
-              <a:buChar char="•"/>
-            </a:pPr>
-            <a:r>
-              <a:rPr lang="ko-KR" altLang="en-US" dirty="0"/>
-              <a:t>문장 전체를 하나의 벡터로 </a:t>
-            </a:r>
-            <a:r>
-              <a:rPr lang="ko-KR" altLang="en-US" dirty="0" err="1"/>
-              <a:t>임베딩</a:t>
-            </a:r>
-            <a:r>
-              <a:rPr lang="ko-KR" altLang="en-US" dirty="0"/>
-              <a:t> 하는 알고리즘</a:t>
-            </a:r>
-            <a:endParaRPr lang="en-US" altLang="ko-KR" dirty="0"/>
-          </a:p>
-          <a:p>
-            <a:pPr marL="285750" indent="-285750">
-              <a:buFont typeface="Arial" panose="020B0604020202020204" pitchFamily="34" charset="0"/>
-              <a:buChar char="•"/>
-            </a:pPr>
-            <a:r>
-              <a:rPr lang="en-US" altLang="ko-KR" dirty="0"/>
-              <a:t>Word2Vec</a:t>
-            </a:r>
-            <a:r>
-              <a:rPr lang="ko-KR" altLang="en-US" dirty="0"/>
-              <a:t>의 확장판으로 문서에 </a:t>
-            </a:r>
-            <a:r>
-              <a:rPr lang="en-US" altLang="ko-KR" dirty="0"/>
-              <a:t>ID</a:t>
-            </a:r>
-            <a:r>
-              <a:rPr lang="ko-KR" altLang="en-US" dirty="0"/>
-              <a:t>를 추가하여 학습에 참여 시키는 방법</a:t>
-            </a:r>
-            <a:endParaRPr lang="en-US" altLang="ko-KR" dirty="0"/>
-          </a:p>
-          <a:p>
-            <a:pPr marL="285750" indent="-285750">
-              <a:buFont typeface="Arial" panose="020B0604020202020204" pitchFamily="34" charset="0"/>
-              <a:buChar char="•"/>
-            </a:pPr>
-            <a:r>
-              <a:rPr lang="ko-KR" altLang="en-US" dirty="0"/>
-              <a:t>문장에 </a:t>
-            </a:r>
-            <a:r>
-              <a:rPr lang="en-US" altLang="ko-KR" dirty="0"/>
-              <a:t>ID</a:t>
-            </a:r>
-            <a:r>
-              <a:rPr lang="ko-KR" altLang="en-US" dirty="0"/>
-              <a:t>를 추가하기 위해 </a:t>
-            </a:r>
-            <a:r>
-              <a:rPr lang="en-US" altLang="ko-KR" dirty="0" err="1"/>
-              <a:t>TaggedDocument</a:t>
-            </a:r>
-            <a:r>
-              <a:rPr lang="ko-KR" altLang="en-US" dirty="0"/>
-              <a:t>를 사용</a:t>
-            </a:r>
-            <a:endParaRPr lang="en-US" altLang="ko-KR" dirty="0"/>
-          </a:p>
-          <a:p>
-            <a:pPr marL="285750" indent="-285750">
-              <a:buFont typeface="Arial" panose="020B0604020202020204" pitchFamily="34" charset="0"/>
-              <a:buChar char="•"/>
-            </a:pPr>
-            <a:r>
-              <a:rPr lang="ko-KR" altLang="en-US" dirty="0"/>
-              <a:t>정적인 문맥 기반 모델로 단어의 위치나 순서의 미세한 차이를 반영하지 못함</a:t>
-            </a:r>
-            <a:endParaRPr lang="en-US" altLang="ko-KR" dirty="0"/>
-          </a:p>
-        </p:txBody>
-      </p:sp>
-      <p:sp>
-        <p:nvSpPr>
-          <p:cNvPr id="6" name="TextBox 5"/>
-          <p:cNvSpPr txBox="1"/>
-          <p:nvPr/>
-        </p:nvSpPr>
-        <p:spPr>
-          <a:xfrm>
-            <a:off x="539552" y="1065096"/>
-            <a:ext cx="7992888" cy="446276"/>
-          </a:xfrm>
-          <a:prstGeom prst="rect">
-            <a:avLst/>
-          </a:prstGeom>
-          <a:noFill/>
-        </p:spPr>
-        <p:txBody>
-          <a:bodyPr wrap="square" rtlCol="0">
-            <a:spAutoFit/>
-          </a:bodyPr>
-          <a:lstStyle/>
-          <a:p>
-            <a:r>
-              <a:rPr lang="en-US" altLang="ko-KR" sz="2300" dirty="0"/>
-              <a:t>Doc2Vec</a:t>
-            </a:r>
-            <a:endParaRPr lang="ko-KR" altLang="en-US" sz="2300" dirty="0"/>
-          </a:p>
-        </p:txBody>
-      </p:sp>
-    </p:spTree>
-    <p:extLst>
-      <p:ext uri="{BB962C8B-B14F-4D97-AF65-F5344CB8AC3E}">
-        <p14:creationId xmlns:p14="http://schemas.microsoft.com/office/powerpoint/2010/main" val="3613297929"/>
-      </p:ext>
-    </p:extLst>
-  </p:cSld>
-  <p:clrMapOvr>
-    <a:masterClrMapping/>
-  </p:clrMapOvr>
-</p:sld>
-</file>
-
-<file path=ppt/slides/slide23.xml><?xml version="1.0" encoding="utf-8"?>
-<p:sld xmlns:a="http://schemas.openxmlformats.org/drawingml/2006/main" xmlns:r="http://schemas.openxmlformats.org/officeDocument/2006/relationships" xmlns:p="http://schemas.openxmlformats.org/presentationml/2006/main">
-  <p:cSld>
-    <p:spTree>
-      <p:nvGrpSpPr>
-        <p:cNvPr id="1" name=""/>
-        <p:cNvGrpSpPr/>
-        <p:nvPr/>
-      </p:nvGrpSpPr>
-      <p:grpSpPr>
-        <a:xfrm>
-          <a:off x="0" y="0"/>
-          <a:ext cx="0" cy="0"/>
-          <a:chOff x="0" y="0"/>
-          <a:chExt cx="0" cy="0"/>
-        </a:xfrm>
-      </p:grpSpPr>
-      <p:sp>
-        <p:nvSpPr>
-          <p:cNvPr id="3" name="타원 2"/>
-          <p:cNvSpPr/>
-          <p:nvPr/>
-        </p:nvSpPr>
-        <p:spPr>
-          <a:xfrm>
-            <a:off x="4067944" y="74100"/>
-            <a:ext cx="936104" cy="936104"/>
-          </a:xfrm>
-          <a:prstGeom prst="ellipse">
-            <a:avLst/>
-          </a:prstGeom>
-          <a:solidFill>
-            <a:schemeClr val="tx2">
-              <a:lumMod val="75000"/>
-            </a:schemeClr>
-          </a:solidFill>
-          <a:ln>
-            <a:noFill/>
-          </a:ln>
-        </p:spPr>
-        <p:style>
-          <a:lnRef idx="2">
-            <a:schemeClr val="accent1">
-              <a:shade val="50000"/>
-            </a:schemeClr>
-          </a:lnRef>
-          <a:fillRef idx="1">
-            <a:schemeClr val="accent1"/>
-          </a:fillRef>
-          <a:effectRef idx="0">
-            <a:schemeClr val="accent1"/>
-          </a:effectRef>
-          <a:fontRef idx="minor">
-            <a:schemeClr val="lt1"/>
-          </a:fontRef>
-        </p:style>
-        <p:txBody>
-          <a:bodyPr rtlCol="0" anchor="ctr"/>
-          <a:lstStyle/>
-          <a:p>
-            <a:pPr algn="ctr"/>
-            <a:endParaRPr lang="ko-KR" altLang="en-US"/>
-          </a:p>
-        </p:txBody>
-      </p:sp>
-      <p:sp>
-        <p:nvSpPr>
-          <p:cNvPr id="8" name="직사각형 7"/>
-          <p:cNvSpPr/>
-          <p:nvPr/>
-        </p:nvSpPr>
-        <p:spPr>
-          <a:xfrm>
-            <a:off x="708380" y="271681"/>
-            <a:ext cx="857927" cy="276999"/>
-          </a:xfrm>
-          <a:prstGeom prst="rect">
-            <a:avLst/>
-          </a:prstGeom>
-        </p:spPr>
-        <p:txBody>
-          <a:bodyPr wrap="none">
-            <a:spAutoFit/>
-          </a:bodyPr>
-          <a:lstStyle/>
-          <a:p>
-            <a:pPr algn="ctr"/>
-            <a:r>
-              <a:rPr lang="ko-KR" altLang="en-US" sz="1200" b="1" spc="-150" dirty="0">
-                <a:solidFill>
-                  <a:schemeClr val="bg1"/>
-                </a:solidFill>
-              </a:rPr>
-              <a:t>자연어처리</a:t>
-            </a:r>
-            <a:endParaRPr lang="en-US" altLang="ko-KR" sz="1200" b="1" spc="-150" dirty="0">
-              <a:solidFill>
-                <a:schemeClr val="bg1"/>
-              </a:solidFill>
-            </a:endParaRPr>
-          </a:p>
-        </p:txBody>
-      </p:sp>
-      <p:sp>
-        <p:nvSpPr>
-          <p:cNvPr id="9" name="TextBox 8"/>
-          <p:cNvSpPr txBox="1"/>
-          <p:nvPr/>
-        </p:nvSpPr>
-        <p:spPr>
-          <a:xfrm>
-            <a:off x="3995936" y="479095"/>
-            <a:ext cx="1080120" cy="461665"/>
-          </a:xfrm>
-          <a:prstGeom prst="rect">
-            <a:avLst/>
-          </a:prstGeom>
-          <a:noFill/>
-        </p:spPr>
-        <p:txBody>
-          <a:bodyPr wrap="square" rtlCol="0">
-            <a:spAutoFit/>
-          </a:bodyPr>
-          <a:lstStyle/>
-          <a:p>
-            <a:pPr algn="ctr"/>
-            <a:r>
-              <a:rPr lang="en-US" altLang="ko-KR" sz="2400" dirty="0">
-                <a:solidFill>
-                  <a:schemeClr val="bg1"/>
-                </a:solidFill>
-                <a:latin typeface="HY헤드라인M" pitchFamily="18" charset="-127"/>
-                <a:ea typeface="HY헤드라인M" pitchFamily="18" charset="-127"/>
-              </a:rPr>
-              <a:t>01</a:t>
-            </a:r>
-            <a:endParaRPr lang="ko-KR" altLang="en-US" sz="2400" dirty="0">
-              <a:solidFill>
-                <a:schemeClr val="bg1"/>
-              </a:solidFill>
-              <a:latin typeface="HY헤드라인M" pitchFamily="18" charset="-127"/>
-              <a:ea typeface="HY헤드라인M" pitchFamily="18" charset="-127"/>
-            </a:endParaRPr>
-          </a:p>
-        </p:txBody>
-      </p:sp>
-      <p:sp>
-        <p:nvSpPr>
-          <p:cNvPr id="4" name="TextBox 3"/>
-          <p:cNvSpPr txBox="1"/>
-          <p:nvPr/>
-        </p:nvSpPr>
-        <p:spPr>
-          <a:xfrm>
-            <a:off x="971600" y="1700955"/>
-            <a:ext cx="7200800" cy="2308324"/>
-          </a:xfrm>
-          <a:prstGeom prst="rect">
-            <a:avLst/>
-          </a:prstGeom>
-          <a:noFill/>
-        </p:spPr>
-        <p:txBody>
-          <a:bodyPr wrap="square" rtlCol="0">
-            <a:spAutoFit/>
-          </a:bodyPr>
-          <a:lstStyle/>
-          <a:p>
-            <a:pPr marL="285750" indent="-285750">
-              <a:buFont typeface="Arial" panose="020B0604020202020204" pitchFamily="34" charset="0"/>
-              <a:buChar char="•"/>
-            </a:pPr>
-            <a:r>
-              <a:rPr lang="en-US" altLang="ko-KR" dirty="0"/>
-              <a:t>PV-DM</a:t>
-            </a:r>
-          </a:p>
-          <a:p>
-            <a:pPr marL="742950" lvl="1" indent="-285750">
-              <a:buFont typeface="Arial" panose="020B0604020202020204" pitchFamily="34" charset="0"/>
-              <a:buChar char="•"/>
-            </a:pPr>
-            <a:r>
-              <a:rPr lang="ko-KR" altLang="en-US" dirty="0"/>
-              <a:t>문서 벡터 </a:t>
-            </a:r>
-            <a:r>
-              <a:rPr lang="en-US" altLang="ko-KR" dirty="0"/>
-              <a:t>+ </a:t>
-            </a:r>
-            <a:r>
-              <a:rPr lang="ko-KR" altLang="en-US" dirty="0"/>
-              <a:t>주변 단어들로 중심 단어를 예측</a:t>
-            </a:r>
-            <a:endParaRPr lang="en-US" altLang="ko-KR" dirty="0"/>
-          </a:p>
-          <a:p>
-            <a:pPr marL="742950" lvl="1" indent="-285750">
-              <a:buFont typeface="Arial" panose="020B0604020202020204" pitchFamily="34" charset="0"/>
-              <a:buChar char="•"/>
-            </a:pPr>
-            <a:r>
-              <a:rPr lang="ko-KR" altLang="en-US" dirty="0"/>
-              <a:t>순서와 문맥을 보존하여 일반적으로 사용하는 기본값</a:t>
-            </a:r>
-            <a:endParaRPr lang="en-US" altLang="ko-KR" dirty="0"/>
-          </a:p>
-          <a:p>
-            <a:pPr marL="285750" indent="-285750">
-              <a:buFont typeface="Arial" panose="020B0604020202020204" pitchFamily="34" charset="0"/>
-              <a:buChar char="•"/>
-            </a:pPr>
-            <a:r>
-              <a:rPr lang="en-US" altLang="ko-KR" dirty="0"/>
-              <a:t>PV-DBOW</a:t>
-            </a:r>
-          </a:p>
-          <a:p>
-            <a:pPr marL="742950" lvl="1" indent="-285750">
-              <a:buFont typeface="Arial" panose="020B0604020202020204" pitchFamily="34" charset="0"/>
-              <a:buChar char="•"/>
-            </a:pPr>
-            <a:r>
-              <a:rPr lang="ko-KR" altLang="en-US" dirty="0"/>
-              <a:t>문서 벡터로 단어를 직접 예측</a:t>
-            </a:r>
-            <a:r>
-              <a:rPr lang="en-US" altLang="ko-KR" dirty="0"/>
-              <a:t>(</a:t>
-            </a:r>
-            <a:r>
-              <a:rPr lang="ko-KR" altLang="en-US" dirty="0"/>
-              <a:t>단어의 순서는 무시</a:t>
-            </a:r>
-            <a:r>
-              <a:rPr lang="en-US" altLang="ko-KR" dirty="0"/>
-              <a:t>)</a:t>
-            </a:r>
-          </a:p>
-          <a:p>
-            <a:pPr marL="742950" lvl="1" indent="-285750">
-              <a:buFont typeface="Arial" panose="020B0604020202020204" pitchFamily="34" charset="0"/>
-              <a:buChar char="•"/>
-            </a:pPr>
-            <a:r>
-              <a:rPr lang="ko-KR" altLang="en-US" dirty="0"/>
-              <a:t>가볍고 빠르게 확인하기 위해 사용</a:t>
-            </a:r>
-            <a:endParaRPr lang="en-US" altLang="ko-KR" dirty="0"/>
-          </a:p>
-          <a:p>
-            <a:pPr marL="742950" lvl="1" indent="-285750">
-              <a:buFont typeface="Arial" panose="020B0604020202020204" pitchFamily="34" charset="0"/>
-              <a:buChar char="•"/>
-            </a:pPr>
-            <a:r>
-              <a:rPr lang="en-US" altLang="ko-KR" dirty="0"/>
-              <a:t>PV-DM</a:t>
-            </a:r>
-            <a:r>
-              <a:rPr lang="ko-KR" altLang="en-US" dirty="0"/>
-              <a:t>과 결합해서 사용하면 성능이 좋게 나오는 경우가 발생</a:t>
-            </a:r>
-            <a:endParaRPr lang="en-US" altLang="ko-KR" dirty="0"/>
-          </a:p>
-        </p:txBody>
-      </p:sp>
-      <p:sp>
-        <p:nvSpPr>
-          <p:cNvPr id="6" name="TextBox 5"/>
-          <p:cNvSpPr txBox="1"/>
-          <p:nvPr/>
-        </p:nvSpPr>
-        <p:spPr>
-          <a:xfrm>
-            <a:off x="539552" y="1065096"/>
-            <a:ext cx="7992888" cy="446276"/>
-          </a:xfrm>
-          <a:prstGeom prst="rect">
-            <a:avLst/>
-          </a:prstGeom>
-          <a:noFill/>
-        </p:spPr>
-        <p:txBody>
-          <a:bodyPr wrap="square" rtlCol="0">
-            <a:spAutoFit/>
-          </a:bodyPr>
-          <a:lstStyle/>
-          <a:p>
-            <a:r>
-              <a:rPr lang="en-US" altLang="ko-KR" sz="2300" dirty="0"/>
-              <a:t>Doc2Vec</a:t>
-            </a:r>
-            <a:endParaRPr lang="ko-KR" altLang="en-US" sz="2300" dirty="0"/>
-          </a:p>
-        </p:txBody>
-      </p:sp>
-    </p:spTree>
-    <p:extLst>
-      <p:ext uri="{BB962C8B-B14F-4D97-AF65-F5344CB8AC3E}">
-        <p14:creationId xmlns:p14="http://schemas.microsoft.com/office/powerpoint/2010/main" val="4105575565"/>
-      </p:ext>
-    </p:extLst>
-  </p:cSld>
-  <p:clrMapOvr>
-    <a:masterClrMapping/>
-  </p:clrMapOvr>
-</p:sld>
-</file>
-
-<file path=ppt/slides/slide24.xml><?xml version="1.0" encoding="utf-8"?>
-<p:sld xmlns:a="http://schemas.openxmlformats.org/drawingml/2006/main" xmlns:r="http://schemas.openxmlformats.org/officeDocument/2006/relationships" xmlns:p="http://schemas.openxmlformats.org/presentationml/2006/main">
-  <p:cSld>
-    <p:spTree>
-      <p:nvGrpSpPr>
-        <p:cNvPr id="1" name=""/>
-        <p:cNvGrpSpPr/>
-        <p:nvPr/>
-      </p:nvGrpSpPr>
-      <p:grpSpPr>
-        <a:xfrm>
-          <a:off x="0" y="0"/>
-          <a:ext cx="0" cy="0"/>
-          <a:chOff x="0" y="0"/>
-          <a:chExt cx="0" cy="0"/>
-        </a:xfrm>
-      </p:grpSpPr>
-      <p:sp>
-        <p:nvSpPr>
-          <p:cNvPr id="3" name="타원 2"/>
-          <p:cNvSpPr/>
-          <p:nvPr/>
-        </p:nvSpPr>
-        <p:spPr>
-          <a:xfrm>
-            <a:off x="4067944" y="74100"/>
-            <a:ext cx="936104" cy="936104"/>
-          </a:xfrm>
-          <a:prstGeom prst="ellipse">
-            <a:avLst/>
-          </a:prstGeom>
-          <a:solidFill>
-            <a:schemeClr val="tx2">
-              <a:lumMod val="75000"/>
-            </a:schemeClr>
-          </a:solidFill>
-          <a:ln>
-            <a:noFill/>
-          </a:ln>
-        </p:spPr>
-        <p:style>
-          <a:lnRef idx="2">
-            <a:schemeClr val="accent1">
-              <a:shade val="50000"/>
-            </a:schemeClr>
-          </a:lnRef>
-          <a:fillRef idx="1">
-            <a:schemeClr val="accent1"/>
-          </a:fillRef>
-          <a:effectRef idx="0">
-            <a:schemeClr val="accent1"/>
-          </a:effectRef>
-          <a:fontRef idx="minor">
-            <a:schemeClr val="lt1"/>
-          </a:fontRef>
-        </p:style>
-        <p:txBody>
-          <a:bodyPr rtlCol="0" anchor="ctr"/>
-          <a:lstStyle/>
-          <a:p>
-            <a:pPr algn="ctr"/>
-            <a:endParaRPr lang="ko-KR" altLang="en-US"/>
-          </a:p>
-        </p:txBody>
-      </p:sp>
-      <p:sp>
-        <p:nvSpPr>
-          <p:cNvPr id="8" name="직사각형 7"/>
-          <p:cNvSpPr/>
-          <p:nvPr/>
-        </p:nvSpPr>
-        <p:spPr>
-          <a:xfrm>
-            <a:off x="708380" y="271681"/>
-            <a:ext cx="857927" cy="276999"/>
-          </a:xfrm>
-          <a:prstGeom prst="rect">
-            <a:avLst/>
-          </a:prstGeom>
-        </p:spPr>
-        <p:txBody>
-          <a:bodyPr wrap="none">
-            <a:spAutoFit/>
-          </a:bodyPr>
-          <a:lstStyle/>
-          <a:p>
-            <a:pPr algn="ctr"/>
-            <a:r>
-              <a:rPr lang="ko-KR" altLang="en-US" sz="1200" b="1" spc="-150" dirty="0">
-                <a:solidFill>
-                  <a:schemeClr val="bg1"/>
-                </a:solidFill>
-              </a:rPr>
-              <a:t>자연어처리</a:t>
-            </a:r>
-            <a:endParaRPr lang="en-US" altLang="ko-KR" sz="1200" b="1" spc="-150" dirty="0">
-              <a:solidFill>
-                <a:schemeClr val="bg1"/>
-              </a:solidFill>
-            </a:endParaRPr>
-          </a:p>
-        </p:txBody>
-      </p:sp>
-      <p:sp>
-        <p:nvSpPr>
-          <p:cNvPr id="9" name="TextBox 8"/>
-          <p:cNvSpPr txBox="1"/>
-          <p:nvPr/>
-        </p:nvSpPr>
-        <p:spPr>
-          <a:xfrm>
-            <a:off x="3995936" y="479095"/>
-            <a:ext cx="1080120" cy="461665"/>
-          </a:xfrm>
-          <a:prstGeom prst="rect">
-            <a:avLst/>
-          </a:prstGeom>
-          <a:noFill/>
-        </p:spPr>
-        <p:txBody>
-          <a:bodyPr wrap="square" rtlCol="0">
-            <a:spAutoFit/>
-          </a:bodyPr>
-          <a:lstStyle/>
-          <a:p>
-            <a:pPr algn="ctr"/>
-            <a:r>
-              <a:rPr lang="en-US" altLang="ko-KR" sz="2400" dirty="0">
-                <a:solidFill>
-                  <a:schemeClr val="bg1"/>
-                </a:solidFill>
-                <a:latin typeface="HY헤드라인M" pitchFamily="18" charset="-127"/>
-                <a:ea typeface="HY헤드라인M" pitchFamily="18" charset="-127"/>
-              </a:rPr>
-              <a:t>01</a:t>
-            </a:r>
-            <a:endParaRPr lang="ko-KR" altLang="en-US" sz="2400" dirty="0">
-              <a:solidFill>
-                <a:schemeClr val="bg1"/>
-              </a:solidFill>
-              <a:latin typeface="HY헤드라인M" pitchFamily="18" charset="-127"/>
-              <a:ea typeface="HY헤드라인M" pitchFamily="18" charset="-127"/>
-            </a:endParaRPr>
-          </a:p>
-        </p:txBody>
-      </p:sp>
-      <p:sp>
-        <p:nvSpPr>
-          <p:cNvPr id="4" name="TextBox 3"/>
-          <p:cNvSpPr txBox="1"/>
-          <p:nvPr/>
-        </p:nvSpPr>
-        <p:spPr>
-          <a:xfrm>
-            <a:off x="971600" y="1700955"/>
-            <a:ext cx="7200800" cy="2031325"/>
-          </a:xfrm>
-          <a:prstGeom prst="rect">
-            <a:avLst/>
-          </a:prstGeom>
-          <a:noFill/>
-        </p:spPr>
-        <p:txBody>
-          <a:bodyPr wrap="square" rtlCol="0">
-            <a:spAutoFit/>
-          </a:bodyPr>
-          <a:lstStyle/>
-          <a:p>
-            <a:pPr marL="285750" indent="-285750">
-              <a:buFont typeface="Arial" panose="020B0604020202020204" pitchFamily="34" charset="0"/>
-              <a:buChar char="•"/>
-            </a:pPr>
-            <a:r>
-              <a:rPr lang="ko-KR" altLang="en-US" dirty="0"/>
-              <a:t>과거의 정보를 기억하고 현재 출력을 반영하는 순환 구조의 신경망</a:t>
-            </a:r>
-            <a:endParaRPr lang="en-US" altLang="ko-KR" dirty="0"/>
-          </a:p>
-          <a:p>
-            <a:pPr marL="285750" indent="-285750">
-              <a:buFont typeface="Arial" panose="020B0604020202020204" pitchFamily="34" charset="0"/>
-              <a:buChar char="•"/>
-            </a:pPr>
-            <a:r>
-              <a:rPr lang="ko-KR" altLang="en-US" dirty="0"/>
-              <a:t>문장을 읽을 때</a:t>
-            </a:r>
-            <a:r>
-              <a:rPr lang="en-US" altLang="ko-KR" dirty="0"/>
-              <a:t>, </a:t>
-            </a:r>
-            <a:r>
-              <a:rPr lang="ko-KR" altLang="en-US" dirty="0"/>
-              <a:t>이전 단어를 기억하면서 다음 단어를 예측하는 것과 유사 </a:t>
-            </a:r>
-            <a:endParaRPr lang="en-US" altLang="ko-KR" dirty="0"/>
-          </a:p>
-          <a:p>
-            <a:pPr marL="285750" indent="-285750">
-              <a:buFont typeface="Arial" panose="020B0604020202020204" pitchFamily="34" charset="0"/>
-              <a:buChar char="•"/>
-            </a:pPr>
-            <a:r>
-              <a:rPr lang="ko-KR" altLang="en-US" dirty="0"/>
-              <a:t>긴 시퀀스를 학습하는 경우 기울기 소실 문제가 발생 </a:t>
-            </a:r>
-            <a:endParaRPr lang="en-US" altLang="ko-KR" dirty="0"/>
-          </a:p>
-          <a:p>
-            <a:pPr marL="742950" lvl="1" indent="-285750">
-              <a:buFont typeface="Arial" panose="020B0604020202020204" pitchFamily="34" charset="0"/>
-              <a:buChar char="•"/>
-            </a:pPr>
-            <a:r>
-              <a:rPr lang="ko-KR" altLang="en-US" dirty="0"/>
-              <a:t>과거의 정보가 뒤로 갈수록 영향이 급격히 사라짐</a:t>
-            </a:r>
-            <a:endParaRPr lang="en-US" altLang="ko-KR" dirty="0"/>
-          </a:p>
-          <a:p>
-            <a:pPr marL="742950" lvl="1" indent="-285750">
-              <a:buFont typeface="Arial" panose="020B0604020202020204" pitchFamily="34" charset="0"/>
-              <a:buChar char="•"/>
-            </a:pPr>
-            <a:r>
-              <a:rPr lang="ko-KR" altLang="en-US" dirty="0"/>
-              <a:t>긴 문맥의 데이터를 학습에는 부적절</a:t>
-            </a:r>
-            <a:endParaRPr lang="en-US" altLang="ko-KR" dirty="0"/>
-          </a:p>
-        </p:txBody>
-      </p:sp>
-      <p:sp>
-        <p:nvSpPr>
-          <p:cNvPr id="6" name="TextBox 5"/>
-          <p:cNvSpPr txBox="1"/>
-          <p:nvPr/>
-        </p:nvSpPr>
-        <p:spPr>
-          <a:xfrm>
-            <a:off x="539552" y="1065096"/>
-            <a:ext cx="7992888" cy="461665"/>
-          </a:xfrm>
-          <a:prstGeom prst="rect">
-            <a:avLst/>
-          </a:prstGeom>
-          <a:noFill/>
-        </p:spPr>
-        <p:txBody>
-          <a:bodyPr wrap="square" rtlCol="0">
-            <a:spAutoFit/>
-          </a:bodyPr>
-          <a:lstStyle/>
-          <a:p>
-            <a:r>
-              <a:rPr lang="en-US" altLang="ko-KR" sz="2400" dirty="0"/>
-              <a:t>RNN(Recurrent Neural Network)</a:t>
-            </a:r>
-            <a:endParaRPr lang="ko-KR" altLang="en-US" sz="2300" dirty="0"/>
-          </a:p>
-        </p:txBody>
-      </p:sp>
-    </p:spTree>
-    <p:extLst>
-      <p:ext uri="{BB962C8B-B14F-4D97-AF65-F5344CB8AC3E}">
-        <p14:creationId xmlns:p14="http://schemas.microsoft.com/office/powerpoint/2010/main" val="2224950096"/>
-      </p:ext>
-    </p:extLst>
-  </p:cSld>
-  <p:clrMapOvr>
-    <a:masterClrMapping/>
-  </p:clrMapOvr>
-</p:sld>
-</file>
-
-<file path=ppt/slides/slide25.xml><?xml version="1.0" encoding="utf-8"?>
-<p:sld xmlns:a="http://schemas.openxmlformats.org/drawingml/2006/main" xmlns:r="http://schemas.openxmlformats.org/officeDocument/2006/relationships" xmlns:p="http://schemas.openxmlformats.org/presentationml/2006/main">
-  <p:cSld>
-    <p:spTree>
-      <p:nvGrpSpPr>
-        <p:cNvPr id="1" name=""/>
-        <p:cNvGrpSpPr/>
-        <p:nvPr/>
-      </p:nvGrpSpPr>
-      <p:grpSpPr>
-        <a:xfrm>
-          <a:off x="0" y="0"/>
-          <a:ext cx="0" cy="0"/>
-          <a:chOff x="0" y="0"/>
-          <a:chExt cx="0" cy="0"/>
-        </a:xfrm>
-      </p:grpSpPr>
-      <p:sp>
-        <p:nvSpPr>
-          <p:cNvPr id="3" name="타원 2"/>
-          <p:cNvSpPr/>
-          <p:nvPr/>
-        </p:nvSpPr>
-        <p:spPr>
-          <a:xfrm>
-            <a:off x="4067944" y="74100"/>
-            <a:ext cx="936104" cy="936104"/>
-          </a:xfrm>
-          <a:prstGeom prst="ellipse">
-            <a:avLst/>
-          </a:prstGeom>
-          <a:solidFill>
-            <a:schemeClr val="tx2">
-              <a:lumMod val="75000"/>
-            </a:schemeClr>
-          </a:solidFill>
-          <a:ln>
-            <a:noFill/>
-          </a:ln>
-        </p:spPr>
-        <p:style>
-          <a:lnRef idx="2">
-            <a:schemeClr val="accent1">
-              <a:shade val="50000"/>
-            </a:schemeClr>
-          </a:lnRef>
-          <a:fillRef idx="1">
-            <a:schemeClr val="accent1"/>
-          </a:fillRef>
-          <a:effectRef idx="0">
-            <a:schemeClr val="accent1"/>
-          </a:effectRef>
-          <a:fontRef idx="minor">
-            <a:schemeClr val="lt1"/>
-          </a:fontRef>
-        </p:style>
-        <p:txBody>
-          <a:bodyPr rtlCol="0" anchor="ctr"/>
-          <a:lstStyle/>
-          <a:p>
-            <a:pPr algn="ctr"/>
-            <a:endParaRPr lang="ko-KR" altLang="en-US"/>
-          </a:p>
-        </p:txBody>
-      </p:sp>
-      <p:sp>
-        <p:nvSpPr>
-          <p:cNvPr id="8" name="직사각형 7"/>
-          <p:cNvSpPr/>
-          <p:nvPr/>
-        </p:nvSpPr>
-        <p:spPr>
-          <a:xfrm>
-            <a:off x="708380" y="271681"/>
-            <a:ext cx="857927" cy="276999"/>
-          </a:xfrm>
-          <a:prstGeom prst="rect">
-            <a:avLst/>
-          </a:prstGeom>
-        </p:spPr>
-        <p:txBody>
-          <a:bodyPr wrap="none">
-            <a:spAutoFit/>
-          </a:bodyPr>
-          <a:lstStyle/>
-          <a:p>
-            <a:pPr algn="ctr"/>
-            <a:r>
-              <a:rPr lang="ko-KR" altLang="en-US" sz="1200" b="1" spc="-150" dirty="0">
-                <a:solidFill>
-                  <a:schemeClr val="bg1"/>
-                </a:solidFill>
-              </a:rPr>
-              <a:t>자연어처리</a:t>
-            </a:r>
-            <a:endParaRPr lang="en-US" altLang="ko-KR" sz="1200" b="1" spc="-150" dirty="0">
-              <a:solidFill>
-                <a:schemeClr val="bg1"/>
-              </a:solidFill>
-            </a:endParaRPr>
-          </a:p>
-        </p:txBody>
-      </p:sp>
-      <p:sp>
-        <p:nvSpPr>
-          <p:cNvPr id="9" name="TextBox 8"/>
-          <p:cNvSpPr txBox="1"/>
-          <p:nvPr/>
-        </p:nvSpPr>
-        <p:spPr>
-          <a:xfrm>
-            <a:off x="3995936" y="479095"/>
-            <a:ext cx="1080120" cy="461665"/>
-          </a:xfrm>
-          <a:prstGeom prst="rect">
-            <a:avLst/>
-          </a:prstGeom>
-          <a:noFill/>
-        </p:spPr>
-        <p:txBody>
-          <a:bodyPr wrap="square" rtlCol="0">
-            <a:spAutoFit/>
-          </a:bodyPr>
-          <a:lstStyle/>
-          <a:p>
-            <a:pPr algn="ctr"/>
-            <a:r>
-              <a:rPr lang="en-US" altLang="ko-KR" sz="2400" dirty="0">
-                <a:solidFill>
-                  <a:schemeClr val="bg1"/>
-                </a:solidFill>
-                <a:latin typeface="HY헤드라인M" pitchFamily="18" charset="-127"/>
-                <a:ea typeface="HY헤드라인M" pitchFamily="18" charset="-127"/>
-              </a:rPr>
-              <a:t>01</a:t>
-            </a:r>
-            <a:endParaRPr lang="ko-KR" altLang="en-US" sz="2400" dirty="0">
-              <a:solidFill>
-                <a:schemeClr val="bg1"/>
-              </a:solidFill>
-              <a:latin typeface="HY헤드라인M" pitchFamily="18" charset="-127"/>
-              <a:ea typeface="HY헤드라인M" pitchFamily="18" charset="-127"/>
-            </a:endParaRPr>
-          </a:p>
-        </p:txBody>
-      </p:sp>
-      <p:sp>
-        <p:nvSpPr>
-          <p:cNvPr id="4" name="TextBox 3"/>
-          <p:cNvSpPr txBox="1"/>
-          <p:nvPr/>
-        </p:nvSpPr>
-        <p:spPr>
-          <a:xfrm>
-            <a:off x="971600" y="1700955"/>
-            <a:ext cx="7200800" cy="3416320"/>
-          </a:xfrm>
-          <a:prstGeom prst="rect">
-            <a:avLst/>
-          </a:prstGeom>
-          <a:noFill/>
-        </p:spPr>
-        <p:txBody>
-          <a:bodyPr wrap="square" rtlCol="0">
-            <a:spAutoFit/>
-          </a:bodyPr>
-          <a:lstStyle/>
-          <a:p>
-            <a:pPr marL="285750" indent="-285750">
-              <a:buFont typeface="Arial" panose="020B0604020202020204" pitchFamily="34" charset="0"/>
-              <a:buChar char="•"/>
-            </a:pPr>
-            <a:r>
-              <a:rPr lang="en-US" altLang="ko-KR" dirty="0"/>
-              <a:t>LSTM</a:t>
-            </a:r>
-            <a:r>
-              <a:rPr lang="ko-KR" altLang="en-US" dirty="0"/>
-              <a:t>은 </a:t>
-            </a:r>
-            <a:r>
-              <a:rPr lang="en-US" altLang="ko-KR" dirty="0"/>
-              <a:t>RNN</a:t>
-            </a:r>
-            <a:r>
-              <a:rPr lang="ko-KR" altLang="en-US" dirty="0"/>
-              <a:t>의 한 종류로 오랜 시간 정보를 보존하고 필요할 때만 잊거나 업데이트를 할 수 있도록 고안한 구조</a:t>
-            </a:r>
-            <a:endParaRPr lang="en-US" altLang="ko-KR" dirty="0"/>
-          </a:p>
-          <a:p>
-            <a:pPr marL="285750" indent="-285750">
-              <a:buFont typeface="Arial" panose="020B0604020202020204" pitchFamily="34" charset="0"/>
-              <a:buChar char="•"/>
-            </a:pPr>
-            <a:r>
-              <a:rPr lang="ko-KR" altLang="en-US" dirty="0"/>
-              <a:t>기억 셀</a:t>
-            </a:r>
-            <a:r>
-              <a:rPr lang="en-US" altLang="ko-KR" dirty="0"/>
-              <a:t>(cell state)</a:t>
-            </a:r>
-            <a:r>
-              <a:rPr lang="ko-KR" altLang="en-US" dirty="0"/>
-              <a:t>과 게이트</a:t>
-            </a:r>
-            <a:r>
-              <a:rPr lang="en-US" altLang="ko-KR" dirty="0"/>
-              <a:t>(gate) </a:t>
-            </a:r>
-            <a:r>
-              <a:rPr lang="ko-KR" altLang="en-US" dirty="0"/>
-              <a:t>구조를 도입하여 정보를 선택적으로 유지하거나 삭제 가능 </a:t>
-            </a:r>
-            <a:endParaRPr lang="en-US" altLang="ko-KR" dirty="0"/>
-          </a:p>
-          <a:p>
-            <a:pPr marL="285750" indent="-285750">
-              <a:buFont typeface="Arial" panose="020B0604020202020204" pitchFamily="34" charset="0"/>
-              <a:buChar char="•"/>
-            </a:pPr>
-            <a:r>
-              <a:rPr lang="ko-KR" altLang="en-US" dirty="0"/>
-              <a:t>주요 게이트 </a:t>
-            </a:r>
-            <a:endParaRPr lang="en-US" altLang="ko-KR" dirty="0"/>
-          </a:p>
-          <a:p>
-            <a:pPr marL="742950" lvl="1" indent="-285750">
-              <a:buFont typeface="Arial" panose="020B0604020202020204" pitchFamily="34" charset="0"/>
-              <a:buChar char="•"/>
-            </a:pPr>
-            <a:r>
-              <a:rPr lang="en-US" altLang="ko-KR" dirty="0"/>
-              <a:t>Forget Gate</a:t>
-            </a:r>
-          </a:p>
-          <a:p>
-            <a:pPr marL="1200150" lvl="2" indent="-285750">
-              <a:buFont typeface="Arial" panose="020B0604020202020204" pitchFamily="34" charset="0"/>
-              <a:buChar char="•"/>
-            </a:pPr>
-            <a:r>
-              <a:rPr lang="ko-KR" altLang="en-US" dirty="0"/>
-              <a:t>과거의 정보를 얼마나 잊을지 결정</a:t>
-            </a:r>
-            <a:endParaRPr lang="en-US" altLang="ko-KR" dirty="0"/>
-          </a:p>
-          <a:p>
-            <a:pPr marL="742950" lvl="1" indent="-285750">
-              <a:buFont typeface="Arial" panose="020B0604020202020204" pitchFamily="34" charset="0"/>
-              <a:buChar char="•"/>
-            </a:pPr>
-            <a:r>
-              <a:rPr lang="en-US" altLang="ko-KR" dirty="0"/>
-              <a:t>Input Gate</a:t>
-            </a:r>
-          </a:p>
-          <a:p>
-            <a:pPr marL="1200150" lvl="2" indent="-285750">
-              <a:buFont typeface="Arial" panose="020B0604020202020204" pitchFamily="34" charset="0"/>
-              <a:buChar char="•"/>
-            </a:pPr>
-            <a:r>
-              <a:rPr lang="en-US" altLang="ko-KR" dirty="0"/>
-              <a:t> </a:t>
-            </a:r>
-            <a:r>
-              <a:rPr lang="ko-KR" altLang="en-US" dirty="0"/>
-              <a:t>새로운</a:t>
-            </a:r>
-            <a:r>
-              <a:rPr lang="en-US" altLang="ko-KR" dirty="0"/>
-              <a:t> </a:t>
-            </a:r>
-            <a:r>
-              <a:rPr lang="ko-KR" altLang="en-US" dirty="0"/>
-              <a:t>정보를 얼마나 저장할지 결정</a:t>
-            </a:r>
-            <a:endParaRPr lang="en-US" altLang="ko-KR" dirty="0"/>
-          </a:p>
-          <a:p>
-            <a:pPr marL="742950" lvl="1" indent="-285750">
-              <a:buFont typeface="Arial" panose="020B0604020202020204" pitchFamily="34" charset="0"/>
-              <a:buChar char="•"/>
-            </a:pPr>
-            <a:r>
-              <a:rPr lang="en-US" altLang="ko-KR" dirty="0"/>
-              <a:t>Output Gate</a:t>
-            </a:r>
-          </a:p>
-          <a:p>
-            <a:pPr marL="1200150" lvl="2" indent="-285750">
-              <a:buFont typeface="Arial" panose="020B0604020202020204" pitchFamily="34" charset="0"/>
-              <a:buChar char="•"/>
-            </a:pPr>
-            <a:r>
-              <a:rPr lang="ko-KR" altLang="en-US" dirty="0"/>
-              <a:t>다음 단계로 어떤 정보를 출력할지 결정</a:t>
-            </a:r>
-            <a:endParaRPr lang="en-US" altLang="ko-KR" dirty="0"/>
-          </a:p>
-          <a:p>
-            <a:pPr marL="285750" indent="-285750">
-              <a:buFont typeface="Arial" panose="020B0604020202020204" pitchFamily="34" charset="0"/>
-              <a:buChar char="•"/>
-            </a:pPr>
-            <a:r>
-              <a:rPr lang="ko-KR" altLang="en-US" dirty="0"/>
-              <a:t>기울기 소실 문제를 완화하여 긴 시퀀스 학습이 가능</a:t>
-            </a:r>
-            <a:endParaRPr lang="en-US" altLang="ko-KR" dirty="0"/>
-          </a:p>
-        </p:txBody>
-      </p:sp>
-      <p:sp>
-        <p:nvSpPr>
-          <p:cNvPr id="6" name="TextBox 5"/>
-          <p:cNvSpPr txBox="1"/>
-          <p:nvPr/>
-        </p:nvSpPr>
-        <p:spPr>
-          <a:xfrm>
-            <a:off x="539552" y="1065096"/>
-            <a:ext cx="7992888" cy="461665"/>
-          </a:xfrm>
-          <a:prstGeom prst="rect">
-            <a:avLst/>
-          </a:prstGeom>
-          <a:noFill/>
-        </p:spPr>
-        <p:txBody>
-          <a:bodyPr wrap="square" rtlCol="0">
-            <a:spAutoFit/>
-          </a:bodyPr>
-          <a:lstStyle/>
-          <a:p>
-            <a:r>
-              <a:rPr lang="en-US" altLang="ko-KR" sz="2400" dirty="0"/>
-              <a:t>LSTM (Long Short-Term Memory)</a:t>
-            </a:r>
-            <a:endParaRPr lang="ko-KR" altLang="en-US" sz="2300" dirty="0"/>
-          </a:p>
-        </p:txBody>
-      </p:sp>
-    </p:spTree>
-    <p:extLst>
-      <p:ext uri="{BB962C8B-B14F-4D97-AF65-F5344CB8AC3E}">
-        <p14:creationId xmlns:p14="http://schemas.microsoft.com/office/powerpoint/2010/main" val="4037620072"/>
-      </p:ext>
-    </p:extLst>
-  </p:cSld>
-  <p:clrMapOvr>
-    <a:masterClrMapping/>
-  </p:clrMapOvr>
-</p:sld>
-</file>
-
-<file path=ppt/slides/slide26.xml><?xml version="1.0" encoding="utf-8"?>
-<p:sld xmlns:a="http://schemas.openxmlformats.org/drawingml/2006/main" xmlns:r="http://schemas.openxmlformats.org/officeDocument/2006/relationships" xmlns:p="http://schemas.openxmlformats.org/presentationml/2006/main">
-  <p:cSld>
-    <p:spTree>
-      <p:nvGrpSpPr>
-        <p:cNvPr id="1" name=""/>
-        <p:cNvGrpSpPr/>
-        <p:nvPr/>
-      </p:nvGrpSpPr>
-      <p:grpSpPr>
-        <a:xfrm>
-          <a:off x="0" y="0"/>
-          <a:ext cx="0" cy="0"/>
-          <a:chOff x="0" y="0"/>
-          <a:chExt cx="0" cy="0"/>
-        </a:xfrm>
-      </p:grpSpPr>
-      <p:sp>
-        <p:nvSpPr>
-          <p:cNvPr id="3" name="타원 2"/>
-          <p:cNvSpPr/>
-          <p:nvPr/>
-        </p:nvSpPr>
-        <p:spPr>
-          <a:xfrm>
-            <a:off x="2627784" y="1298236"/>
-            <a:ext cx="3858956" cy="3858956"/>
-          </a:xfrm>
-          <a:prstGeom prst="ellipse">
-            <a:avLst/>
-          </a:prstGeom>
-          <a:solidFill>
-            <a:schemeClr val="tx2">
-              <a:lumMod val="75000"/>
-            </a:schemeClr>
-          </a:solidFill>
-          <a:ln>
-            <a:noFill/>
-          </a:ln>
-        </p:spPr>
-        <p:style>
-          <a:lnRef idx="2">
-            <a:schemeClr val="accent1">
-              <a:shade val="50000"/>
-            </a:schemeClr>
-          </a:lnRef>
-          <a:fillRef idx="1">
-            <a:schemeClr val="accent1"/>
-          </a:fillRef>
-          <a:effectRef idx="0">
-            <a:schemeClr val="accent1"/>
-          </a:effectRef>
-          <a:fontRef idx="minor">
-            <a:schemeClr val="lt1"/>
-          </a:fontRef>
-        </p:style>
-        <p:txBody>
-          <a:bodyPr rtlCol="0" anchor="ctr"/>
-          <a:lstStyle/>
-          <a:p>
-            <a:pPr algn="ctr"/>
-            <a:endParaRPr lang="ko-KR" altLang="en-US"/>
-          </a:p>
-        </p:txBody>
-      </p:sp>
-      <p:sp>
-        <p:nvSpPr>
-          <p:cNvPr id="7" name="TextBox 6"/>
-          <p:cNvSpPr txBox="1"/>
-          <p:nvPr/>
-        </p:nvSpPr>
-        <p:spPr>
-          <a:xfrm>
-            <a:off x="2627784" y="2971550"/>
-            <a:ext cx="3858956" cy="1169551"/>
-          </a:xfrm>
-          <a:prstGeom prst="rect">
-            <a:avLst/>
-          </a:prstGeom>
-          <a:noFill/>
-        </p:spPr>
-        <p:txBody>
-          <a:bodyPr wrap="square" rtlCol="0">
-            <a:spAutoFit/>
-          </a:bodyPr>
-          <a:lstStyle/>
-          <a:p>
-            <a:pPr algn="ctr"/>
-            <a:r>
-              <a:rPr lang="en-US" altLang="ko-KR" sz="3500" b="1" dirty="0">
-                <a:solidFill>
-                  <a:schemeClr val="bg1"/>
-                </a:solidFill>
-              </a:rPr>
-              <a:t>Transformer </a:t>
-            </a:r>
-            <a:r>
-              <a:rPr lang="ko-KR" altLang="en-US" sz="3500" b="1" dirty="0">
-                <a:solidFill>
-                  <a:schemeClr val="bg1"/>
-                </a:solidFill>
-              </a:rPr>
-              <a:t>기반 </a:t>
-            </a:r>
-            <a:r>
-              <a:rPr lang="ko-KR" altLang="en-US" sz="3500" b="1" dirty="0" err="1">
-                <a:solidFill>
-                  <a:schemeClr val="bg1"/>
-                </a:solidFill>
-              </a:rPr>
-              <a:t>임베딩</a:t>
-            </a:r>
-            <a:endParaRPr lang="ko-KR" altLang="en-US" sz="3500" b="1" dirty="0">
-              <a:solidFill>
-                <a:schemeClr val="bg1"/>
-              </a:solidFill>
-            </a:endParaRPr>
-          </a:p>
-        </p:txBody>
-      </p:sp>
-      <p:sp>
-        <p:nvSpPr>
-          <p:cNvPr id="5" name="직사각형 4"/>
-          <p:cNvSpPr/>
-          <p:nvPr/>
-        </p:nvSpPr>
-        <p:spPr>
-          <a:xfrm>
-            <a:off x="708377" y="271681"/>
-            <a:ext cx="857927" cy="276999"/>
-          </a:xfrm>
-          <a:prstGeom prst="rect">
-            <a:avLst/>
-          </a:prstGeom>
-        </p:spPr>
-        <p:txBody>
-          <a:bodyPr wrap="none">
-            <a:spAutoFit/>
-          </a:bodyPr>
-          <a:lstStyle/>
-          <a:p>
-            <a:pPr algn="ctr"/>
-            <a:r>
-              <a:rPr lang="ko-KR" altLang="en-US" sz="1200" b="1" spc="-150" dirty="0">
-                <a:solidFill>
-                  <a:schemeClr val="bg1"/>
-                </a:solidFill>
-              </a:rPr>
-              <a:t>자연어처리</a:t>
-            </a:r>
-          </a:p>
-        </p:txBody>
-      </p:sp>
-    </p:spTree>
-    <p:extLst>
-      <p:ext uri="{BB962C8B-B14F-4D97-AF65-F5344CB8AC3E}">
-        <p14:creationId xmlns:p14="http://schemas.microsoft.com/office/powerpoint/2010/main" val="621214150"/>
-      </p:ext>
-    </p:extLst>
-  </p:cSld>
-  <p:clrMapOvr>
-    <a:masterClrMapping/>
-  </p:clrMapOvr>
-</p:sld>
-</file>
-
-<file path=ppt/slides/slide27.xml><?xml version="1.0" encoding="utf-8"?>
-<p:sld xmlns:a="http://schemas.openxmlformats.org/drawingml/2006/main" xmlns:r="http://schemas.openxmlformats.org/officeDocument/2006/relationships" xmlns:p="http://schemas.openxmlformats.org/presentationml/2006/main">
-  <p:cSld>
-    <p:spTree>
-      <p:nvGrpSpPr>
-        <p:cNvPr id="1" name=""/>
-        <p:cNvGrpSpPr/>
-        <p:nvPr/>
-      </p:nvGrpSpPr>
-      <p:grpSpPr>
-        <a:xfrm>
-          <a:off x="0" y="0"/>
-          <a:ext cx="0" cy="0"/>
-          <a:chOff x="0" y="0"/>
-          <a:chExt cx="0" cy="0"/>
-        </a:xfrm>
-      </p:grpSpPr>
-      <p:sp>
-        <p:nvSpPr>
-          <p:cNvPr id="3" name="타원 2"/>
-          <p:cNvSpPr/>
-          <p:nvPr/>
-        </p:nvSpPr>
-        <p:spPr>
-          <a:xfrm>
-            <a:off x="4067944" y="74100"/>
-            <a:ext cx="936104" cy="936104"/>
-          </a:xfrm>
-          <a:prstGeom prst="ellipse">
-            <a:avLst/>
-          </a:prstGeom>
-          <a:solidFill>
-            <a:schemeClr val="tx2">
-              <a:lumMod val="75000"/>
-            </a:schemeClr>
-          </a:solidFill>
-          <a:ln>
-            <a:noFill/>
-          </a:ln>
-        </p:spPr>
-        <p:style>
-          <a:lnRef idx="2">
-            <a:schemeClr val="accent1">
-              <a:shade val="50000"/>
-            </a:schemeClr>
-          </a:lnRef>
-          <a:fillRef idx="1">
-            <a:schemeClr val="accent1"/>
-          </a:fillRef>
-          <a:effectRef idx="0">
-            <a:schemeClr val="accent1"/>
-          </a:effectRef>
-          <a:fontRef idx="minor">
-            <a:schemeClr val="lt1"/>
-          </a:fontRef>
-        </p:style>
-        <p:txBody>
-          <a:bodyPr rtlCol="0" anchor="ctr"/>
-          <a:lstStyle/>
-          <a:p>
-            <a:pPr algn="ctr"/>
-            <a:endParaRPr lang="ko-KR" altLang="en-US"/>
-          </a:p>
-        </p:txBody>
-      </p:sp>
-      <p:sp>
-        <p:nvSpPr>
-          <p:cNvPr id="8" name="직사각형 7"/>
-          <p:cNvSpPr/>
-          <p:nvPr/>
-        </p:nvSpPr>
-        <p:spPr>
-          <a:xfrm>
-            <a:off x="708380" y="271681"/>
-            <a:ext cx="857927" cy="276999"/>
-          </a:xfrm>
-          <a:prstGeom prst="rect">
-            <a:avLst/>
-          </a:prstGeom>
-        </p:spPr>
-        <p:txBody>
-          <a:bodyPr wrap="none">
-            <a:spAutoFit/>
-          </a:bodyPr>
-          <a:lstStyle/>
-          <a:p>
-            <a:pPr algn="ctr"/>
-            <a:r>
-              <a:rPr lang="ko-KR" altLang="en-US" sz="1200" b="1" spc="-150" dirty="0">
-                <a:solidFill>
-                  <a:schemeClr val="bg1"/>
-                </a:solidFill>
-              </a:rPr>
-              <a:t>자연어처리</a:t>
-            </a:r>
-            <a:endParaRPr lang="en-US" altLang="ko-KR" sz="1200" b="1" spc="-150" dirty="0">
-              <a:solidFill>
-                <a:schemeClr val="bg1"/>
-              </a:solidFill>
-            </a:endParaRPr>
-          </a:p>
-        </p:txBody>
-      </p:sp>
-      <p:sp>
-        <p:nvSpPr>
-          <p:cNvPr id="9" name="TextBox 8"/>
-          <p:cNvSpPr txBox="1"/>
-          <p:nvPr/>
-        </p:nvSpPr>
-        <p:spPr>
-          <a:xfrm>
-            <a:off x="3995936" y="479095"/>
-            <a:ext cx="1080120" cy="461665"/>
-          </a:xfrm>
-          <a:prstGeom prst="rect">
-            <a:avLst/>
-          </a:prstGeom>
-          <a:noFill/>
-        </p:spPr>
-        <p:txBody>
-          <a:bodyPr wrap="square" rtlCol="0">
-            <a:spAutoFit/>
-          </a:bodyPr>
-          <a:lstStyle/>
-          <a:p>
-            <a:pPr algn="ctr"/>
-            <a:r>
-              <a:rPr lang="en-US" altLang="ko-KR" sz="2400" dirty="0">
-                <a:solidFill>
-                  <a:schemeClr val="bg1"/>
-                </a:solidFill>
-                <a:latin typeface="HY헤드라인M" pitchFamily="18" charset="-127"/>
-                <a:ea typeface="HY헤드라인M" pitchFamily="18" charset="-127"/>
-              </a:rPr>
-              <a:t>01</a:t>
-            </a:r>
-            <a:endParaRPr lang="ko-KR" altLang="en-US" sz="2400" dirty="0">
-              <a:solidFill>
-                <a:schemeClr val="bg1"/>
-              </a:solidFill>
-              <a:latin typeface="HY헤드라인M" pitchFamily="18" charset="-127"/>
-              <a:ea typeface="HY헤드라인M" pitchFamily="18" charset="-127"/>
-            </a:endParaRPr>
-          </a:p>
-        </p:txBody>
-      </p:sp>
-      <p:sp>
-        <p:nvSpPr>
-          <p:cNvPr id="4" name="TextBox 3"/>
-          <p:cNvSpPr txBox="1"/>
-          <p:nvPr/>
-        </p:nvSpPr>
-        <p:spPr>
-          <a:xfrm>
-            <a:off x="971600" y="1700955"/>
             <a:ext cx="7200800" cy="2585323"/>
           </a:xfrm>
           <a:prstGeom prst="rect">
@@ -12383,7 +12022,7 @@
 </p:sld>
 </file>
 
-<file path=ppt/slides/slide28.xml><?xml version="1.0" encoding="utf-8"?>
+<file path=ppt/slides/slide27.xml><?xml version="1.0" encoding="utf-8"?>
 <p:sld xmlns:a="http://schemas.openxmlformats.org/drawingml/2006/main" xmlns:r="http://schemas.openxmlformats.org/officeDocument/2006/relationships" xmlns:p="http://schemas.openxmlformats.org/presentationml/2006/main">
   <p:cSld>
     <p:spTree>
@@ -13427,7 +13066,7 @@
 </p:sld>
 </file>
 
-<file path=ppt/slides/slide29.xml><?xml version="1.0" encoding="utf-8"?>
+<file path=ppt/slides/slide28.xml><?xml version="1.0" encoding="utf-8"?>
 <p:sld xmlns:a="http://schemas.openxmlformats.org/drawingml/2006/main" xmlns:r="http://schemas.openxmlformats.org/officeDocument/2006/relationships" xmlns:p="http://schemas.openxmlformats.org/presentationml/2006/main">
   <p:cSld>
     <p:spTree>
@@ -13697,236 +13336,7 @@
 </p:sld>
 </file>
 
-<file path=ppt/slides/slide3.xml><?xml version="1.0" encoding="utf-8"?>
-<p:sld xmlns:a="http://schemas.openxmlformats.org/drawingml/2006/main" xmlns:r="http://schemas.openxmlformats.org/officeDocument/2006/relationships" xmlns:p="http://schemas.openxmlformats.org/presentationml/2006/main">
-  <p:cSld>
-    <p:spTree>
-      <p:nvGrpSpPr>
-        <p:cNvPr id="1" name=""/>
-        <p:cNvGrpSpPr/>
-        <p:nvPr/>
-      </p:nvGrpSpPr>
-      <p:grpSpPr>
-        <a:xfrm>
-          <a:off x="0" y="0"/>
-          <a:ext cx="0" cy="0"/>
-          <a:chOff x="0" y="0"/>
-          <a:chExt cx="0" cy="0"/>
-        </a:xfrm>
-      </p:grpSpPr>
-      <p:sp>
-        <p:nvSpPr>
-          <p:cNvPr id="3" name="타원 2"/>
-          <p:cNvSpPr/>
-          <p:nvPr/>
-        </p:nvSpPr>
-        <p:spPr>
-          <a:xfrm>
-            <a:off x="4067944" y="74100"/>
-            <a:ext cx="936104" cy="936104"/>
-          </a:xfrm>
-          <a:prstGeom prst="ellipse">
-            <a:avLst/>
-          </a:prstGeom>
-          <a:solidFill>
-            <a:schemeClr val="tx2">
-              <a:lumMod val="75000"/>
-            </a:schemeClr>
-          </a:solidFill>
-          <a:ln>
-            <a:noFill/>
-          </a:ln>
-        </p:spPr>
-        <p:style>
-          <a:lnRef idx="2">
-            <a:schemeClr val="accent1">
-              <a:shade val="50000"/>
-            </a:schemeClr>
-          </a:lnRef>
-          <a:fillRef idx="1">
-            <a:schemeClr val="accent1"/>
-          </a:fillRef>
-          <a:effectRef idx="0">
-            <a:schemeClr val="accent1"/>
-          </a:effectRef>
-          <a:fontRef idx="minor">
-            <a:schemeClr val="lt1"/>
-          </a:fontRef>
-        </p:style>
-        <p:txBody>
-          <a:bodyPr rtlCol="0" anchor="ctr"/>
-          <a:lstStyle/>
-          <a:p>
-            <a:pPr algn="ctr"/>
-            <a:endParaRPr lang="ko-KR" altLang="en-US"/>
-          </a:p>
-        </p:txBody>
-      </p:sp>
-      <p:sp>
-        <p:nvSpPr>
-          <p:cNvPr id="8" name="직사각형 7"/>
-          <p:cNvSpPr/>
-          <p:nvPr/>
-        </p:nvSpPr>
-        <p:spPr>
-          <a:xfrm>
-            <a:off x="708380" y="271681"/>
-            <a:ext cx="857927" cy="276999"/>
-          </a:xfrm>
-          <a:prstGeom prst="rect">
-            <a:avLst/>
-          </a:prstGeom>
-        </p:spPr>
-        <p:txBody>
-          <a:bodyPr wrap="none">
-            <a:spAutoFit/>
-          </a:bodyPr>
-          <a:lstStyle/>
-          <a:p>
-            <a:pPr algn="ctr"/>
-            <a:r>
-              <a:rPr lang="ko-KR" altLang="en-US" sz="1200" b="1" spc="-150" dirty="0">
-                <a:solidFill>
-                  <a:schemeClr val="bg1"/>
-                </a:solidFill>
-              </a:rPr>
-              <a:t>자연어처리</a:t>
-            </a:r>
-            <a:endParaRPr lang="en-US" altLang="ko-KR" sz="1200" b="1" spc="-150" dirty="0">
-              <a:solidFill>
-                <a:schemeClr val="bg1"/>
-              </a:solidFill>
-            </a:endParaRPr>
-          </a:p>
-        </p:txBody>
-      </p:sp>
-      <p:sp>
-        <p:nvSpPr>
-          <p:cNvPr id="9" name="TextBox 8"/>
-          <p:cNvSpPr txBox="1"/>
-          <p:nvPr/>
-        </p:nvSpPr>
-        <p:spPr>
-          <a:xfrm>
-            <a:off x="3995936" y="479095"/>
-            <a:ext cx="1080120" cy="461665"/>
-          </a:xfrm>
-          <a:prstGeom prst="rect">
-            <a:avLst/>
-          </a:prstGeom>
-          <a:noFill/>
-        </p:spPr>
-        <p:txBody>
-          <a:bodyPr wrap="square" rtlCol="0">
-            <a:spAutoFit/>
-          </a:bodyPr>
-          <a:lstStyle/>
-          <a:p>
-            <a:pPr algn="ctr"/>
-            <a:r>
-              <a:rPr lang="en-US" altLang="ko-KR" sz="2400" dirty="0">
-                <a:solidFill>
-                  <a:schemeClr val="bg1"/>
-                </a:solidFill>
-                <a:latin typeface="HY헤드라인M" pitchFamily="18" charset="-127"/>
-                <a:ea typeface="HY헤드라인M" pitchFamily="18" charset="-127"/>
-              </a:rPr>
-              <a:t>01</a:t>
-            </a:r>
-            <a:endParaRPr lang="ko-KR" altLang="en-US" sz="2400" dirty="0">
-              <a:solidFill>
-                <a:schemeClr val="bg1"/>
-              </a:solidFill>
-              <a:latin typeface="HY헤드라인M" pitchFamily="18" charset="-127"/>
-              <a:ea typeface="HY헤드라인M" pitchFamily="18" charset="-127"/>
-            </a:endParaRPr>
-          </a:p>
-        </p:txBody>
-      </p:sp>
-      <p:sp>
-        <p:nvSpPr>
-          <p:cNvPr id="4" name="TextBox 3"/>
-          <p:cNvSpPr txBox="1"/>
-          <p:nvPr/>
-        </p:nvSpPr>
-        <p:spPr>
-          <a:xfrm>
-            <a:off x="971600" y="1700955"/>
-            <a:ext cx="7200800" cy="923330"/>
-          </a:xfrm>
-          <a:prstGeom prst="rect">
-            <a:avLst/>
-          </a:prstGeom>
-          <a:noFill/>
-        </p:spPr>
-        <p:txBody>
-          <a:bodyPr wrap="square" rtlCol="0">
-            <a:spAutoFit/>
-          </a:bodyPr>
-          <a:lstStyle/>
-          <a:p>
-            <a:r>
-              <a:rPr lang="ko-KR" altLang="en-US" dirty="0"/>
-              <a:t>토큰화는 문장을 의미 있는 최소의 단위</a:t>
-            </a:r>
-            <a:r>
-              <a:rPr lang="en-US" altLang="ko-KR" dirty="0"/>
-              <a:t>(token)</a:t>
-            </a:r>
-            <a:r>
-              <a:rPr lang="ko-KR" altLang="en-US" dirty="0"/>
-              <a:t>로 분리하는 과정을 의미</a:t>
-            </a:r>
-            <a:endParaRPr lang="en-US" altLang="ko-KR" dirty="0"/>
-          </a:p>
-          <a:p>
-            <a:endParaRPr lang="en-US" altLang="ko-KR" dirty="0"/>
-          </a:p>
-        </p:txBody>
-      </p:sp>
-      <p:sp>
-        <p:nvSpPr>
-          <p:cNvPr id="6" name="TextBox 5"/>
-          <p:cNvSpPr txBox="1"/>
-          <p:nvPr/>
-        </p:nvSpPr>
-        <p:spPr>
-          <a:xfrm>
-            <a:off x="539552" y="1065096"/>
-            <a:ext cx="7992888" cy="446276"/>
-          </a:xfrm>
-          <a:prstGeom prst="rect">
-            <a:avLst/>
-          </a:prstGeom>
-          <a:noFill/>
-        </p:spPr>
-        <p:txBody>
-          <a:bodyPr wrap="square" rtlCol="0">
-            <a:spAutoFit/>
-          </a:bodyPr>
-          <a:lstStyle/>
-          <a:p>
-            <a:r>
-              <a:rPr lang="ko-KR" altLang="en-US" sz="2300" dirty="0" err="1"/>
-              <a:t>토큰화란</a:t>
-            </a:r>
-            <a:r>
-              <a:rPr lang="en-US" altLang="ko-KR" sz="2300" dirty="0"/>
-              <a:t>?</a:t>
-            </a:r>
-            <a:endParaRPr lang="ko-KR" altLang="en-US" sz="2300" dirty="0"/>
-          </a:p>
-        </p:txBody>
-      </p:sp>
-    </p:spTree>
-  </p:cSld>
-  <p:clrMapOvr>
-    <a:masterClrMapping/>
-  </p:clrMapOvr>
-</p:sld>
-</file>
-
-<file path=ppt/slides/slide30.xml><?xml version="1.0" encoding="utf-8"?>
+<file path=ppt/slides/slide29.xml><?xml version="1.0" encoding="utf-8"?>
 <p:sld xmlns:a="http://schemas.openxmlformats.org/drawingml/2006/main" xmlns:r="http://schemas.openxmlformats.org/officeDocument/2006/relationships" xmlns:p="http://schemas.openxmlformats.org/presentationml/2006/main">
   <p:cSld>
     <p:spTree>
@@ -15495,7 +14905,7 @@
 </p:sld>
 </file>
 
-<file path=ppt/slides/slide31.xml><?xml version="1.0" encoding="utf-8"?>
+<file path=ppt/slides/slide3.xml><?xml version="1.0" encoding="utf-8"?>
 <p:sld xmlns:a="http://schemas.openxmlformats.org/drawingml/2006/main" xmlns:r="http://schemas.openxmlformats.org/officeDocument/2006/relationships" xmlns:p="http://schemas.openxmlformats.org/presentationml/2006/main">
   <p:cSld>
     <p:spTree>
@@ -15650,7 +15060,7 @@
         <p:spPr>
           <a:xfrm>
             <a:off x="971600" y="1700955"/>
-            <a:ext cx="7200800" cy="1200329"/>
+            <a:ext cx="7200800" cy="923330"/>
           </a:xfrm>
           <a:prstGeom prst="rect">
             <a:avLst/>
@@ -15663,76 +15073,21 @@
           </a:bodyPr>
           <a:lstStyle/>
           <a:p>
-            <a:pPr marL="285750" indent="-285750">
-              <a:buFont typeface="Arial" panose="020B0604020202020204" pitchFamily="34" charset="0"/>
-              <a:buChar char="•"/>
-            </a:pPr>
+            <a:r>
+              <a:rPr lang="ko-KR" altLang="en-US" dirty="0"/>
+              <a:t>토큰화는 문장을 의미 있는 최소의 단위</a:t>
+            </a:r>
             <a:r>
               <a:rPr lang="en-US" altLang="ko-KR" dirty="0"/>
-              <a:t>BERT</a:t>
-            </a:r>
-            <a:r>
-              <a:rPr lang="ko-KR" altLang="en-US" dirty="0"/>
-              <a:t>는 문맥</a:t>
-            </a:r>
-            <a:r>
-              <a:rPr lang="en-US" altLang="ko-KR" dirty="0"/>
-              <a:t>(Context)</a:t>
-            </a:r>
-            <a:r>
-              <a:rPr lang="ko-KR" altLang="en-US" dirty="0"/>
-              <a:t>에 따라 단어의 의미가 달라지는 ‘문맥적 </a:t>
-            </a:r>
-            <a:r>
-              <a:rPr lang="ko-KR" altLang="en-US" dirty="0" err="1"/>
-              <a:t>임베딩’을</a:t>
-            </a:r>
-            <a:r>
-              <a:rPr lang="ko-KR" altLang="en-US" dirty="0"/>
-              <a:t> 생성</a:t>
+              <a:t>(token)</a:t>
+            </a:r>
+            <a:r>
+              <a:rPr lang="ko-KR" altLang="en-US" dirty="0"/>
+              <a:t>로 분리하는 과정을 의미</a:t>
             </a:r>
             <a:endParaRPr lang="en-US" altLang="ko-KR" dirty="0"/>
           </a:p>
           <a:p>
-            <a:pPr marL="285750" indent="-285750">
-              <a:buFont typeface="Arial" panose="020B0604020202020204" pitchFamily="34" charset="0"/>
-              <a:buChar char="•"/>
-            </a:pPr>
-            <a:r>
-              <a:rPr lang="en-US" altLang="ko-KR" dirty="0"/>
-              <a:t>Transformer</a:t>
-            </a:r>
-            <a:r>
-              <a:rPr lang="ko-KR" altLang="en-US" dirty="0"/>
-              <a:t>의 </a:t>
-            </a:r>
-            <a:r>
-              <a:rPr lang="en-US" altLang="ko-KR" dirty="0"/>
-              <a:t>Encoder</a:t>
-            </a:r>
-            <a:r>
-              <a:rPr lang="ko-KR" altLang="en-US" dirty="0"/>
-              <a:t>만 사용</a:t>
-            </a:r>
-            <a:endParaRPr lang="en-US" altLang="ko-KR" dirty="0"/>
-          </a:p>
-          <a:p>
-            <a:pPr marL="285750" indent="-285750">
-              <a:buFont typeface="Arial" panose="020B0604020202020204" pitchFamily="34" charset="0"/>
-              <a:buChar char="•"/>
-            </a:pPr>
-            <a:r>
-              <a:rPr lang="ko-KR" altLang="en-US" dirty="0"/>
-              <a:t>문맥을 양방향으로 이해 하기 위해 </a:t>
-            </a:r>
-            <a:r>
-              <a:rPr lang="en-US" altLang="ko-KR" dirty="0"/>
-              <a:t>Bidirectional Encoder</a:t>
-            </a:r>
-            <a:r>
-              <a:rPr lang="ko-KR" altLang="en-US" dirty="0"/>
-              <a:t>을 사용</a:t>
-            </a:r>
             <a:endParaRPr lang="en-US" altLang="ko-KR" dirty="0"/>
           </a:p>
         </p:txBody>
@@ -15746,7 +15101,7 @@
         <p:spPr>
           <a:xfrm>
             <a:off x="539552" y="1065096"/>
-            <a:ext cx="7992888" cy="461665"/>
+            <a:ext cx="7992888" cy="446276"/>
           </a:xfrm>
           <a:prstGeom prst="rect">
             <a:avLst/>
@@ -15760,19 +15115,18 @@
           <a:lstStyle/>
           <a:p>
             <a:r>
-              <a:rPr lang="en-US" altLang="ko-KR" sz="2400" dirty="0"/>
-              <a:t>BERT</a:t>
+              <a:rPr lang="ko-KR" altLang="en-US" sz="2300" dirty="0" err="1"/>
+              <a:t>토큰화란</a:t>
+            </a:r>
+            <a:r>
+              <a:rPr lang="en-US" altLang="ko-KR" sz="2300" dirty="0"/>
+              <a:t>?</a:t>
             </a:r>
             <a:endParaRPr lang="ko-KR" altLang="en-US" sz="2300" dirty="0"/>
           </a:p>
         </p:txBody>
       </p:sp>
     </p:spTree>
-    <p:extLst>
-      <p:ext uri="{BB962C8B-B14F-4D97-AF65-F5344CB8AC3E}">
-        <p14:creationId xmlns:p14="http://schemas.microsoft.com/office/powerpoint/2010/main" val="3909685035"/>
-      </p:ext>
-    </p:extLst>
   </p:cSld>
   <p:clrMapOvr>
     <a:masterClrMapping/>
@@ -15780,7 +15134,7 @@
 </p:sld>
 </file>
 
-<file path=ppt/slides/slide32.xml><?xml version="1.0" encoding="utf-8"?>
+<file path=ppt/slides/slide30.xml><?xml version="1.0" encoding="utf-8"?>
 <p:sld xmlns:a="http://schemas.openxmlformats.org/drawingml/2006/main" xmlns:r="http://schemas.openxmlformats.org/officeDocument/2006/relationships" xmlns:p="http://schemas.openxmlformats.org/presentationml/2006/main">
   <p:cSld>
     <p:spTree>
@@ -15935,7 +15289,7 @@
         <p:spPr>
           <a:xfrm>
             <a:off x="971600" y="1700955"/>
-            <a:ext cx="7200800" cy="2031325"/>
+            <a:ext cx="7200800" cy="1200329"/>
           </a:xfrm>
           <a:prstGeom prst="rect">
             <a:avLst/>
@@ -15954,36 +15308,27 @@
             </a:pPr>
             <a:r>
               <a:rPr lang="en-US" altLang="ko-KR" dirty="0"/>
-              <a:t>MLM</a:t>
-            </a:r>
-          </a:p>
-          <a:p>
-            <a:pPr marL="742950" lvl="1" indent="-285750">
-              <a:buFont typeface="Arial" panose="020B0604020202020204" pitchFamily="34" charset="0"/>
-              <a:buChar char="•"/>
-            </a:pPr>
-            <a:r>
-              <a:rPr lang="ko-KR" altLang="en-US" dirty="0"/>
-              <a:t>문장에서 임의의 단어를 </a:t>
+              <a:t>BERT</a:t>
+            </a:r>
+            <a:r>
+              <a:rPr lang="ko-KR" altLang="en-US" dirty="0"/>
+              <a:t>는 문맥</a:t>
             </a:r>
             <a:r>
               <a:rPr lang="en-US" altLang="ko-KR" dirty="0"/>
-              <a:t>[MASK]</a:t>
-            </a:r>
-            <a:r>
-              <a:rPr lang="ko-KR" altLang="en-US" dirty="0"/>
-              <a:t>로 가리고 해당 단어를 맞추는 과정</a:t>
-            </a:r>
-            <a:endParaRPr lang="en-US" altLang="ko-KR" dirty="0"/>
-          </a:p>
-          <a:p>
-            <a:pPr marL="742950" lvl="1" indent="-285750">
-              <a:buFont typeface="Arial" panose="020B0604020202020204" pitchFamily="34" charset="0"/>
-              <a:buChar char="•"/>
-            </a:pPr>
-            <a:r>
-              <a:rPr lang="ko-KR" altLang="en-US" dirty="0"/>
-              <a:t>양방향 문맥을 모두 고려하려 단어를 이해</a:t>
+              <a:t>(Context)</a:t>
+            </a:r>
+            <a:r>
+              <a:rPr lang="ko-KR" altLang="en-US" dirty="0"/>
+              <a:t>에 따라 단어의 의미가 달라지는 ‘문맥적 </a:t>
+            </a:r>
+            <a:r>
+              <a:rPr lang="ko-KR" altLang="en-US" dirty="0" err="1"/>
+              <a:t>임베딩’을</a:t>
+            </a:r>
+            <a:r>
+              <a:rPr lang="ko-KR" altLang="en-US" dirty="0"/>
+              <a:t> 생성</a:t>
             </a:r>
             <a:endParaRPr lang="en-US" altLang="ko-KR" dirty="0"/>
           </a:p>
@@ -15994,28 +15339,38 @@
             </a:pPr>
             <a:r>
               <a:rPr lang="en-US" altLang="ko-KR" dirty="0"/>
-              <a:t>NSP</a:t>
-            </a:r>
-          </a:p>
-          <a:p>
-            <a:pPr marL="742950" lvl="1" indent="-285750">
+              <a:t>Transformer</a:t>
+            </a:r>
+            <a:r>
+              <a:rPr lang="ko-KR" altLang="en-US" dirty="0"/>
+              <a:t>의 </a:t>
+            </a:r>
+            <a:r>
+              <a:rPr lang="en-US" altLang="ko-KR" dirty="0"/>
+              <a:t>Encoder</a:t>
+            </a:r>
+            <a:r>
+              <a:rPr lang="ko-KR" altLang="en-US" dirty="0"/>
+              <a:t>만 사용</a:t>
+            </a:r>
+            <a:endParaRPr lang="en-US" altLang="ko-KR" dirty="0"/>
+          </a:p>
+          <a:p>
+            <a:pPr marL="285750" indent="-285750">
               <a:buFont typeface="Arial" panose="020B0604020202020204" pitchFamily="34" charset="0"/>
               <a:buChar char="•"/>
             </a:pPr>
             <a:r>
               <a:rPr lang="ko-KR" altLang="en-US" dirty="0"/>
-              <a:t>두 문장이 연속된 문장인지 아닌지를 예측하는 과정</a:t>
-            </a:r>
-            <a:endParaRPr lang="en-US" altLang="ko-KR" dirty="0"/>
-          </a:p>
-          <a:p>
-            <a:pPr marL="742950" lvl="1" indent="-285750">
-              <a:buFont typeface="Arial" panose="020B0604020202020204" pitchFamily="34" charset="0"/>
-              <a:buChar char="•"/>
-            </a:pPr>
-            <a:r>
-              <a:rPr lang="ko-KR" altLang="en-US" dirty="0"/>
-              <a:t>문장 간의 관계 이해 능력을 학습</a:t>
+              <a:t>문맥을 양방향으로 이해 하기 위해 </a:t>
+            </a:r>
+            <a:r>
+              <a:rPr lang="en-US" altLang="ko-KR" dirty="0"/>
+              <a:t>Bidirectional Encoder</a:t>
+            </a:r>
+            <a:r>
+              <a:rPr lang="ko-KR" altLang="en-US" dirty="0"/>
+              <a:t>을 사용</a:t>
             </a:r>
             <a:endParaRPr lang="en-US" altLang="ko-KR" dirty="0"/>
           </a:p>
@@ -16045,11 +15400,7 @@
           <a:p>
             <a:r>
               <a:rPr lang="en-US" altLang="ko-KR" sz="2400" dirty="0"/>
-              <a:t>BERT </a:t>
-            </a:r>
-            <a:r>
-              <a:rPr lang="ko-KR" altLang="en-US" sz="2400" dirty="0"/>
-              <a:t>학습 방식</a:t>
+              <a:t>BERT</a:t>
             </a:r>
             <a:endParaRPr lang="ko-KR" altLang="en-US" sz="2300" dirty="0"/>
           </a:p>
@@ -16058,7 +15409,7 @@
     </p:spTree>
     <p:extLst>
       <p:ext uri="{BB962C8B-B14F-4D97-AF65-F5344CB8AC3E}">
-        <p14:creationId xmlns:p14="http://schemas.microsoft.com/office/powerpoint/2010/main" val="3241362765"/>
+        <p14:creationId xmlns:p14="http://schemas.microsoft.com/office/powerpoint/2010/main" val="3909685035"/>
       </p:ext>
     </p:extLst>
   </p:cSld>
@@ -16068,7 +15419,7 @@
 </p:sld>
 </file>
 
-<file path=ppt/slides/slide33.xml><?xml version="1.0" encoding="utf-8"?>
+<file path=ppt/slides/slide31.xml><?xml version="1.0" encoding="utf-8"?>
 <p:sld xmlns:a="http://schemas.openxmlformats.org/drawingml/2006/main" xmlns:r="http://schemas.openxmlformats.org/officeDocument/2006/relationships" xmlns:p="http://schemas.openxmlformats.org/presentationml/2006/main">
   <p:cSld>
     <p:spTree>
@@ -16242,6 +15593,294 @@
             </a:pPr>
             <a:r>
               <a:rPr lang="en-US" altLang="ko-KR" dirty="0"/>
+              <a:t>MLM</a:t>
+            </a:r>
+          </a:p>
+          <a:p>
+            <a:pPr marL="742950" lvl="1" indent="-285750">
+              <a:buFont typeface="Arial" panose="020B0604020202020204" pitchFamily="34" charset="0"/>
+              <a:buChar char="•"/>
+            </a:pPr>
+            <a:r>
+              <a:rPr lang="ko-KR" altLang="en-US" dirty="0"/>
+              <a:t>문장에서 임의의 단어를 </a:t>
+            </a:r>
+            <a:r>
+              <a:rPr lang="en-US" altLang="ko-KR" dirty="0"/>
+              <a:t>[MASK]</a:t>
+            </a:r>
+            <a:r>
+              <a:rPr lang="ko-KR" altLang="en-US" dirty="0"/>
+              <a:t>로 가리고 해당 단어를 맞추는 과정</a:t>
+            </a:r>
+            <a:endParaRPr lang="en-US" altLang="ko-KR" dirty="0"/>
+          </a:p>
+          <a:p>
+            <a:pPr marL="742950" lvl="1" indent="-285750">
+              <a:buFont typeface="Arial" panose="020B0604020202020204" pitchFamily="34" charset="0"/>
+              <a:buChar char="•"/>
+            </a:pPr>
+            <a:r>
+              <a:rPr lang="ko-KR" altLang="en-US" dirty="0"/>
+              <a:t>양방향 문맥을 모두 고려하려 단어를 이해</a:t>
+            </a:r>
+            <a:endParaRPr lang="en-US" altLang="ko-KR" dirty="0"/>
+          </a:p>
+          <a:p>
+            <a:pPr marL="285750" indent="-285750">
+              <a:buFont typeface="Arial" panose="020B0604020202020204" pitchFamily="34" charset="0"/>
+              <a:buChar char="•"/>
+            </a:pPr>
+            <a:r>
+              <a:rPr lang="en-US" altLang="ko-KR" dirty="0"/>
+              <a:t>NSP</a:t>
+            </a:r>
+          </a:p>
+          <a:p>
+            <a:pPr marL="742950" lvl="1" indent="-285750">
+              <a:buFont typeface="Arial" panose="020B0604020202020204" pitchFamily="34" charset="0"/>
+              <a:buChar char="•"/>
+            </a:pPr>
+            <a:r>
+              <a:rPr lang="ko-KR" altLang="en-US" dirty="0"/>
+              <a:t>두 문장이 연속된 문장인지 아닌지를 예측하는 과정</a:t>
+            </a:r>
+            <a:endParaRPr lang="en-US" altLang="ko-KR" dirty="0"/>
+          </a:p>
+          <a:p>
+            <a:pPr marL="742950" lvl="1" indent="-285750">
+              <a:buFont typeface="Arial" panose="020B0604020202020204" pitchFamily="34" charset="0"/>
+              <a:buChar char="•"/>
+            </a:pPr>
+            <a:r>
+              <a:rPr lang="ko-KR" altLang="en-US" dirty="0"/>
+              <a:t>문장 간의 관계 이해 능력을 학습</a:t>
+            </a:r>
+            <a:endParaRPr lang="en-US" altLang="ko-KR" dirty="0"/>
+          </a:p>
+        </p:txBody>
+      </p:sp>
+      <p:sp>
+        <p:nvSpPr>
+          <p:cNvPr id="6" name="TextBox 5"/>
+          <p:cNvSpPr txBox="1"/>
+          <p:nvPr/>
+        </p:nvSpPr>
+        <p:spPr>
+          <a:xfrm>
+            <a:off x="539552" y="1065096"/>
+            <a:ext cx="7992888" cy="461665"/>
+          </a:xfrm>
+          <a:prstGeom prst="rect">
+            <a:avLst/>
+          </a:prstGeom>
+          <a:noFill/>
+        </p:spPr>
+        <p:txBody>
+          <a:bodyPr wrap="square" rtlCol="0">
+            <a:spAutoFit/>
+          </a:bodyPr>
+          <a:lstStyle/>
+          <a:p>
+            <a:r>
+              <a:rPr lang="en-US" altLang="ko-KR" sz="2400" dirty="0"/>
+              <a:t>BERT </a:t>
+            </a:r>
+            <a:r>
+              <a:rPr lang="ko-KR" altLang="en-US" sz="2400" dirty="0"/>
+              <a:t>학습 방식</a:t>
+            </a:r>
+            <a:endParaRPr lang="ko-KR" altLang="en-US" sz="2300" dirty="0"/>
+          </a:p>
+        </p:txBody>
+      </p:sp>
+    </p:spTree>
+    <p:extLst>
+      <p:ext uri="{BB962C8B-B14F-4D97-AF65-F5344CB8AC3E}">
+        <p14:creationId xmlns:p14="http://schemas.microsoft.com/office/powerpoint/2010/main" val="3241362765"/>
+      </p:ext>
+    </p:extLst>
+  </p:cSld>
+  <p:clrMapOvr>
+    <a:masterClrMapping/>
+  </p:clrMapOvr>
+</p:sld>
+</file>
+
+<file path=ppt/slides/slide32.xml><?xml version="1.0" encoding="utf-8"?>
+<p:sld xmlns:a="http://schemas.openxmlformats.org/drawingml/2006/main" xmlns:r="http://schemas.openxmlformats.org/officeDocument/2006/relationships" xmlns:p="http://schemas.openxmlformats.org/presentationml/2006/main">
+  <p:cSld>
+    <p:spTree>
+      <p:nvGrpSpPr>
+        <p:cNvPr id="1" name=""/>
+        <p:cNvGrpSpPr/>
+        <p:nvPr/>
+      </p:nvGrpSpPr>
+      <p:grpSpPr>
+        <a:xfrm>
+          <a:off x="0" y="0"/>
+          <a:ext cx="0" cy="0"/>
+          <a:chOff x="0" y="0"/>
+          <a:chExt cx="0" cy="0"/>
+        </a:xfrm>
+      </p:grpSpPr>
+      <p:sp>
+        <p:nvSpPr>
+          <p:cNvPr id="3" name="타원 2"/>
+          <p:cNvSpPr/>
+          <p:nvPr/>
+        </p:nvSpPr>
+        <p:spPr>
+          <a:xfrm>
+            <a:off x="4067944" y="74100"/>
+            <a:ext cx="936104" cy="936104"/>
+          </a:xfrm>
+          <a:prstGeom prst="ellipse">
+            <a:avLst/>
+          </a:prstGeom>
+          <a:solidFill>
+            <a:schemeClr val="tx2">
+              <a:lumMod val="75000"/>
+            </a:schemeClr>
+          </a:solidFill>
+          <a:ln>
+            <a:noFill/>
+          </a:ln>
+        </p:spPr>
+        <p:style>
+          <a:lnRef idx="2">
+            <a:schemeClr val="accent1">
+              <a:shade val="50000"/>
+            </a:schemeClr>
+          </a:lnRef>
+          <a:fillRef idx="1">
+            <a:schemeClr val="accent1"/>
+          </a:fillRef>
+          <a:effectRef idx="0">
+            <a:schemeClr val="accent1"/>
+          </a:effectRef>
+          <a:fontRef idx="minor">
+            <a:schemeClr val="lt1"/>
+          </a:fontRef>
+        </p:style>
+        <p:txBody>
+          <a:bodyPr rtlCol="0" anchor="ctr"/>
+          <a:lstStyle/>
+          <a:p>
+            <a:pPr algn="ctr"/>
+            <a:endParaRPr lang="ko-KR" altLang="en-US"/>
+          </a:p>
+        </p:txBody>
+      </p:sp>
+      <p:sp>
+        <p:nvSpPr>
+          <p:cNvPr id="8" name="직사각형 7"/>
+          <p:cNvSpPr/>
+          <p:nvPr/>
+        </p:nvSpPr>
+        <p:spPr>
+          <a:xfrm>
+            <a:off x="708380" y="271681"/>
+            <a:ext cx="857927" cy="276999"/>
+          </a:xfrm>
+          <a:prstGeom prst="rect">
+            <a:avLst/>
+          </a:prstGeom>
+        </p:spPr>
+        <p:txBody>
+          <a:bodyPr wrap="none">
+            <a:spAutoFit/>
+          </a:bodyPr>
+          <a:lstStyle/>
+          <a:p>
+            <a:pPr algn="ctr"/>
+            <a:r>
+              <a:rPr lang="ko-KR" altLang="en-US" sz="1200" b="1" spc="-150" dirty="0">
+                <a:solidFill>
+                  <a:schemeClr val="bg1"/>
+                </a:solidFill>
+              </a:rPr>
+              <a:t>자연어처리</a:t>
+            </a:r>
+            <a:endParaRPr lang="en-US" altLang="ko-KR" sz="1200" b="1" spc="-150" dirty="0">
+              <a:solidFill>
+                <a:schemeClr val="bg1"/>
+              </a:solidFill>
+            </a:endParaRPr>
+          </a:p>
+        </p:txBody>
+      </p:sp>
+      <p:sp>
+        <p:nvSpPr>
+          <p:cNvPr id="9" name="TextBox 8"/>
+          <p:cNvSpPr txBox="1"/>
+          <p:nvPr/>
+        </p:nvSpPr>
+        <p:spPr>
+          <a:xfrm>
+            <a:off x="3995936" y="479095"/>
+            <a:ext cx="1080120" cy="461665"/>
+          </a:xfrm>
+          <a:prstGeom prst="rect">
+            <a:avLst/>
+          </a:prstGeom>
+          <a:noFill/>
+        </p:spPr>
+        <p:txBody>
+          <a:bodyPr wrap="square" rtlCol="0">
+            <a:spAutoFit/>
+          </a:bodyPr>
+          <a:lstStyle/>
+          <a:p>
+            <a:pPr algn="ctr"/>
+            <a:r>
+              <a:rPr lang="en-US" altLang="ko-KR" sz="2400" dirty="0">
+                <a:solidFill>
+                  <a:schemeClr val="bg1"/>
+                </a:solidFill>
+                <a:latin typeface="HY헤드라인M" pitchFamily="18" charset="-127"/>
+                <a:ea typeface="HY헤드라인M" pitchFamily="18" charset="-127"/>
+              </a:rPr>
+              <a:t>01</a:t>
+            </a:r>
+            <a:endParaRPr lang="ko-KR" altLang="en-US" sz="2400" dirty="0">
+              <a:solidFill>
+                <a:schemeClr val="bg1"/>
+              </a:solidFill>
+              <a:latin typeface="HY헤드라인M" pitchFamily="18" charset="-127"/>
+              <a:ea typeface="HY헤드라인M" pitchFamily="18" charset="-127"/>
+            </a:endParaRPr>
+          </a:p>
+        </p:txBody>
+      </p:sp>
+      <p:sp>
+        <p:nvSpPr>
+          <p:cNvPr id="4" name="TextBox 3"/>
+          <p:cNvSpPr txBox="1"/>
+          <p:nvPr/>
+        </p:nvSpPr>
+        <p:spPr>
+          <a:xfrm>
+            <a:off x="971600" y="1700955"/>
+            <a:ext cx="7200800" cy="2031325"/>
+          </a:xfrm>
+          <a:prstGeom prst="rect">
+            <a:avLst/>
+          </a:prstGeom>
+          <a:noFill/>
+        </p:spPr>
+        <p:txBody>
+          <a:bodyPr wrap="square" rtlCol="0">
+            <a:spAutoFit/>
+          </a:bodyPr>
+          <a:lstStyle/>
+          <a:p>
+            <a:pPr marL="285750" indent="-285750">
+              <a:buFont typeface="Arial" panose="020B0604020202020204" pitchFamily="34" charset="0"/>
+              <a:buChar char="•"/>
+            </a:pPr>
+            <a:r>
+              <a:rPr lang="en-US" altLang="ko-KR" dirty="0"/>
               <a:t>Transformer</a:t>
             </a:r>
             <a:r>
@@ -16423,7 +16062,7 @@
 </p:sld>
 </file>
 
-<file path=ppt/slides/slide34.xml><?xml version="1.0" encoding="utf-8"?>
+<file path=ppt/slides/slide33.xml><?xml version="1.0" encoding="utf-8"?>
 <p:sld xmlns:a="http://schemas.openxmlformats.org/drawingml/2006/main" xmlns:r="http://schemas.openxmlformats.org/officeDocument/2006/relationships" xmlns:p="http://schemas.openxmlformats.org/presentationml/2006/main">
   <p:cSld>
     <p:spTree>
@@ -17218,7 +16857,7 @@
         <p:spPr>
           <a:xfrm>
             <a:off x="971600" y="1700955"/>
-            <a:ext cx="7200800" cy="2585323"/>
+            <a:ext cx="7200800" cy="2031325"/>
           </a:xfrm>
           <a:prstGeom prst="rect">
             <a:avLst/>
@@ -17337,32 +16976,6 @@
               <a:rPr lang="ko-KR" altLang="en-US" dirty="0"/>
               <a:t>문제가 심각</a:t>
             </a:r>
-            <a:endParaRPr lang="en-US" altLang="ko-KR" dirty="0"/>
-          </a:p>
-          <a:p>
-            <a:pPr marL="742950" lvl="1" indent="-285750">
-              <a:buFontTx/>
-              <a:buChar char="-"/>
-            </a:pPr>
-            <a:r>
-              <a:rPr lang="ko-KR" altLang="en-US" dirty="0"/>
-              <a:t>긴 의존 </a:t>
-            </a:r>
-            <a:r>
-              <a:rPr lang="ko-KR" altLang="en-US" dirty="0" err="1"/>
-              <a:t>환계는</a:t>
-            </a:r>
-            <a:r>
-              <a:rPr lang="ko-KR" altLang="en-US" dirty="0"/>
-              <a:t> 표현이 불가</a:t>
-            </a:r>
-            <a:endParaRPr lang="en-US" altLang="ko-KR" dirty="0"/>
-          </a:p>
-          <a:p>
-            <a:pPr marL="742950" lvl="1" indent="-285750">
-              <a:buFontTx/>
-              <a:buChar char="-"/>
-            </a:pPr>
             <a:endParaRPr lang="en-US" altLang="ko-KR" dirty="0"/>
           </a:p>
         </p:txBody>
@@ -17564,7 +17177,7 @@
         <p:spPr>
           <a:xfrm>
             <a:off x="971600" y="1700955"/>
-            <a:ext cx="7200800" cy="3693319"/>
+            <a:ext cx="7200800" cy="2031325"/>
           </a:xfrm>
           <a:prstGeom prst="rect">
             <a:avLst/>
@@ -17583,39 +17196,7 @@
             </a:pPr>
             <a:r>
               <a:rPr lang="ko-KR" altLang="en-US" dirty="0"/>
-              <a:t>데이터에서 등장하기 않은 조합</a:t>
-            </a:r>
-            <a:r>
-              <a:rPr lang="en-US" altLang="ko-KR" dirty="0"/>
-              <a:t>(0)</a:t>
-            </a:r>
-            <a:r>
-              <a:rPr lang="ko-KR" altLang="en-US" dirty="0"/>
-              <a:t>이 있을 때 이 확률을 </a:t>
-            </a:r>
-            <a:r>
-              <a:rPr lang="en-US" altLang="ko-KR" dirty="0"/>
-              <a:t>0</a:t>
-            </a:r>
-            <a:r>
-              <a:rPr lang="ko-KR" altLang="en-US" dirty="0"/>
-              <a:t>으로 두면 문장 전체의 확률이 </a:t>
-            </a:r>
-            <a:r>
-              <a:rPr lang="en-US" altLang="ko-KR" dirty="0"/>
-              <a:t>0</a:t>
-            </a:r>
-            <a:r>
-              <a:rPr lang="ko-KR" altLang="en-US" dirty="0"/>
-              <a:t>이 나오는 경우는 방지하기 위해 </a:t>
-            </a:r>
-            <a:r>
-              <a:rPr lang="ko-KR" altLang="en-US" dirty="0" err="1"/>
-              <a:t>스무딩</a:t>
-            </a:r>
-            <a:r>
-              <a:rPr lang="ko-KR" altLang="en-US" dirty="0"/>
-              <a:t> 기법을 사용</a:t>
+              <a:t>단어의 등장 여부나 빈도를 표현하는 방법 </a:t>
             </a:r>
             <a:endParaRPr lang="en-US" altLang="ko-KR" dirty="0"/>
           </a:p>
@@ -17625,9 +17206,64 @@
               <a:buChar char="-"/>
             </a:pPr>
             <a:r>
+              <a:rPr lang="ko-KR" altLang="en-US" dirty="0"/>
+              <a:t>단어가 등장하면 </a:t>
+            </a:r>
+            <a:r>
               <a:rPr lang="en-US" altLang="ko-KR" dirty="0"/>
-              <a:t>Add-One Smoothing</a:t>
-            </a:r>
+              <a:t>1 </a:t>
+            </a:r>
+            <a:r>
+              <a:rPr lang="ko-KR" altLang="en-US" dirty="0"/>
+              <a:t>없으면 </a:t>
+            </a:r>
+            <a:r>
+              <a:rPr lang="en-US" altLang="ko-KR" dirty="0"/>
+              <a:t>0</a:t>
+            </a:r>
+            <a:r>
+              <a:rPr lang="ko-KR" altLang="en-US" dirty="0"/>
+              <a:t>으로 표시하는 </a:t>
+            </a:r>
+            <a:r>
+              <a:rPr lang="en-US" altLang="ko-KR" dirty="0"/>
+              <a:t>Binary </a:t>
+            </a:r>
+            <a:r>
+              <a:rPr lang="ko-KR" altLang="en-US" dirty="0"/>
+              <a:t>방식</a:t>
+            </a:r>
+            <a:endParaRPr lang="en-US" altLang="ko-KR" dirty="0"/>
+          </a:p>
+          <a:p>
+            <a:pPr marL="285750" indent="-285750">
+              <a:buFontTx/>
+              <a:buChar char="-"/>
+            </a:pPr>
+            <a:r>
+              <a:rPr lang="ko-KR" altLang="en-US" dirty="0"/>
+              <a:t>단어의 등장 횟수로 표시하는 </a:t>
+            </a:r>
+            <a:r>
+              <a:rPr lang="en-US" altLang="ko-KR" dirty="0"/>
+              <a:t>Count </a:t>
+            </a:r>
+            <a:r>
+              <a:rPr lang="ko-KR" altLang="en-US" dirty="0"/>
+              <a:t>방식</a:t>
+            </a:r>
+            <a:endParaRPr lang="en-US" altLang="ko-KR" dirty="0"/>
+          </a:p>
+          <a:p>
+            <a:pPr marL="285750" indent="-285750">
+              <a:buFontTx/>
+              <a:buChar char="-"/>
+            </a:pPr>
+            <a:r>
+              <a:rPr lang="ko-KR" altLang="en-US" dirty="0"/>
+              <a:t>장점</a:t>
+            </a:r>
+            <a:endParaRPr lang="en-US" altLang="ko-KR" dirty="0"/>
           </a:p>
           <a:p>
             <a:pPr marL="742950" lvl="1" indent="-285750">
@@ -17636,15 +17272,7 @@
             </a:pPr>
             <a:r>
               <a:rPr lang="ko-KR" altLang="en-US" dirty="0"/>
-              <a:t>모든 빈도에 </a:t>
-            </a:r>
-            <a:r>
-              <a:rPr lang="en-US" altLang="ko-KR" dirty="0"/>
-              <a:t>+1</a:t>
-            </a:r>
-            <a:r>
-              <a:rPr lang="ko-KR" altLang="en-US" dirty="0"/>
-              <a:t>을 더함</a:t>
+              <a:t>구현이 간단하고 직관적이고 빠름</a:t>
             </a:r>
             <a:endParaRPr lang="en-US" altLang="ko-KR" dirty="0"/>
           </a:p>
@@ -17654,9 +17282,10 @@
               <a:buChar char="-"/>
             </a:pPr>
             <a:r>
-              <a:rPr lang="en-US" altLang="ko-KR" dirty="0"/>
-              <a:t>Add-k Smoothing</a:t>
-            </a:r>
+              <a:rPr lang="ko-KR" altLang="en-US" dirty="0"/>
+              <a:t>단점</a:t>
+            </a:r>
+            <a:endParaRPr lang="en-US" altLang="ko-KR" dirty="0"/>
           </a:p>
           <a:p>
             <a:pPr marL="742950" lvl="1" indent="-285750">
@@ -17664,93 +17293,8 @@
               <a:buChar char="-"/>
             </a:pPr>
             <a:r>
-              <a:rPr lang="en-US" altLang="ko-KR" dirty="0"/>
-              <a:t>K</a:t>
-            </a:r>
-            <a:r>
-              <a:rPr lang="ko-KR" altLang="en-US" dirty="0"/>
-              <a:t>는 </a:t>
-            </a:r>
-            <a:r>
-              <a:rPr lang="en-US" altLang="ko-KR" dirty="0"/>
-              <a:t>1</a:t>
-            </a:r>
-            <a:r>
-              <a:rPr lang="ko-KR" altLang="en-US" dirty="0"/>
-              <a:t>보다 작은 상수</a:t>
-            </a:r>
-            <a:endParaRPr lang="en-US" altLang="ko-KR" dirty="0"/>
-          </a:p>
-          <a:p>
-            <a:pPr marL="285750" indent="-285750">
-              <a:buFontTx/>
-              <a:buChar char="-"/>
-            </a:pPr>
-            <a:r>
-              <a:rPr lang="en-US" altLang="ko-KR" dirty="0"/>
-              <a:t>Good-Turing</a:t>
-            </a:r>
-          </a:p>
-          <a:p>
-            <a:pPr marL="742950" lvl="1" indent="-285750">
-              <a:buFontTx/>
-              <a:buChar char="-"/>
-            </a:pPr>
-            <a:r>
-              <a:rPr lang="ko-KR" altLang="en-US" dirty="0"/>
-              <a:t>등장 횟수가 적은 단어의 확률을 재분배</a:t>
-            </a:r>
-            <a:endParaRPr lang="en-US" altLang="ko-KR" dirty="0"/>
-          </a:p>
-          <a:p>
-            <a:pPr marL="285750" indent="-285750">
-              <a:buFontTx/>
-              <a:buChar char="-"/>
-            </a:pPr>
-            <a:r>
-              <a:rPr lang="en-US" altLang="ko-KR" dirty="0" err="1"/>
-              <a:t>Kneser</a:t>
-            </a:r>
-            <a:r>
-              <a:rPr lang="en-US" altLang="ko-KR" dirty="0"/>
-              <a:t>-Ney</a:t>
-            </a:r>
-          </a:p>
-          <a:p>
-            <a:pPr marL="742950" lvl="1" indent="-285750">
-              <a:buFontTx/>
-              <a:buChar char="-"/>
-            </a:pPr>
-            <a:r>
-              <a:rPr lang="en-US" altLang="ko-KR" dirty="0"/>
-              <a:t>N-gram </a:t>
-            </a:r>
-            <a:r>
-              <a:rPr lang="ko-KR" altLang="en-US" dirty="0"/>
-              <a:t>언어 모델에서 가장 성능이 좋은 </a:t>
-            </a:r>
-            <a:r>
-              <a:rPr lang="ko-KR" altLang="en-US" dirty="0" err="1"/>
-              <a:t>스무딩</a:t>
-            </a:r>
-            <a:endParaRPr lang="en-US" altLang="ko-KR" dirty="0"/>
-          </a:p>
-          <a:p>
-            <a:pPr marL="742950" lvl="1" indent="-285750">
-              <a:buFontTx/>
-              <a:buChar char="-"/>
-            </a:pPr>
-            <a:r>
-              <a:rPr lang="ko-KR" altLang="en-US" dirty="0"/>
-              <a:t>단어가 어떤 ‘새로운 문맥</a:t>
-            </a:r>
-            <a:r>
-              <a:rPr lang="en-US" altLang="ko-KR" dirty="0"/>
-              <a:t>(context)’</a:t>
-            </a:r>
-            <a:r>
-              <a:rPr lang="ko-KR" altLang="en-US" dirty="0"/>
-              <a:t>에서 얼마나 자주 등장하는지를 반영해 확률을 보정</a:t>
+              <a:rPr lang="ko-KR" altLang="en-US" dirty="0"/>
+              <a:t>문서의 순서 정보가 사라짐</a:t>
             </a:r>
             <a:endParaRPr lang="en-US" altLang="ko-KR" dirty="0"/>
           </a:p>
@@ -17765,7 +17309,7 @@
         <p:spPr>
           <a:xfrm>
             <a:off x="539552" y="1065096"/>
-            <a:ext cx="7992888" cy="461665"/>
+            <a:ext cx="7992888" cy="446276"/>
           </a:xfrm>
           <a:prstGeom prst="rect">
             <a:avLst/>
@@ -17779,21 +17323,24 @@
           <a:lstStyle/>
           <a:p>
             <a:r>
-              <a:rPr lang="ko-KR" altLang="en-US" sz="2400" dirty="0" err="1"/>
-              <a:t>스무딩</a:t>
-            </a:r>
-            <a:r>
-              <a:rPr lang="en-US" altLang="ko-KR" sz="2400" dirty="0"/>
-              <a:t>(Smoothing)</a:t>
-            </a:r>
-            <a:endParaRPr lang="en-US" altLang="ko-KR" sz="2300" dirty="0"/>
+              <a:rPr lang="en-US" altLang="ko-KR" sz="2300" dirty="0"/>
+              <a:t>Bag of Words(</a:t>
+            </a:r>
+            <a:r>
+              <a:rPr lang="en-US" altLang="ko-KR" sz="2300" dirty="0" err="1"/>
+              <a:t>BoW</a:t>
+            </a:r>
+            <a:r>
+              <a:rPr lang="en-US" altLang="ko-KR" sz="2300" dirty="0"/>
+              <a:t>)</a:t>
+            </a:r>
           </a:p>
         </p:txBody>
       </p:sp>
     </p:spTree>
     <p:extLst>
       <p:ext uri="{BB962C8B-B14F-4D97-AF65-F5344CB8AC3E}">
-        <p14:creationId xmlns:p14="http://schemas.microsoft.com/office/powerpoint/2010/main" val="1577041415"/>
+        <p14:creationId xmlns:p14="http://schemas.microsoft.com/office/powerpoint/2010/main" val="3510924700"/>
       </p:ext>
     </p:extLst>
   </p:cSld>
@@ -17977,7 +17524,7 @@
             </a:pPr>
             <a:r>
               <a:rPr lang="ko-KR" altLang="en-US" dirty="0"/>
-              <a:t>단어의 등장 여부나 빈도를 표현하는 방법 </a:t>
+              <a:t>문서 내에서 자주 등장하지만 다른 문서에서는 드물게 등장하는 단어에 높은 가중치를 부여하는 방식</a:t>
             </a:r>
             <a:endParaRPr lang="en-US" altLang="ko-KR" dirty="0"/>
           </a:p>
@@ -17987,32 +17534,18 @@
               <a:buChar char="-"/>
             </a:pPr>
             <a:r>
-              <a:rPr lang="ko-KR" altLang="en-US" dirty="0"/>
-              <a:t>단어가 등장하면 </a:t>
-            </a:r>
-            <a:r>
               <a:rPr lang="en-US" altLang="ko-KR" dirty="0"/>
-              <a:t>1 </a:t>
-            </a:r>
-            <a:r>
-              <a:rPr lang="ko-KR" altLang="en-US" dirty="0"/>
-              <a:t>없으면 </a:t>
-            </a:r>
-            <a:r>
-              <a:rPr lang="en-US" altLang="ko-KR" dirty="0"/>
-              <a:t>0</a:t>
-            </a:r>
-            <a:r>
-              <a:rPr lang="ko-KR" altLang="en-US" dirty="0"/>
-              <a:t>으로 표시하는 </a:t>
-            </a:r>
-            <a:r>
-              <a:rPr lang="en-US" altLang="ko-KR" dirty="0"/>
-              <a:t>Binary </a:t>
-            </a:r>
-            <a:r>
-              <a:rPr lang="ko-KR" altLang="en-US" dirty="0"/>
-              <a:t>방식</a:t>
+              <a:t>TF</a:t>
+            </a:r>
+          </a:p>
+          <a:p>
+            <a:pPr marL="742950" lvl="1" indent="-285750">
+              <a:buFontTx/>
+              <a:buChar char="-"/>
+            </a:pPr>
+            <a:r>
+              <a:rPr lang="ko-KR" altLang="en-US" dirty="0"/>
+              <a:t>한 문서에서 얼마나 자주 등장하는가</a:t>
             </a:r>
             <a:endParaRPr lang="en-US" altLang="ko-KR" dirty="0"/>
           </a:p>
@@ -18022,16 +17555,18 @@
               <a:buChar char="-"/>
             </a:pPr>
             <a:r>
-              <a:rPr lang="ko-KR" altLang="en-US" dirty="0"/>
-              <a:t>단어의 등장 횟수로 표시하는 </a:t>
-            </a:r>
-            <a:r>
               <a:rPr lang="en-US" altLang="ko-KR" dirty="0"/>
-              <a:t>Count </a:t>
-            </a:r>
-            <a:r>
-              <a:rPr lang="ko-KR" altLang="en-US" dirty="0"/>
-              <a:t>방식</a:t>
+              <a:t>IDF</a:t>
+            </a:r>
+          </a:p>
+          <a:p>
+            <a:pPr marL="742950" lvl="1" indent="-285750">
+              <a:buFontTx/>
+              <a:buChar char="-"/>
+            </a:pPr>
+            <a:r>
+              <a:rPr lang="ko-KR" altLang="en-US" dirty="0"/>
+              <a:t>전체 문서 중 얼마나 희귀한 단어인가</a:t>
             </a:r>
             <a:endParaRPr lang="en-US" altLang="ko-KR" dirty="0"/>
           </a:p>
@@ -18042,40 +17577,7 @@
             </a:pPr>
             <a:r>
               <a:rPr lang="ko-KR" altLang="en-US" dirty="0"/>
-              <a:t>장점</a:t>
-            </a:r>
-            <a:endParaRPr lang="en-US" altLang="ko-KR" dirty="0"/>
-          </a:p>
-          <a:p>
-            <a:pPr marL="742950" lvl="1" indent="-285750">
-              <a:buFontTx/>
-              <a:buChar char="-"/>
-            </a:pPr>
-            <a:r>
-              <a:rPr lang="ko-KR" altLang="en-US" dirty="0"/>
-              <a:t>구현이 간단하고 직관적이고 빠름</a:t>
-            </a:r>
-            <a:endParaRPr lang="en-US" altLang="ko-KR" dirty="0"/>
-          </a:p>
-          <a:p>
-            <a:pPr marL="285750" indent="-285750">
-              <a:buFontTx/>
-              <a:buChar char="-"/>
-            </a:pPr>
-            <a:r>
-              <a:rPr lang="ko-KR" altLang="en-US" dirty="0"/>
-              <a:t>단점</a:t>
-            </a:r>
-            <a:endParaRPr lang="en-US" altLang="ko-KR" dirty="0"/>
-          </a:p>
-          <a:p>
-            <a:pPr marL="742950" lvl="1" indent="-285750">
-              <a:buFontTx/>
-              <a:buChar char="-"/>
-            </a:pPr>
-            <a:r>
-              <a:rPr lang="ko-KR" altLang="en-US" dirty="0"/>
-              <a:t>문서의 순서 정보가 사라짐</a:t>
+              <a:t>단어의 상대적인 중요도를 수치화한 통계적인 표현 기법</a:t>
             </a:r>
             <a:endParaRPr lang="en-US" altLang="ko-KR" dirty="0"/>
           </a:p>
@@ -18105,15 +17607,7 @@
           <a:p>
             <a:r>
               <a:rPr lang="en-US" altLang="ko-KR" sz="2300" dirty="0"/>
-              <a:t>Bag of Words(</a:t>
-            </a:r>
-            <a:r>
-              <a:rPr lang="en-US" altLang="ko-KR" sz="2300" dirty="0" err="1"/>
-              <a:t>BoW</a:t>
-            </a:r>
-            <a:r>
-              <a:rPr lang="en-US" altLang="ko-KR" sz="2300" dirty="0"/>
-              <a:t>)</a:t>
+              <a:t>TF-IDF(Term Frequency – Inverse Document Frequency)</a:t>
             </a:r>
           </a:p>
         </p:txBody>
@@ -18121,7 +17615,7 @@
     </p:spTree>
     <p:extLst>
       <p:ext uri="{BB962C8B-B14F-4D97-AF65-F5344CB8AC3E}">
-        <p14:creationId xmlns:p14="http://schemas.microsoft.com/office/powerpoint/2010/main" val="3510924700"/>
+        <p14:creationId xmlns:p14="http://schemas.microsoft.com/office/powerpoint/2010/main" val="3303034275"/>
       </p:ext>
     </p:extLst>
   </p:cSld>
@@ -18286,7 +17780,7 @@
         <p:spPr>
           <a:xfrm>
             <a:off x="971600" y="1700955"/>
-            <a:ext cx="7200800" cy="2031325"/>
+            <a:ext cx="7200800" cy="1200329"/>
           </a:xfrm>
           <a:prstGeom prst="rect">
             <a:avLst/>
@@ -18305,7 +17799,7 @@
             </a:pPr>
             <a:r>
               <a:rPr lang="ko-KR" altLang="en-US" dirty="0"/>
-              <a:t>문서 내에서 자주 등장하지만 다른 문서에서는 드물게 등장하는 단어에 높은 가중치를 부여하는 방식</a:t>
+              <a:t>단어가 문맥 내에서 함께 등장하는 빈도를 기반으로 단어 간 의미적 연관성을 수치화 한 행렬</a:t>
             </a:r>
             <a:endParaRPr lang="en-US" altLang="ko-KR" dirty="0"/>
           </a:p>
@@ -18315,18 +17809,8 @@
               <a:buChar char="-"/>
             </a:pPr>
             <a:r>
-              <a:rPr lang="en-US" altLang="ko-KR" dirty="0"/>
-              <a:t>TF</a:t>
-            </a:r>
-          </a:p>
-          <a:p>
-            <a:pPr marL="742950" lvl="1" indent="-285750">
-              <a:buFontTx/>
-              <a:buChar char="-"/>
-            </a:pPr>
-            <a:r>
-              <a:rPr lang="ko-KR" altLang="en-US" dirty="0"/>
-              <a:t>한 문서에서 얼마나 자주 등장하는가</a:t>
+              <a:rPr lang="ko-KR" altLang="en-US" dirty="0"/>
+              <a:t>어떠한 단어가 어떤 단어와 자주 같이 등장하는가</a:t>
             </a:r>
             <a:endParaRPr lang="en-US" altLang="ko-KR" dirty="0"/>
           </a:p>
@@ -18336,29 +17820,8 @@
               <a:buChar char="-"/>
             </a:pPr>
             <a:r>
-              <a:rPr lang="en-US" altLang="ko-KR" dirty="0"/>
-              <a:t>IDF</a:t>
-            </a:r>
-          </a:p>
-          <a:p>
-            <a:pPr marL="742950" lvl="1" indent="-285750">
-              <a:buFontTx/>
-              <a:buChar char="-"/>
-            </a:pPr>
-            <a:r>
-              <a:rPr lang="ko-KR" altLang="en-US" dirty="0"/>
-              <a:t>전체 문서 중 얼마나 희귀한 단어인가</a:t>
-            </a:r>
-            <a:endParaRPr lang="en-US" altLang="ko-KR" dirty="0"/>
-          </a:p>
-          <a:p>
-            <a:pPr marL="285750" indent="-285750">
-              <a:buFontTx/>
-              <a:buChar char="-"/>
-            </a:pPr>
-            <a:r>
-              <a:rPr lang="ko-KR" altLang="en-US" dirty="0"/>
-              <a:t>단어의 상대적인 중요도를 수치화한 통계적인 표현 기법</a:t>
+              <a:rPr lang="ko-KR" altLang="en-US" dirty="0"/>
+              <a:t>문맥의 정보를 확인할 수 있는 기법</a:t>
             </a:r>
             <a:endParaRPr lang="en-US" altLang="ko-KR" dirty="0"/>
           </a:p>
@@ -18373,7 +17836,7 @@
         <p:spPr>
           <a:xfrm>
             <a:off x="539552" y="1065096"/>
-            <a:ext cx="7992888" cy="446276"/>
+            <a:ext cx="7992888" cy="461665"/>
           </a:xfrm>
           <a:prstGeom prst="rect">
             <a:avLst/>
@@ -18387,16 +17850,21 @@
           <a:lstStyle/>
           <a:p>
             <a:r>
-              <a:rPr lang="en-US" altLang="ko-KR" sz="2300" dirty="0"/>
-              <a:t>TF-IDF(Term Frequency – Inverse Document Frequency)</a:t>
-            </a:r>
+              <a:rPr lang="ko-KR" altLang="en-US" sz="2400" dirty="0"/>
+              <a:t>동시 출현 행렬</a:t>
+            </a:r>
+            <a:r>
+              <a:rPr lang="en-US" altLang="ko-KR" sz="2400" dirty="0"/>
+              <a:t>(Co-occurrence Matrix)</a:t>
+            </a:r>
+            <a:endParaRPr lang="en-US" altLang="ko-KR" sz="2300" dirty="0"/>
           </a:p>
         </p:txBody>
       </p:sp>
     </p:spTree>
     <p:extLst>
       <p:ext uri="{BB962C8B-B14F-4D97-AF65-F5344CB8AC3E}">
-        <p14:creationId xmlns:p14="http://schemas.microsoft.com/office/powerpoint/2010/main" val="3303034275"/>
+        <p14:creationId xmlns:p14="http://schemas.microsoft.com/office/powerpoint/2010/main" val="496208521"/>
       </p:ext>
     </p:extLst>
   </p:cSld>
